--- a/合作方案_AI云计算产业生态共同体.pptx
+++ b/合作方案_AI云计算产业生态共同体.pptx
@@ -17,6 +17,8 @@
     <p:sldId id="265" r:id="rId16"/>
     <p:sldId id="266" r:id="rId17"/>
     <p:sldId id="267" r:id="rId18"/>
+    <p:sldId id="268" r:id="rId19"/>
+    <p:sldId id="269" r:id="rId20"/>
   </p:sldIdLst>
   <p:sldSz cx="12191695" cy="6858000" type="screen4x3"/>
   <p:notesSz cx="6858000" cy="9144000"/>
@@ -3334,7 +3336,7 @@
         </p:nvSpPr>
         <p:spPr>
           <a:xfrm>
-            <a:off x="640080" y="1554480"/>
+            <a:off x="640080" y="1417320"/>
             <a:ext cx="10607040" cy="2194560"/>
           </a:xfrm>
           <a:prstGeom prst="rect">
@@ -3350,41 +3352,41 @@
           <a:p>
             <a:pPr algn="l">
               <a:lnSpc>
-                <a:spcPct val="105000"/>
+                <a:spcPct val="102000"/>
               </a:lnSpc>
               <a:spcAft>
                 <a:spcPts val="800"/>
               </a:spcAft>
             </a:pPr>
             <a:r>
-              <a:rPr sz="5000" b="1">
+              <a:rPr sz="4800" b="1">
                 <a:solidFill>
                   <a:srgbClr val="FFFFFF"/>
                 </a:solidFill>
                 <a:latin typeface="微软雅黑"/>
                 <a:ea typeface="微软雅黑"/>
               </a:rPr>
-              <a:t>四方联动</a:t>
+              <a:t>五方共建</a:t>
             </a:r>
           </a:p>
           <a:p>
             <a:pPr algn="l">
               <a:lnSpc>
-                <a:spcPct val="105000"/>
+                <a:spcPct val="102000"/>
               </a:lnSpc>
               <a:spcAft>
                 <a:spcPts val="800"/>
               </a:spcAft>
             </a:pPr>
             <a:r>
-              <a:rPr sz="4000" b="1">
+              <a:rPr sz="3800" b="1">
                 <a:solidFill>
                   <a:srgbClr val="FFFFFF"/>
                 </a:solidFill>
                 <a:latin typeface="微软雅黑"/>
                 <a:ea typeface="微软雅黑"/>
               </a:rPr>
-              <a:t>共建 “AI + 云计算” 产业生态共同体</a:t>
+              <a:t>“AI + 云计算” 产业生态共同体</a:t>
             </a:r>
           </a:p>
         </p:txBody>
@@ -3397,7 +3399,7 @@
         </p:nvSpPr>
         <p:spPr>
           <a:xfrm>
-            <a:off x="685800" y="3657600"/>
+            <a:off x="685800" y="3474720"/>
             <a:ext cx="3291840" cy="45720"/>
           </a:xfrm>
           <a:prstGeom prst="rect">
@@ -3441,8 +3443,8 @@
         </p:nvSpPr>
         <p:spPr>
           <a:xfrm>
-            <a:off x="640080" y="3840480"/>
-            <a:ext cx="10789920" cy="1097280"/>
+            <a:off x="640080" y="3639312"/>
+            <a:ext cx="10881360" cy="1371600"/>
           </a:xfrm>
           <a:prstGeom prst="rect">
             <a:avLst/>
@@ -3460,11 +3462,11 @@
                 <a:spcPct val="105000"/>
               </a:lnSpc>
               <a:spcAft>
-                <a:spcPts val="600"/>
-              </a:spcAft>
-            </a:pPr>
-            <a:r>
-              <a:rPr sz="1600" b="0">
+                <a:spcPts val="500"/>
+              </a:spcAft>
+            </a:pPr>
+            <a:r>
+              <a:rPr sz="1500" b="0">
                 <a:solidFill>
                   <a:srgbClr val="E8EEF6"/>
                 </a:solidFill>
@@ -3480,18 +3482,38 @@
                 <a:spcPct val="105000"/>
               </a:lnSpc>
               <a:spcAft>
-                <a:spcPts val="600"/>
-              </a:spcAft>
-            </a:pPr>
-            <a:r>
-              <a:rPr sz="1600" b="1">
+                <a:spcPts val="500"/>
+              </a:spcAft>
+            </a:pPr>
+            <a:r>
+              <a:rPr sz="1500" b="1">
                 <a:solidFill>
                   <a:srgbClr val="F2B632"/>
                 </a:solidFill>
                 <a:latin typeface="微软雅黑"/>
                 <a:ea typeface="微软雅黑"/>
               </a:rPr>
-              <a:t>聚焦两大诉求：轻资产拓展  ×  招商对接</a:t>
+              <a:t>两大诉求：轻资产拓展 × 招商对接</a:t>
+            </a:r>
+          </a:p>
+          <a:p>
+            <a:pPr algn="l">
+              <a:lnSpc>
+                <a:spcPct val="105000"/>
+              </a:lnSpc>
+              <a:spcAft>
+                <a:spcPts val="500"/>
+              </a:spcAft>
+            </a:pPr>
+            <a:r>
+              <a:rPr sz="1500" b="1">
+                <a:solidFill>
+                  <a:srgbClr val="16B8C6"/>
+                </a:solidFill>
+                <a:latin typeface="微软雅黑"/>
+                <a:ea typeface="微软雅黑"/>
+              </a:rPr>
+              <a:t>新引擎：腾讯云算力底座 + OPC 超级孵化闭环 → 产业闭环</a:t>
             </a:r>
           </a:p>
         </p:txBody>
@@ -3504,8 +3526,8 @@
         </p:nvSpPr>
         <p:spPr>
           <a:xfrm>
-            <a:off x="640080" y="5943600"/>
-            <a:ext cx="10972800" cy="548640"/>
+            <a:off x="640080" y="5897880"/>
+            <a:ext cx="11155680" cy="731520"/>
           </a:xfrm>
           <a:prstGeom prst="rect">
             <a:avLst/>
@@ -3534,7 +3556,7 @@
                 <a:latin typeface="微软雅黑"/>
                 <a:ea typeface="微软雅黑"/>
               </a:rPr>
-              <a:t>复旦大学住房政策研究中心  ·  人工智能商业化落地组委会  ·  上海市杨浦区科技企业联合会</a:t>
+              <a:t>复旦大学住房政策研究中心 · 人工智能商业化落地组委会 · 上海市杨浦区科技企业联合会 · 腾讯云</a:t>
             </a:r>
           </a:p>
         </p:txBody>
@@ -3735,7 +3757,7 @@
                 <a:latin typeface="微软雅黑"/>
                 <a:ea typeface="微软雅黑"/>
               </a:rPr>
-              <a:t>BUSINESS MODEL · 收益结构</a:t>
+              <a:t>运营引流 · 治本之策</a:t>
             </a:r>
           </a:p>
           <a:p>
@@ -3755,7 +3777,7 @@
                 <a:latin typeface="微软雅黑"/>
                 <a:ea typeface="微软雅黑"/>
               </a:rPr>
-              <a:t>合作分工 × 收益模式：拿到“运营权 + 导入权”</a:t>
+              <a:t>内容 + 活动引流：空间是容器，没有内容必然空置</a:t>
             </a:r>
           </a:p>
         </p:txBody>
@@ -3798,651 +3820,27 @@
                 <a:latin typeface="微软雅黑"/>
                 <a:ea typeface="微软雅黑"/>
               </a:rPr>
-              <a:t>08</a:t>
-            </a:r>
-          </a:p>
-        </p:txBody>
-      </p:sp>
-      <p:sp>
-        <p:nvSpPr>
-          <p:cNvPr id="7" name="TextBox 6"/>
-          <p:cNvSpPr txBox="1"/>
-          <p:nvPr/>
-        </p:nvSpPr>
-        <p:spPr>
-          <a:xfrm>
-            <a:off x="502920" y="1371600"/>
-            <a:ext cx="5486400" cy="365760"/>
-          </a:xfrm>
-          <a:prstGeom prst="rect">
-            <a:avLst/>
-          </a:prstGeom>
-          <a:noFill/>
-        </p:spPr>
-        <p:txBody>
-          <a:bodyPr wrap="square" anchor="t">
-            <a:spAutoFit/>
-          </a:bodyPr>
-          <a:lstStyle/>
-          <a:p>
-            <a:pPr algn="l">
-              <a:lnSpc>
-                <a:spcPct val="105000"/>
-              </a:lnSpc>
-              <a:spcAft>
-                <a:spcPts val="600"/>
-              </a:spcAft>
-            </a:pPr>
-            <a:r>
-              <a:rPr sz="1400" b="1">
-                <a:solidFill>
-                  <a:srgbClr val="1B4F9C"/>
-                </a:solidFill>
-                <a:latin typeface="微软雅黑"/>
-                <a:ea typeface="微软雅黑"/>
-              </a:rPr>
-              <a:t>合作分工</a:t>
-            </a:r>
-          </a:p>
-        </p:txBody>
-      </p:sp>
-      <p:graphicFrame>
-        <p:nvGraphicFramePr>
-          <p:cNvPr id="8" name="Table 7"/>
-          <p:cNvGraphicFramePr>
-            <a:graphicFrameLocks noGrp="1"/>
-          </p:cNvGraphicFramePr>
-          <p:nvPr/>
-        </p:nvGraphicFramePr>
-        <p:xfrm>
-          <a:off x="502920" y="1783080"/>
-          <a:ext cx="5486400" cy="2926080"/>
-        </p:xfrm>
-        <a:graphic>
-          <a:graphicData uri="http://schemas.openxmlformats.org/drawingml/2006/table">
-            <a:tbl>
-              <a:tblPr firstRow="1" bandRow="1">
-                <a:tableStyleId>{5C22544A-7EE6-4342-B048-85BDC9FD1C3A}</a:tableStyleId>
-              </a:tblPr>
-              <a:tblGrid>
-                <a:gridCol w="1188720"/>
-                <a:gridCol w="2148840"/>
-                <a:gridCol w="2148840"/>
-              </a:tblGrid>
-              <a:tr h="585216">
-                <a:tc>
-                  <a:txBody>
-                    <a:bodyPr/>
-                    <a:lstStyle/>
-                    <a:p>
-                      <a:r>
-                        <a:rPr sz="1300" b="1">
-                          <a:solidFill>
-                            <a:srgbClr val="FFFFFF"/>
-                          </a:solidFill>
-                          <a:latin typeface="微软雅黑"/>
-                        </a:rPr>
-                        <a:t>模块</a:t>
-                      </a:r>
-                    </a:p>
-                  </a:txBody>
-                  <a:tcPr anchor="ctr" marL="91440" marR="73152" marT="36576" marB="36576">
-                    <a:solidFill>
-                      <a:srgbClr val="1B4F9C"/>
-                    </a:solidFill>
-                  </a:tcPr>
-                </a:tc>
-                <a:tc>
-                  <a:txBody>
-                    <a:bodyPr/>
-                    <a:lstStyle/>
-                    <a:p>
-                      <a:r>
-                        <a:rPr sz="1300" b="1">
-                          <a:solidFill>
-                            <a:srgbClr val="FFFFFF"/>
-                          </a:solidFill>
-                          <a:latin typeface="微软雅黑"/>
-                        </a:rPr>
-                        <a:t>对方（云基地）</a:t>
-                      </a:r>
-                    </a:p>
-                  </a:txBody>
-                  <a:tcPr anchor="ctr" marL="91440" marR="73152" marT="36576" marB="36576">
-                    <a:solidFill>
-                      <a:srgbClr val="1B4F9C"/>
-                    </a:solidFill>
-                  </a:tcPr>
-                </a:tc>
-                <a:tc>
-                  <a:txBody>
-                    <a:bodyPr/>
-                    <a:lstStyle/>
-                    <a:p>
-                      <a:r>
-                        <a:rPr sz="1300" b="1">
-                          <a:solidFill>
-                            <a:srgbClr val="FFFFFF"/>
-                          </a:solidFill>
-                          <a:latin typeface="微软雅黑"/>
-                        </a:rPr>
-                        <a:t>我们</a:t>
-                      </a:r>
-                    </a:p>
-                  </a:txBody>
-                  <a:tcPr anchor="ctr" marL="91440" marR="73152" marT="36576" marB="36576">
-                    <a:solidFill>
-                      <a:srgbClr val="1B4F9C"/>
-                    </a:solidFill>
-                  </a:tcPr>
-                </a:tc>
-              </a:tr>
-              <a:tr h="585216">
-                <a:tc>
-                  <a:txBody>
-                    <a:bodyPr/>
-                    <a:lstStyle/>
-                    <a:p>
-                      <a:r>
-                        <a:rPr sz="1250">
-                          <a:solidFill>
-                            <a:srgbClr val="1A2638"/>
-                          </a:solidFill>
-                          <a:latin typeface="微软雅黑"/>
-                        </a:rPr>
-                        <a:t>空间</a:t>
-                      </a:r>
-                    </a:p>
-                  </a:txBody>
-                  <a:tcPr anchor="ctr" marL="91440" marR="73152" marT="36576" marB="36576">
-                    <a:solidFill>
-                      <a:srgbClr val="FFFFFF"/>
-                    </a:solidFill>
-                  </a:tcPr>
-                </a:tc>
-                <a:tc>
-                  <a:txBody>
-                    <a:bodyPr/>
-                    <a:lstStyle/>
-                    <a:p>
-                      <a:r>
-                        <a:rPr sz="1250">
-                          <a:solidFill>
-                            <a:srgbClr val="1A2638"/>
-                          </a:solidFill>
-                          <a:latin typeface="微软雅黑"/>
-                        </a:rPr>
-                        <a:t>提供物业</a:t>
-                      </a:r>
-                    </a:p>
-                  </a:txBody>
-                  <a:tcPr anchor="ctr" marL="91440" marR="73152" marT="36576" marB="36576">
-                    <a:solidFill>
-                      <a:srgbClr val="FFFFFF"/>
-                    </a:solidFill>
-                  </a:tcPr>
-                </a:tc>
-                <a:tc>
-                  <a:txBody>
-                    <a:bodyPr/>
-                    <a:lstStyle/>
-                    <a:p>
-                      <a:r>
-                        <a:rPr sz="1250">
-                          <a:solidFill>
-                            <a:srgbClr val="1A2638"/>
-                          </a:solidFill>
-                          <a:latin typeface="微软雅黑"/>
-                        </a:rPr>
-                        <a:t>选址 + 定位</a:t>
-                      </a:r>
-                    </a:p>
-                  </a:txBody>
-                  <a:tcPr anchor="ctr" marL="91440" marR="73152" marT="36576" marB="36576">
-                    <a:solidFill>
-                      <a:srgbClr val="FFFFFF"/>
-                    </a:solidFill>
-                  </a:tcPr>
-                </a:tc>
-              </a:tr>
-              <a:tr h="585216">
-                <a:tc>
-                  <a:txBody>
-                    <a:bodyPr/>
-                    <a:lstStyle/>
-                    <a:p>
-                      <a:r>
-                        <a:rPr sz="1250">
-                          <a:solidFill>
-                            <a:srgbClr val="1A2638"/>
-                          </a:solidFill>
-                          <a:latin typeface="微软雅黑"/>
-                        </a:rPr>
-                        <a:t>招商</a:t>
-                      </a:r>
-                    </a:p>
-                  </a:txBody>
-                  <a:tcPr anchor="ctr" marL="91440" marR="73152" marT="36576" marB="36576">
-                    <a:solidFill>
-                      <a:srgbClr val="EDF2F9"/>
-                    </a:solidFill>
-                  </a:tcPr>
-                </a:tc>
-                <a:tc>
-                  <a:txBody>
-                    <a:bodyPr/>
-                    <a:lstStyle/>
-                    <a:p>
-                      <a:r>
-                        <a:rPr sz="1250">
-                          <a:solidFill>
-                            <a:srgbClr val="1A2638"/>
-                          </a:solidFill>
-                          <a:latin typeface="微软雅黑"/>
-                        </a:rPr>
-                        <a:t>政策资源</a:t>
-                      </a:r>
-                    </a:p>
-                  </a:txBody>
-                  <a:tcPr anchor="ctr" marL="91440" marR="73152" marT="36576" marB="36576">
-                    <a:solidFill>
-                      <a:srgbClr val="EDF2F9"/>
-                    </a:solidFill>
-                  </a:tcPr>
-                </a:tc>
-                <a:tc>
-                  <a:txBody>
-                    <a:bodyPr/>
-                    <a:lstStyle/>
-                    <a:p>
-                      <a:r>
-                        <a:rPr sz="1250">
-                          <a:solidFill>
-                            <a:srgbClr val="1A2638"/>
-                          </a:solidFill>
-                          <a:latin typeface="微软雅黑"/>
-                        </a:rPr>
-                        <a:t>企业导入</a:t>
-                      </a:r>
-                    </a:p>
-                  </a:txBody>
-                  <a:tcPr anchor="ctr" marL="91440" marR="73152" marT="36576" marB="36576">
-                    <a:solidFill>
-                      <a:srgbClr val="EDF2F9"/>
-                    </a:solidFill>
-                  </a:tcPr>
-                </a:tc>
-              </a:tr>
-              <a:tr h="585216">
-                <a:tc>
-                  <a:txBody>
-                    <a:bodyPr/>
-                    <a:lstStyle/>
-                    <a:p>
-                      <a:r>
-                        <a:rPr sz="1250">
-                          <a:solidFill>
-                            <a:srgbClr val="1A2638"/>
-                          </a:solidFill>
-                          <a:latin typeface="微软雅黑"/>
-                        </a:rPr>
-                        <a:t>运营</a:t>
-                      </a:r>
-                    </a:p>
-                  </a:txBody>
-                  <a:tcPr anchor="ctr" marL="91440" marR="73152" marT="36576" marB="36576">
-                    <a:solidFill>
-                      <a:srgbClr val="FFFFFF"/>
-                    </a:solidFill>
-                  </a:tcPr>
-                </a:tc>
-                <a:tc>
-                  <a:txBody>
-                    <a:bodyPr/>
-                    <a:lstStyle/>
-                    <a:p>
-                      <a:r>
-                        <a:rPr sz="1250">
-                          <a:solidFill>
-                            <a:srgbClr val="1A2638"/>
-                          </a:solidFill>
-                          <a:latin typeface="微软雅黑"/>
-                        </a:rPr>
-                        <a:t>基础管理</a:t>
-                      </a:r>
-                    </a:p>
-                  </a:txBody>
-                  <a:tcPr anchor="ctr" marL="91440" marR="73152" marT="36576" marB="36576">
-                    <a:solidFill>
-                      <a:srgbClr val="FFFFFF"/>
-                    </a:solidFill>
-                  </a:tcPr>
-                </a:tc>
-                <a:tc>
-                  <a:txBody>
-                    <a:bodyPr/>
-                    <a:lstStyle/>
-                    <a:p>
-                      <a:r>
-                        <a:rPr sz="1250">
-                          <a:solidFill>
-                            <a:srgbClr val="1A2638"/>
-                          </a:solidFill>
-                          <a:latin typeface="微软雅黑"/>
-                        </a:rPr>
-                        <a:t>内容 + 活动 + 社群</a:t>
-                      </a:r>
-                    </a:p>
-                  </a:txBody>
-                  <a:tcPr anchor="ctr" marL="91440" marR="73152" marT="36576" marB="36576">
-                    <a:solidFill>
-                      <a:srgbClr val="FFFFFF"/>
-                    </a:solidFill>
-                  </a:tcPr>
-                </a:tc>
-              </a:tr>
-              <a:tr h="585216">
-                <a:tc>
-                  <a:txBody>
-                    <a:bodyPr/>
-                    <a:lstStyle/>
-                    <a:p>
-                      <a:r>
-                        <a:rPr sz="1250">
-                          <a:solidFill>
-                            <a:srgbClr val="1A2638"/>
-                          </a:solidFill>
-                          <a:latin typeface="微软雅黑"/>
-                        </a:rPr>
-                        <a:t>品牌</a:t>
-                      </a:r>
-                    </a:p>
-                  </a:txBody>
-                  <a:tcPr anchor="ctr" marL="91440" marR="73152" marT="36576" marB="36576">
-                    <a:solidFill>
-                      <a:srgbClr val="EDF2F9"/>
-                    </a:solidFill>
-                  </a:tcPr>
-                </a:tc>
-                <a:tc>
-                  <a:txBody>
-                    <a:bodyPr/>
-                    <a:lstStyle/>
-                    <a:p>
-                      <a:r>
-                        <a:rPr sz="1250">
-                          <a:solidFill>
-                            <a:srgbClr val="1A2638"/>
-                          </a:solidFill>
-                          <a:latin typeface="微软雅黑"/>
-                        </a:rPr>
-                        <a:t>政府背书</a:t>
-                      </a:r>
-                    </a:p>
-                  </a:txBody>
-                  <a:tcPr anchor="ctr" marL="91440" marR="73152" marT="36576" marB="36576">
-                    <a:solidFill>
-                      <a:srgbClr val="EDF2F9"/>
-                    </a:solidFill>
-                  </a:tcPr>
-                </a:tc>
-                <a:tc>
-                  <a:txBody>
-                    <a:bodyPr/>
-                    <a:lstStyle/>
-                    <a:p>
-                      <a:r>
-                        <a:rPr sz="1250">
-                          <a:solidFill>
-                            <a:srgbClr val="1A2638"/>
-                          </a:solidFill>
-                          <a:latin typeface="微软雅黑"/>
-                        </a:rPr>
-                        <a:t>AI 产业 IP</a:t>
-                      </a:r>
-                    </a:p>
-                  </a:txBody>
-                  <a:tcPr anchor="ctr" marL="91440" marR="73152" marT="36576" marB="36576">
-                    <a:solidFill>
-                      <a:srgbClr val="EDF2F9"/>
-                    </a:solidFill>
-                  </a:tcPr>
-                </a:tc>
-              </a:tr>
-            </a:tbl>
-          </a:graphicData>
-        </a:graphic>
-      </p:graphicFrame>
-      <p:sp>
-        <p:nvSpPr>
-          <p:cNvPr id="9" name="TextBox 8"/>
-          <p:cNvSpPr txBox="1"/>
-          <p:nvPr/>
-        </p:nvSpPr>
-        <p:spPr>
-          <a:xfrm>
-            <a:off x="6400800" y="1371600"/>
-            <a:ext cx="5486400" cy="365760"/>
-          </a:xfrm>
-          <a:prstGeom prst="rect">
-            <a:avLst/>
-          </a:prstGeom>
-          <a:noFill/>
-        </p:spPr>
-        <p:txBody>
-          <a:bodyPr wrap="square" anchor="t">
-            <a:spAutoFit/>
-          </a:bodyPr>
-          <a:lstStyle/>
-          <a:p>
-            <a:pPr algn="l">
-              <a:lnSpc>
-                <a:spcPct val="105000"/>
-              </a:lnSpc>
-              <a:spcAft>
-                <a:spcPts val="600"/>
-              </a:spcAft>
-            </a:pPr>
-            <a:r>
-              <a:rPr sz="1400" b="1">
-                <a:solidFill>
-                  <a:srgbClr val="16B8C6"/>
-                </a:solidFill>
-                <a:latin typeface="微软雅黑"/>
-                <a:ea typeface="微软雅黑"/>
-              </a:rPr>
-              <a:t>收入模式（我方主动提）</a:t>
-            </a:r>
-          </a:p>
-        </p:txBody>
-      </p:sp>
-      <p:sp>
-        <p:nvSpPr>
-          <p:cNvPr id="10" name="TextBox 9"/>
-          <p:cNvSpPr txBox="1"/>
-          <p:nvPr/>
-        </p:nvSpPr>
-        <p:spPr>
-          <a:xfrm>
-            <a:off x="6400800" y="1783080"/>
-            <a:ext cx="5303520" cy="3108960"/>
-          </a:xfrm>
-          <a:prstGeom prst="rect">
-            <a:avLst/>
-          </a:prstGeom>
-          <a:noFill/>
-        </p:spPr>
-        <p:txBody>
-          <a:bodyPr wrap="square">
-            <a:spAutoFit/>
-          </a:bodyPr>
-          <a:lstStyle/>
-          <a:p>
-            <a:pPr>
-              <a:lnSpc>
-                <a:spcPct val="112000"/>
-              </a:lnSpc>
-              <a:spcAft>
-                <a:spcPts val="1000"/>
-              </a:spcAft>
-            </a:pPr>
-            <a:r>
-              <a:rPr sz="1400" b="1">
-                <a:solidFill>
-                  <a:srgbClr val="16B8C6"/>
-                </a:solidFill>
-                <a:latin typeface="微软雅黑"/>
-              </a:rPr>
-              <a:t>▍</a:t>
-            </a:r>
-            <a:r>
-              <a:rPr sz="1400" b="1">
-                <a:solidFill>
-                  <a:srgbClr val="1A2638"/>
-                </a:solidFill>
-                <a:latin typeface="微软雅黑"/>
-              </a:rPr>
-              <a:t>① 租金分成  </a:t>
-            </a:r>
-            <a:r>
-              <a:rPr sz="1400" b="0">
-                <a:solidFill>
-                  <a:srgbClr val="5B6B82"/>
-                </a:solidFill>
-                <a:latin typeface="微软雅黑"/>
-              </a:rPr>
-              <a:t>—— 核心收益来源。</a:t>
-            </a:r>
-          </a:p>
-          <a:p>
-            <a:pPr>
-              <a:lnSpc>
-                <a:spcPct val="112000"/>
-              </a:lnSpc>
-              <a:spcAft>
-                <a:spcPts val="1000"/>
-              </a:spcAft>
-            </a:pPr>
-            <a:r>
-              <a:rPr sz="1400" b="1">
-                <a:solidFill>
-                  <a:srgbClr val="16B8C6"/>
-                </a:solidFill>
-                <a:latin typeface="微软雅黑"/>
-              </a:rPr>
-              <a:t>▍</a:t>
-            </a:r>
-            <a:r>
-              <a:rPr sz="1400" b="1">
-                <a:solidFill>
-                  <a:srgbClr val="1A2638"/>
-                </a:solidFill>
-                <a:latin typeface="微软雅黑"/>
-              </a:rPr>
-              <a:t>② 企业服务费  </a:t>
-            </a:r>
-            <a:r>
-              <a:rPr sz="1400" b="0">
-                <a:solidFill>
-                  <a:srgbClr val="5B6B82"/>
-                </a:solidFill>
-                <a:latin typeface="微软雅黑"/>
-              </a:rPr>
-              <a:t>—— 培训 / 咨询 / AI 赋能包。</a:t>
-            </a:r>
-          </a:p>
-          <a:p>
-            <a:pPr>
-              <a:lnSpc>
-                <a:spcPct val="112000"/>
-              </a:lnSpc>
-              <a:spcAft>
-                <a:spcPts val="1000"/>
-              </a:spcAft>
-            </a:pPr>
-            <a:r>
-              <a:rPr sz="1400" b="1">
-                <a:solidFill>
-                  <a:srgbClr val="16B8C6"/>
-                </a:solidFill>
-                <a:latin typeface="微软雅黑"/>
-              </a:rPr>
-              <a:t>▍</a:t>
-            </a:r>
-            <a:r>
-              <a:rPr sz="1400" b="1">
-                <a:solidFill>
-                  <a:srgbClr val="1A2638"/>
-                </a:solidFill>
-                <a:latin typeface="微软雅黑"/>
-              </a:rPr>
-              <a:t>③ 活动收入  </a:t>
-            </a:r>
-            <a:r>
-              <a:rPr sz="1400" b="0">
-                <a:solidFill>
-                  <a:srgbClr val="5B6B82"/>
-                </a:solidFill>
-                <a:latin typeface="微软雅黑"/>
-              </a:rPr>
-              <a:t>—— 私董会 / Demo Day / 展会。</a:t>
-            </a:r>
-          </a:p>
-          <a:p>
-            <a:pPr>
-              <a:lnSpc>
-                <a:spcPct val="112000"/>
-              </a:lnSpc>
-              <a:spcAft>
-                <a:spcPts val="1000"/>
-              </a:spcAft>
-            </a:pPr>
-            <a:r>
-              <a:rPr sz="1400" b="1">
-                <a:solidFill>
-                  <a:srgbClr val="16B8C6"/>
-                </a:solidFill>
-                <a:latin typeface="微软雅黑"/>
-              </a:rPr>
-              <a:t>▍</a:t>
-            </a:r>
-            <a:r>
-              <a:rPr sz="1400" b="1">
-                <a:solidFill>
-                  <a:srgbClr val="1A2638"/>
-                </a:solidFill>
-                <a:latin typeface="微软雅黑"/>
-              </a:rPr>
-              <a:t>④ 政策补贴联合申报  </a:t>
-            </a:r>
-            <a:r>
-              <a:rPr sz="1400" b="0">
-                <a:solidFill>
-                  <a:srgbClr val="5B6B82"/>
-                </a:solidFill>
-                <a:latin typeface="微软雅黑"/>
-              </a:rPr>
-              <a:t>—— 城市更新、保租房等。</a:t>
-            </a:r>
-          </a:p>
-        </p:txBody>
-      </p:sp>
-      <p:sp>
-        <p:nvSpPr>
-          <p:cNvPr id="11" name="Rectangle 10"/>
+              <a:t>06</a:t>
+            </a:r>
+          </a:p>
+        </p:txBody>
+      </p:sp>
+      <p:sp>
+        <p:nvSpPr>
+          <p:cNvPr id="7" name="Rectangle 6"/>
           <p:cNvSpPr/>
           <p:nvPr/>
         </p:nvSpPr>
         <p:spPr>
           <a:xfrm>
-            <a:off x="502920" y="5074920"/>
-            <a:ext cx="11155680" cy="1280160"/>
+            <a:off x="411480" y="1737360"/>
+            <a:ext cx="2103120" cy="2103120"/>
           </a:xfrm>
           <a:prstGeom prst="rect">
             <a:avLst/>
           </a:prstGeom>
           <a:solidFill>
-            <a:srgbClr val="EAF6F8"/>
+            <a:srgbClr val="E8EEF6"/>
           </a:solidFill>
           <a:ln>
             <a:noFill/>
@@ -4473,14 +3871,14 @@
       </p:sp>
       <p:sp>
         <p:nvSpPr>
-          <p:cNvPr id="12" name="Rectangle 11"/>
+          <p:cNvPr id="8" name="Rectangle 7"/>
           <p:cNvSpPr/>
           <p:nvPr/>
         </p:nvSpPr>
         <p:spPr>
           <a:xfrm>
-            <a:off x="502920" y="5074920"/>
-            <a:ext cx="146304" cy="1280160"/>
+            <a:off x="411480" y="1737360"/>
+            <a:ext cx="2103120" cy="640080"/>
           </a:xfrm>
           <a:prstGeom prst="rect">
             <a:avLst/>
@@ -4517,14 +3915,14 @@
       </p:sp>
       <p:sp>
         <p:nvSpPr>
-          <p:cNvPr id="13" name="TextBox 12"/>
+          <p:cNvPr id="9" name="TextBox 8"/>
           <p:cNvSpPr txBox="1"/>
           <p:nvPr/>
         </p:nvSpPr>
         <p:spPr>
           <a:xfrm>
-            <a:off x="868680" y="5212080"/>
-            <a:ext cx="10607040" cy="1005840"/>
+            <a:off x="411480" y="1737360"/>
+            <a:ext cx="2103120" cy="640080"/>
           </a:xfrm>
           <a:prstGeom prst="rect">
             <a:avLst/>
@@ -4537,33 +3935,1013 @@
           </a:bodyPr>
           <a:lstStyle/>
           <a:p>
+            <a:pPr algn="ctr">
+              <a:lnSpc>
+                <a:spcPct val="105000"/>
+              </a:lnSpc>
+              <a:spcAft>
+                <a:spcPts val="600"/>
+              </a:spcAft>
+            </a:pPr>
+            <a:r>
+              <a:rPr sz="1300" b="1">
+                <a:solidFill>
+                  <a:srgbClr val="0B1F3A"/>
+                </a:solidFill>
+                <a:latin typeface="微软雅黑"/>
+                <a:ea typeface="微软雅黑"/>
+              </a:rPr>
+              <a:t>IP 1</a:t>
+            </a:r>
+          </a:p>
+        </p:txBody>
+      </p:sp>
+      <p:sp>
+        <p:nvSpPr>
+          <p:cNvPr id="10" name="TextBox 9"/>
+          <p:cNvSpPr txBox="1"/>
+          <p:nvPr/>
+        </p:nvSpPr>
+        <p:spPr>
+          <a:xfrm>
+            <a:off x="502920" y="2468880"/>
+            <a:ext cx="1920240" cy="1280160"/>
+          </a:xfrm>
+          <a:prstGeom prst="rect">
+            <a:avLst/>
+          </a:prstGeom>
+          <a:noFill/>
+        </p:spPr>
+        <p:txBody>
+          <a:bodyPr wrap="square" anchor="t">
+            <a:spAutoFit/>
+          </a:bodyPr>
+          <a:lstStyle/>
+          <a:p>
+            <a:pPr algn="ctr">
+              <a:lnSpc>
+                <a:spcPct val="105000"/>
+              </a:lnSpc>
+              <a:spcAft>
+                <a:spcPts val="600"/>
+              </a:spcAft>
+            </a:pPr>
+            <a:r>
+              <a:rPr sz="1500" b="1">
+                <a:solidFill>
+                  <a:srgbClr val="1A2638"/>
+                </a:solidFill>
+                <a:latin typeface="微软雅黑"/>
+                <a:ea typeface="微软雅黑"/>
+              </a:rPr>
+              <a:t>AI 切磋者大会</a:t>
+            </a:r>
+          </a:p>
+          <a:p>
+            <a:pPr algn="ctr">
+              <a:lnSpc>
+                <a:spcPct val="105000"/>
+              </a:lnSpc>
+              <a:spcAft>
+                <a:spcPts val="600"/>
+              </a:spcAft>
+            </a:pPr>
+            <a:r>
+              <a:rPr sz="1250" b="0">
+                <a:solidFill>
+                  <a:srgbClr val="5B6B82"/>
+                </a:solidFill>
+                <a:latin typeface="微软雅黑"/>
+                <a:ea typeface="微软雅黑"/>
+              </a:rPr>
+              <a:t>选育 · 招商</a:t>
+            </a:r>
+          </a:p>
+        </p:txBody>
+      </p:sp>
+      <p:sp>
+        <p:nvSpPr>
+          <p:cNvPr id="11" name="Rectangle 10"/>
+          <p:cNvSpPr/>
+          <p:nvPr/>
+        </p:nvSpPr>
+        <p:spPr>
+          <a:xfrm>
+            <a:off x="2715768" y="1737360"/>
+            <a:ext cx="2103120" cy="2103120"/>
+          </a:xfrm>
+          <a:prstGeom prst="rect">
+            <a:avLst/>
+          </a:prstGeom>
+          <a:solidFill>
+            <a:srgbClr val="E8EEF6"/>
+          </a:solidFill>
+          <a:ln>
+            <a:noFill/>
+          </a:ln>
+          <a:effectLst/>
+        </p:spPr>
+        <p:style>
+          <a:lnRef idx="1">
+            <a:schemeClr val="accent1"/>
+          </a:lnRef>
+          <a:fillRef idx="3">
+            <a:schemeClr val="accent1"/>
+          </a:fillRef>
+          <a:effectRef idx="2">
+            <a:schemeClr val="accent1"/>
+          </a:effectRef>
+          <a:fontRef idx="minor">
+            <a:schemeClr val="lt1"/>
+          </a:fontRef>
+        </p:style>
+        <p:txBody>
+          <a:bodyPr rtlCol="0" anchor="ctr"/>
+          <a:lstStyle/>
+          <a:p>
+            <a:pPr algn="ctr"/>
+          </a:p>
+        </p:txBody>
+      </p:sp>
+      <p:sp>
+        <p:nvSpPr>
+          <p:cNvPr id="12" name="Rectangle 11"/>
+          <p:cNvSpPr/>
+          <p:nvPr/>
+        </p:nvSpPr>
+        <p:spPr>
+          <a:xfrm>
+            <a:off x="2715768" y="1737360"/>
+            <a:ext cx="2103120" cy="640080"/>
+          </a:xfrm>
+          <a:prstGeom prst="rect">
+            <a:avLst/>
+          </a:prstGeom>
+          <a:solidFill>
+            <a:srgbClr val="1B4F9C"/>
+          </a:solidFill>
+          <a:ln>
+            <a:noFill/>
+          </a:ln>
+          <a:effectLst/>
+        </p:spPr>
+        <p:style>
+          <a:lnRef idx="1">
+            <a:schemeClr val="accent1"/>
+          </a:lnRef>
+          <a:fillRef idx="3">
+            <a:schemeClr val="accent1"/>
+          </a:fillRef>
+          <a:effectRef idx="2">
+            <a:schemeClr val="accent1"/>
+          </a:effectRef>
+          <a:fontRef idx="minor">
+            <a:schemeClr val="lt1"/>
+          </a:fontRef>
+        </p:style>
+        <p:txBody>
+          <a:bodyPr rtlCol="0" anchor="ctr"/>
+          <a:lstStyle/>
+          <a:p>
+            <a:pPr algn="ctr"/>
+          </a:p>
+        </p:txBody>
+      </p:sp>
+      <p:sp>
+        <p:nvSpPr>
+          <p:cNvPr id="13" name="TextBox 12"/>
+          <p:cNvSpPr txBox="1"/>
+          <p:nvPr/>
+        </p:nvSpPr>
+        <p:spPr>
+          <a:xfrm>
+            <a:off x="2715768" y="1737360"/>
+            <a:ext cx="2103120" cy="640080"/>
+          </a:xfrm>
+          <a:prstGeom prst="rect">
+            <a:avLst/>
+          </a:prstGeom>
+          <a:noFill/>
+        </p:spPr>
+        <p:txBody>
+          <a:bodyPr wrap="square" anchor="ctr">
+            <a:spAutoFit/>
+          </a:bodyPr>
+          <a:lstStyle/>
+          <a:p>
+            <a:pPr algn="ctr">
+              <a:lnSpc>
+                <a:spcPct val="105000"/>
+              </a:lnSpc>
+              <a:spcAft>
+                <a:spcPts val="600"/>
+              </a:spcAft>
+            </a:pPr>
+            <a:r>
+              <a:rPr sz="1300" b="1">
+                <a:solidFill>
+                  <a:srgbClr val="FFFFFF"/>
+                </a:solidFill>
+                <a:latin typeface="微软雅黑"/>
+                <a:ea typeface="微软雅黑"/>
+              </a:rPr>
+              <a:t>IP 2</a:t>
+            </a:r>
+          </a:p>
+        </p:txBody>
+      </p:sp>
+      <p:sp>
+        <p:nvSpPr>
+          <p:cNvPr id="14" name="TextBox 13"/>
+          <p:cNvSpPr txBox="1"/>
+          <p:nvPr/>
+        </p:nvSpPr>
+        <p:spPr>
+          <a:xfrm>
+            <a:off x="2807208" y="2468880"/>
+            <a:ext cx="1920240" cy="1280160"/>
+          </a:xfrm>
+          <a:prstGeom prst="rect">
+            <a:avLst/>
+          </a:prstGeom>
+          <a:noFill/>
+        </p:spPr>
+        <p:txBody>
+          <a:bodyPr wrap="square" anchor="t">
+            <a:spAutoFit/>
+          </a:bodyPr>
+          <a:lstStyle/>
+          <a:p>
+            <a:pPr algn="ctr">
+              <a:lnSpc>
+                <a:spcPct val="105000"/>
+              </a:lnSpc>
+              <a:spcAft>
+                <a:spcPts val="600"/>
+              </a:spcAft>
+            </a:pPr>
+            <a:r>
+              <a:rPr sz="1500" b="1">
+                <a:solidFill>
+                  <a:srgbClr val="1A2638"/>
+                </a:solidFill>
+                <a:latin typeface="微软雅黑"/>
+                <a:ea typeface="微软雅黑"/>
+              </a:rPr>
+              <a:t>AI 产业私董会</a:t>
+            </a:r>
+          </a:p>
+          <a:p>
+            <a:pPr algn="ctr">
+              <a:lnSpc>
+                <a:spcPct val="105000"/>
+              </a:lnSpc>
+              <a:spcAft>
+                <a:spcPts val="600"/>
+              </a:spcAft>
+            </a:pPr>
+            <a:r>
+              <a:rPr sz="1250" b="0">
+                <a:solidFill>
+                  <a:srgbClr val="5B6B82"/>
+                </a:solidFill>
+                <a:latin typeface="微软雅黑"/>
+                <a:ea typeface="微软雅黑"/>
+              </a:rPr>
+              <a:t>高端 · 圈层</a:t>
+            </a:r>
+          </a:p>
+        </p:txBody>
+      </p:sp>
+      <p:sp>
+        <p:nvSpPr>
+          <p:cNvPr id="15" name="Rectangle 14"/>
+          <p:cNvSpPr/>
+          <p:nvPr/>
+        </p:nvSpPr>
+        <p:spPr>
+          <a:xfrm>
+            <a:off x="5020056" y="1737360"/>
+            <a:ext cx="2103120" cy="2103120"/>
+          </a:xfrm>
+          <a:prstGeom prst="rect">
+            <a:avLst/>
+          </a:prstGeom>
+          <a:solidFill>
+            <a:srgbClr val="E8EEF6"/>
+          </a:solidFill>
+          <a:ln>
+            <a:noFill/>
+          </a:ln>
+          <a:effectLst/>
+        </p:spPr>
+        <p:style>
+          <a:lnRef idx="1">
+            <a:schemeClr val="accent1"/>
+          </a:lnRef>
+          <a:fillRef idx="3">
+            <a:schemeClr val="accent1"/>
+          </a:fillRef>
+          <a:effectRef idx="2">
+            <a:schemeClr val="accent1"/>
+          </a:effectRef>
+          <a:fontRef idx="minor">
+            <a:schemeClr val="lt1"/>
+          </a:fontRef>
+        </p:style>
+        <p:txBody>
+          <a:bodyPr rtlCol="0" anchor="ctr"/>
+          <a:lstStyle/>
+          <a:p>
+            <a:pPr algn="ctr"/>
+          </a:p>
+        </p:txBody>
+      </p:sp>
+      <p:sp>
+        <p:nvSpPr>
+          <p:cNvPr id="16" name="Rectangle 15"/>
+          <p:cNvSpPr/>
+          <p:nvPr/>
+        </p:nvSpPr>
+        <p:spPr>
+          <a:xfrm>
+            <a:off x="5020056" y="1737360"/>
+            <a:ext cx="2103120" cy="640080"/>
+          </a:xfrm>
+          <a:prstGeom prst="rect">
+            <a:avLst/>
+          </a:prstGeom>
+          <a:solidFill>
+            <a:srgbClr val="16B8C6"/>
+          </a:solidFill>
+          <a:ln>
+            <a:noFill/>
+          </a:ln>
+          <a:effectLst/>
+        </p:spPr>
+        <p:style>
+          <a:lnRef idx="1">
+            <a:schemeClr val="accent1"/>
+          </a:lnRef>
+          <a:fillRef idx="3">
+            <a:schemeClr val="accent1"/>
+          </a:fillRef>
+          <a:effectRef idx="2">
+            <a:schemeClr val="accent1"/>
+          </a:effectRef>
+          <a:fontRef idx="minor">
+            <a:schemeClr val="lt1"/>
+          </a:fontRef>
+        </p:style>
+        <p:txBody>
+          <a:bodyPr rtlCol="0" anchor="ctr"/>
+          <a:lstStyle/>
+          <a:p>
+            <a:pPr algn="ctr"/>
+          </a:p>
+        </p:txBody>
+      </p:sp>
+      <p:sp>
+        <p:nvSpPr>
+          <p:cNvPr id="17" name="TextBox 16"/>
+          <p:cNvSpPr txBox="1"/>
+          <p:nvPr/>
+        </p:nvSpPr>
+        <p:spPr>
+          <a:xfrm>
+            <a:off x="5020056" y="1737360"/>
+            <a:ext cx="2103120" cy="640080"/>
+          </a:xfrm>
+          <a:prstGeom prst="rect">
+            <a:avLst/>
+          </a:prstGeom>
+          <a:noFill/>
+        </p:spPr>
+        <p:txBody>
+          <a:bodyPr wrap="square" anchor="ctr">
+            <a:spAutoFit/>
+          </a:bodyPr>
+          <a:lstStyle/>
+          <a:p>
+            <a:pPr algn="ctr">
+              <a:lnSpc>
+                <a:spcPct val="105000"/>
+              </a:lnSpc>
+              <a:spcAft>
+                <a:spcPts val="600"/>
+              </a:spcAft>
+            </a:pPr>
+            <a:r>
+              <a:rPr sz="1300" b="1">
+                <a:solidFill>
+                  <a:srgbClr val="FFFFFF"/>
+                </a:solidFill>
+                <a:latin typeface="微软雅黑"/>
+                <a:ea typeface="微软雅黑"/>
+              </a:rPr>
+              <a:t>IP 3</a:t>
+            </a:r>
+          </a:p>
+        </p:txBody>
+      </p:sp>
+      <p:sp>
+        <p:nvSpPr>
+          <p:cNvPr id="18" name="TextBox 17"/>
+          <p:cNvSpPr txBox="1"/>
+          <p:nvPr/>
+        </p:nvSpPr>
+        <p:spPr>
+          <a:xfrm>
+            <a:off x="5111496" y="2468880"/>
+            <a:ext cx="1920240" cy="1280160"/>
+          </a:xfrm>
+          <a:prstGeom prst="rect">
+            <a:avLst/>
+          </a:prstGeom>
+          <a:noFill/>
+        </p:spPr>
+        <p:txBody>
+          <a:bodyPr wrap="square" anchor="t">
+            <a:spAutoFit/>
+          </a:bodyPr>
+          <a:lstStyle/>
+          <a:p>
+            <a:pPr algn="ctr">
+              <a:lnSpc>
+                <a:spcPct val="105000"/>
+              </a:lnSpc>
+              <a:spcAft>
+                <a:spcPts val="600"/>
+              </a:spcAft>
+            </a:pPr>
+            <a:r>
+              <a:rPr sz="1500" b="1">
+                <a:solidFill>
+                  <a:srgbClr val="1A2638"/>
+                </a:solidFill>
+                <a:latin typeface="微软雅黑"/>
+                <a:ea typeface="微软雅黑"/>
+              </a:rPr>
+              <a:t>AI Demo Day</a:t>
+            </a:r>
+          </a:p>
+          <a:p>
+            <a:pPr algn="ctr">
+              <a:lnSpc>
+                <a:spcPct val="105000"/>
+              </a:lnSpc>
+              <a:spcAft>
+                <a:spcPts val="600"/>
+              </a:spcAft>
+            </a:pPr>
+            <a:r>
+              <a:rPr sz="1250" b="0">
+                <a:solidFill>
+                  <a:srgbClr val="5B6B82"/>
+                </a:solidFill>
+                <a:latin typeface="微软雅黑"/>
+                <a:ea typeface="微软雅黑"/>
+              </a:rPr>
+              <a:t>路演 · 转化</a:t>
+            </a:r>
+          </a:p>
+        </p:txBody>
+      </p:sp>
+      <p:sp>
+        <p:nvSpPr>
+          <p:cNvPr id="19" name="Rectangle 18"/>
+          <p:cNvSpPr/>
+          <p:nvPr/>
+        </p:nvSpPr>
+        <p:spPr>
+          <a:xfrm>
+            <a:off x="7324344" y="1737360"/>
+            <a:ext cx="2103120" cy="2103120"/>
+          </a:xfrm>
+          <a:prstGeom prst="rect">
+            <a:avLst/>
+          </a:prstGeom>
+          <a:solidFill>
+            <a:srgbClr val="E8EEF6"/>
+          </a:solidFill>
+          <a:ln>
+            <a:noFill/>
+          </a:ln>
+          <a:effectLst/>
+        </p:spPr>
+        <p:style>
+          <a:lnRef idx="1">
+            <a:schemeClr val="accent1"/>
+          </a:lnRef>
+          <a:fillRef idx="3">
+            <a:schemeClr val="accent1"/>
+          </a:fillRef>
+          <a:effectRef idx="2">
+            <a:schemeClr val="accent1"/>
+          </a:effectRef>
+          <a:fontRef idx="minor">
+            <a:schemeClr val="lt1"/>
+          </a:fontRef>
+        </p:style>
+        <p:txBody>
+          <a:bodyPr rtlCol="0" anchor="ctr"/>
+          <a:lstStyle/>
+          <a:p>
+            <a:pPr algn="ctr"/>
+          </a:p>
+        </p:txBody>
+      </p:sp>
+      <p:sp>
+        <p:nvSpPr>
+          <p:cNvPr id="20" name="Rectangle 19"/>
+          <p:cNvSpPr/>
+          <p:nvPr/>
+        </p:nvSpPr>
+        <p:spPr>
+          <a:xfrm>
+            <a:off x="7324344" y="1737360"/>
+            <a:ext cx="2103120" cy="640080"/>
+          </a:xfrm>
+          <a:prstGeom prst="rect">
+            <a:avLst/>
+          </a:prstGeom>
+          <a:solidFill>
+            <a:srgbClr val="1B4F9C"/>
+          </a:solidFill>
+          <a:ln>
+            <a:noFill/>
+          </a:ln>
+          <a:effectLst/>
+        </p:spPr>
+        <p:style>
+          <a:lnRef idx="1">
+            <a:schemeClr val="accent1"/>
+          </a:lnRef>
+          <a:fillRef idx="3">
+            <a:schemeClr val="accent1"/>
+          </a:fillRef>
+          <a:effectRef idx="2">
+            <a:schemeClr val="accent1"/>
+          </a:effectRef>
+          <a:fontRef idx="minor">
+            <a:schemeClr val="lt1"/>
+          </a:fontRef>
+        </p:style>
+        <p:txBody>
+          <a:bodyPr rtlCol="0" anchor="ctr"/>
+          <a:lstStyle/>
+          <a:p>
+            <a:pPr algn="ctr"/>
+          </a:p>
+        </p:txBody>
+      </p:sp>
+      <p:sp>
+        <p:nvSpPr>
+          <p:cNvPr id="21" name="TextBox 20"/>
+          <p:cNvSpPr txBox="1"/>
+          <p:nvPr/>
+        </p:nvSpPr>
+        <p:spPr>
+          <a:xfrm>
+            <a:off x="7324344" y="1737360"/>
+            <a:ext cx="2103120" cy="640080"/>
+          </a:xfrm>
+          <a:prstGeom prst="rect">
+            <a:avLst/>
+          </a:prstGeom>
+          <a:noFill/>
+        </p:spPr>
+        <p:txBody>
+          <a:bodyPr wrap="square" anchor="ctr">
+            <a:spAutoFit/>
+          </a:bodyPr>
+          <a:lstStyle/>
+          <a:p>
+            <a:pPr algn="ctr">
+              <a:lnSpc>
+                <a:spcPct val="105000"/>
+              </a:lnSpc>
+              <a:spcAft>
+                <a:spcPts val="600"/>
+              </a:spcAft>
+            </a:pPr>
+            <a:r>
+              <a:rPr sz="1300" b="1">
+                <a:solidFill>
+                  <a:srgbClr val="FFFFFF"/>
+                </a:solidFill>
+                <a:latin typeface="微软雅黑"/>
+                <a:ea typeface="微软雅黑"/>
+              </a:rPr>
+              <a:t>IP 4</a:t>
+            </a:r>
+          </a:p>
+        </p:txBody>
+      </p:sp>
+      <p:sp>
+        <p:nvSpPr>
+          <p:cNvPr id="22" name="TextBox 21"/>
+          <p:cNvSpPr txBox="1"/>
+          <p:nvPr/>
+        </p:nvSpPr>
+        <p:spPr>
+          <a:xfrm>
+            <a:off x="7415784" y="2468880"/>
+            <a:ext cx="1920240" cy="1280160"/>
+          </a:xfrm>
+          <a:prstGeom prst="rect">
+            <a:avLst/>
+          </a:prstGeom>
+          <a:noFill/>
+        </p:spPr>
+        <p:txBody>
+          <a:bodyPr wrap="square" anchor="t">
+            <a:spAutoFit/>
+          </a:bodyPr>
+          <a:lstStyle/>
+          <a:p>
+            <a:pPr algn="ctr">
+              <a:lnSpc>
+                <a:spcPct val="105000"/>
+              </a:lnSpc>
+              <a:spcAft>
+                <a:spcPts val="600"/>
+              </a:spcAft>
+            </a:pPr>
+            <a:r>
+              <a:rPr sz="1500" b="1">
+                <a:solidFill>
+                  <a:srgbClr val="1A2638"/>
+                </a:solidFill>
+                <a:latin typeface="微软雅黑"/>
+                <a:ea typeface="微软雅黑"/>
+              </a:rPr>
+              <a:t>AI 应用展</a:t>
+            </a:r>
+          </a:p>
+          <a:p>
+            <a:pPr algn="ctr">
+              <a:lnSpc>
+                <a:spcPct val="105000"/>
+              </a:lnSpc>
+              <a:spcAft>
+                <a:spcPts val="600"/>
+              </a:spcAft>
+            </a:pPr>
+            <a:r>
+              <a:rPr sz="1250" b="0">
+                <a:solidFill>
+                  <a:srgbClr val="5B6B82"/>
+                </a:solidFill>
+                <a:latin typeface="微软雅黑"/>
+                <a:ea typeface="微软雅黑"/>
+              </a:rPr>
+              <a:t>To G / To B</a:t>
+            </a:r>
+          </a:p>
+        </p:txBody>
+      </p:sp>
+      <p:sp>
+        <p:nvSpPr>
+          <p:cNvPr id="23" name="Rectangle 22"/>
+          <p:cNvSpPr/>
+          <p:nvPr/>
+        </p:nvSpPr>
+        <p:spPr>
+          <a:xfrm>
+            <a:off x="9628632" y="1737360"/>
+            <a:ext cx="2103120" cy="2103120"/>
+          </a:xfrm>
+          <a:prstGeom prst="rect">
+            <a:avLst/>
+          </a:prstGeom>
+          <a:solidFill>
+            <a:srgbClr val="E8EEF6"/>
+          </a:solidFill>
+          <a:ln>
+            <a:noFill/>
+          </a:ln>
+          <a:effectLst/>
+        </p:spPr>
+        <p:style>
+          <a:lnRef idx="1">
+            <a:schemeClr val="accent1"/>
+          </a:lnRef>
+          <a:fillRef idx="3">
+            <a:schemeClr val="accent1"/>
+          </a:fillRef>
+          <a:effectRef idx="2">
+            <a:schemeClr val="accent1"/>
+          </a:effectRef>
+          <a:fontRef idx="minor">
+            <a:schemeClr val="lt1"/>
+          </a:fontRef>
+        </p:style>
+        <p:txBody>
+          <a:bodyPr rtlCol="0" anchor="ctr"/>
+          <a:lstStyle/>
+          <a:p>
+            <a:pPr algn="ctr"/>
+          </a:p>
+        </p:txBody>
+      </p:sp>
+      <p:sp>
+        <p:nvSpPr>
+          <p:cNvPr id="24" name="Rectangle 23"/>
+          <p:cNvSpPr/>
+          <p:nvPr/>
+        </p:nvSpPr>
+        <p:spPr>
+          <a:xfrm>
+            <a:off x="9628632" y="1737360"/>
+            <a:ext cx="2103120" cy="640080"/>
+          </a:xfrm>
+          <a:prstGeom prst="rect">
+            <a:avLst/>
+          </a:prstGeom>
+          <a:solidFill>
+            <a:srgbClr val="16B8C6"/>
+          </a:solidFill>
+          <a:ln>
+            <a:noFill/>
+          </a:ln>
+          <a:effectLst/>
+        </p:spPr>
+        <p:style>
+          <a:lnRef idx="1">
+            <a:schemeClr val="accent1"/>
+          </a:lnRef>
+          <a:fillRef idx="3">
+            <a:schemeClr val="accent1"/>
+          </a:fillRef>
+          <a:effectRef idx="2">
+            <a:schemeClr val="accent1"/>
+          </a:effectRef>
+          <a:fontRef idx="minor">
+            <a:schemeClr val="lt1"/>
+          </a:fontRef>
+        </p:style>
+        <p:txBody>
+          <a:bodyPr rtlCol="0" anchor="ctr"/>
+          <a:lstStyle/>
+          <a:p>
+            <a:pPr algn="ctr"/>
+          </a:p>
+        </p:txBody>
+      </p:sp>
+      <p:sp>
+        <p:nvSpPr>
+          <p:cNvPr id="25" name="TextBox 24"/>
+          <p:cNvSpPr txBox="1"/>
+          <p:nvPr/>
+        </p:nvSpPr>
+        <p:spPr>
+          <a:xfrm>
+            <a:off x="9628632" y="1737360"/>
+            <a:ext cx="2103120" cy="640080"/>
+          </a:xfrm>
+          <a:prstGeom prst="rect">
+            <a:avLst/>
+          </a:prstGeom>
+          <a:noFill/>
+        </p:spPr>
+        <p:txBody>
+          <a:bodyPr wrap="square" anchor="ctr">
+            <a:spAutoFit/>
+          </a:bodyPr>
+          <a:lstStyle/>
+          <a:p>
+            <a:pPr algn="ctr">
+              <a:lnSpc>
+                <a:spcPct val="105000"/>
+              </a:lnSpc>
+              <a:spcAft>
+                <a:spcPts val="600"/>
+              </a:spcAft>
+            </a:pPr>
+            <a:r>
+              <a:rPr sz="1300" b="1">
+                <a:solidFill>
+                  <a:srgbClr val="FFFFFF"/>
+                </a:solidFill>
+                <a:latin typeface="微软雅黑"/>
+                <a:ea typeface="微软雅黑"/>
+              </a:rPr>
+              <a:t>IP 5</a:t>
+            </a:r>
+          </a:p>
+        </p:txBody>
+      </p:sp>
+      <p:sp>
+        <p:nvSpPr>
+          <p:cNvPr id="26" name="TextBox 25"/>
+          <p:cNvSpPr txBox="1"/>
+          <p:nvPr/>
+        </p:nvSpPr>
+        <p:spPr>
+          <a:xfrm>
+            <a:off x="9720072" y="2468880"/>
+            <a:ext cx="1920240" cy="1280160"/>
+          </a:xfrm>
+          <a:prstGeom prst="rect">
+            <a:avLst/>
+          </a:prstGeom>
+          <a:noFill/>
+        </p:spPr>
+        <p:txBody>
+          <a:bodyPr wrap="square" anchor="t">
+            <a:spAutoFit/>
+          </a:bodyPr>
+          <a:lstStyle/>
+          <a:p>
+            <a:pPr algn="ctr">
+              <a:lnSpc>
+                <a:spcPct val="105000"/>
+              </a:lnSpc>
+              <a:spcAft>
+                <a:spcPts val="600"/>
+              </a:spcAft>
+            </a:pPr>
+            <a:r>
+              <a:rPr sz="1500" b="1">
+                <a:solidFill>
+                  <a:srgbClr val="1A2638"/>
+                </a:solidFill>
+                <a:latin typeface="微软雅黑"/>
+                <a:ea typeface="微软雅黑"/>
+              </a:rPr>
+              <a:t>复旦+产业课程</a:t>
+            </a:r>
+          </a:p>
+          <a:p>
+            <a:pPr algn="ctr">
+              <a:lnSpc>
+                <a:spcPct val="105000"/>
+              </a:lnSpc>
+              <a:spcAft>
+                <a:spcPts val="600"/>
+              </a:spcAft>
+            </a:pPr>
+            <a:r>
+              <a:rPr sz="1250" b="0">
+                <a:solidFill>
+                  <a:srgbClr val="5B6B82"/>
+                </a:solidFill>
+                <a:latin typeface="微软雅黑"/>
+                <a:ea typeface="微软雅黑"/>
+              </a:rPr>
+              <a:t>收费 · 人才</a:t>
+            </a:r>
+          </a:p>
+        </p:txBody>
+      </p:sp>
+      <p:sp>
+        <p:nvSpPr>
+          <p:cNvPr id="27" name="Rectangle 26"/>
+          <p:cNvSpPr/>
+          <p:nvPr/>
+        </p:nvSpPr>
+        <p:spPr>
+          <a:xfrm>
+            <a:off x="502920" y="4206240"/>
+            <a:ext cx="11155680" cy="1920240"/>
+          </a:xfrm>
+          <a:prstGeom prst="rect">
+            <a:avLst/>
+          </a:prstGeom>
+          <a:solidFill>
+            <a:srgbClr val="0B1F3A"/>
+          </a:solidFill>
+          <a:ln>
+            <a:noFill/>
+          </a:ln>
+          <a:effectLst/>
+        </p:spPr>
+        <p:style>
+          <a:lnRef idx="1">
+            <a:schemeClr val="accent1"/>
+          </a:lnRef>
+          <a:fillRef idx="3">
+            <a:schemeClr val="accent1"/>
+          </a:fillRef>
+          <a:effectRef idx="2">
+            <a:schemeClr val="accent1"/>
+          </a:effectRef>
+          <a:fontRef idx="minor">
+            <a:schemeClr val="lt1"/>
+          </a:fontRef>
+        </p:style>
+        <p:txBody>
+          <a:bodyPr rtlCol="0" anchor="ctr"/>
+          <a:lstStyle/>
+          <a:p>
+            <a:pPr algn="ctr"/>
+          </a:p>
+        </p:txBody>
+      </p:sp>
+      <p:sp>
+        <p:nvSpPr>
+          <p:cNvPr id="28" name="Rectangle 27"/>
+          <p:cNvSpPr/>
+          <p:nvPr/>
+        </p:nvSpPr>
+        <p:spPr>
+          <a:xfrm>
+            <a:off x="502920" y="4206240"/>
+            <a:ext cx="146304" cy="1920240"/>
+          </a:xfrm>
+          <a:prstGeom prst="rect">
+            <a:avLst/>
+          </a:prstGeom>
+          <a:solidFill>
+            <a:srgbClr val="16B8C6"/>
+          </a:solidFill>
+          <a:ln>
+            <a:noFill/>
+          </a:ln>
+          <a:effectLst/>
+        </p:spPr>
+        <p:style>
+          <a:lnRef idx="1">
+            <a:schemeClr val="accent1"/>
+          </a:lnRef>
+          <a:fillRef idx="3">
+            <a:schemeClr val="accent1"/>
+          </a:fillRef>
+          <a:effectRef idx="2">
+            <a:schemeClr val="accent1"/>
+          </a:effectRef>
+          <a:fontRef idx="minor">
+            <a:schemeClr val="lt1"/>
+          </a:fontRef>
+        </p:style>
+        <p:txBody>
+          <a:bodyPr rtlCol="0" anchor="ctr"/>
+          <a:lstStyle/>
+          <a:p>
+            <a:pPr algn="ctr"/>
+          </a:p>
+        </p:txBody>
+      </p:sp>
+      <p:sp>
+        <p:nvSpPr>
+          <p:cNvPr id="29" name="TextBox 28"/>
+          <p:cNvSpPr txBox="1"/>
+          <p:nvPr/>
+        </p:nvSpPr>
+        <p:spPr>
+          <a:xfrm>
+            <a:off x="914400" y="4434840"/>
+            <a:ext cx="10515600" cy="1463040"/>
+          </a:xfrm>
+          <a:prstGeom prst="rect">
+            <a:avLst/>
+          </a:prstGeom>
+          <a:noFill/>
+        </p:spPr>
+        <p:txBody>
+          <a:bodyPr wrap="square" anchor="t">
+            <a:spAutoFit/>
+          </a:bodyPr>
+          <a:lstStyle/>
+          <a:p>
             <a:pPr algn="l">
               <a:lnSpc>
                 <a:spcPct val="105000"/>
               </a:lnSpc>
               <a:spcAft>
-                <a:spcPts val="600"/>
-              </a:spcAft>
-            </a:pPr>
-            <a:r>
-              <a:rPr sz="1500" b="1">
-                <a:solidFill>
-                  <a:srgbClr val="1B4F9C"/>
-                </a:solidFill>
-                <a:latin typeface="微软雅黑"/>
-                <a:ea typeface="微软雅黑"/>
-              </a:rPr>
-              <a:t>关键原则：</a:t>
-            </a:r>
-            <a:r>
-              <a:rPr sz="1500" b="0">
-                <a:solidFill>
-                  <a:srgbClr val="1A2638"/>
-                </a:solidFill>
-                <a:latin typeface="微软雅黑"/>
-                <a:ea typeface="微软雅黑"/>
-              </a:rPr>
-              <a:t>我方必须拿到“运营权 + 产业导入权”，否则只是给资源平台打工，无法形成可复制的产品与护城河。</a:t>
+                <a:spcPts val="1000"/>
+              </a:spcAft>
+            </a:pPr>
+            <a:r>
+              <a:rPr sz="1600" b="0">
+                <a:solidFill>
+                  <a:srgbClr val="FFFFFF"/>
+                </a:solidFill>
+                <a:latin typeface="微软雅黑"/>
+                <a:ea typeface="微软雅黑"/>
+              </a:rPr>
+              <a:t>核心逻辑：空间 = 内容容器。其中「AI 切磋者大会」是 OPC 的选育入口，</a:t>
+            </a:r>
+          </a:p>
+          <a:p>
+            <a:pPr algn="l">
+              <a:lnSpc>
+                <a:spcPct val="105000"/>
+              </a:lnSpc>
+              <a:spcAft>
+                <a:spcPts val="1000"/>
+              </a:spcAft>
+            </a:pPr>
+            <a:r>
+              <a:rPr sz="1600" b="1">
+                <a:solidFill>
+                  <a:srgbClr val="F2B632"/>
+                </a:solidFill>
+                <a:latin typeface="微软雅黑"/>
+                <a:ea typeface="微软雅黑"/>
+              </a:rPr>
+              <a:t>固定 IP 持续制造流量、选育 OPC、产出签约线索，从根本上解决空置并反哺招商与品牌溢价。</a:t>
             </a:r>
           </a:p>
         </p:txBody>
@@ -4764,7 +5142,7 @@
                 <a:latin typeface="微软雅黑"/>
                 <a:ea typeface="微软雅黑"/>
               </a:rPr>
-              <a:t>ACTION · 即刻启动</a:t>
+              <a:t>GOVERNANCE · 合作阵型</a:t>
             </a:r>
           </a:p>
           <a:p>
@@ -4784,7 +5162,7 @@
                 <a:latin typeface="微软雅黑"/>
                 <a:ea typeface="微软雅黑"/>
               </a:rPr>
-              <a:t>三个“立即启动”项目（承接 5·22 峰会余热）</a:t>
+              <a:t>五方分工与协同机制</a:t>
             </a:r>
           </a:p>
         </p:txBody>
@@ -4827,152 +5205,456 @@
                 <a:latin typeface="微软雅黑"/>
                 <a:ea typeface="微软雅黑"/>
               </a:rPr>
-              <a:t>09</a:t>
-            </a:r>
-          </a:p>
-        </p:txBody>
-      </p:sp>
-      <p:sp>
-        <p:nvSpPr>
-          <p:cNvPr id="7" name="Rectangle 6"/>
-          <p:cNvSpPr/>
-          <p:nvPr/>
-        </p:nvSpPr>
-        <p:spPr>
-          <a:xfrm>
-            <a:off x="502920" y="1508760"/>
-            <a:ext cx="11155680" cy="1417320"/>
-          </a:xfrm>
-          <a:prstGeom prst="rect">
-            <a:avLst/>
-          </a:prstGeom>
-          <a:solidFill>
-            <a:srgbClr val="E8EEF6"/>
-          </a:solidFill>
-          <a:ln>
-            <a:noFill/>
-          </a:ln>
-          <a:effectLst/>
-        </p:spPr>
-        <p:style>
-          <a:lnRef idx="1">
-            <a:schemeClr val="accent1"/>
-          </a:lnRef>
-          <a:fillRef idx="3">
-            <a:schemeClr val="accent1"/>
-          </a:fillRef>
-          <a:effectRef idx="2">
-            <a:schemeClr val="accent1"/>
-          </a:effectRef>
-          <a:fontRef idx="minor">
-            <a:schemeClr val="lt1"/>
-          </a:fontRef>
-        </p:style>
-        <p:txBody>
-          <a:bodyPr rtlCol="0" anchor="ctr"/>
-          <a:lstStyle/>
-          <a:p>
-            <a:pPr algn="ctr"/>
-          </a:p>
-        </p:txBody>
-      </p:sp>
-      <p:sp>
-        <p:nvSpPr>
-          <p:cNvPr id="8" name="Rectangle 7"/>
-          <p:cNvSpPr/>
-          <p:nvPr/>
-        </p:nvSpPr>
-        <p:spPr>
-          <a:xfrm>
-            <a:off x="502920" y="1508760"/>
-            <a:ext cx="1188720" cy="1417320"/>
-          </a:xfrm>
-          <a:prstGeom prst="rect">
-            <a:avLst/>
-          </a:prstGeom>
-          <a:solidFill>
-            <a:srgbClr val="1B4F9C"/>
-          </a:solidFill>
-          <a:ln>
-            <a:noFill/>
-          </a:ln>
-          <a:effectLst/>
-        </p:spPr>
-        <p:style>
-          <a:lnRef idx="1">
-            <a:schemeClr val="accent1"/>
-          </a:lnRef>
-          <a:fillRef idx="3">
-            <a:schemeClr val="accent1"/>
-          </a:fillRef>
-          <a:effectRef idx="2">
-            <a:schemeClr val="accent1"/>
-          </a:effectRef>
-          <a:fontRef idx="minor">
-            <a:schemeClr val="lt1"/>
-          </a:fontRef>
-        </p:style>
-        <p:txBody>
-          <a:bodyPr rtlCol="0" anchor="ctr"/>
-          <a:lstStyle/>
-          <a:p>
-            <a:pPr algn="ctr"/>
-          </a:p>
-        </p:txBody>
-      </p:sp>
-      <p:sp>
-        <p:nvSpPr>
-          <p:cNvPr id="9" name="TextBox 8"/>
+              <a:t>07</a:t>
+            </a:r>
+          </a:p>
+        </p:txBody>
+      </p:sp>
+      <p:graphicFrame>
+        <p:nvGraphicFramePr>
+          <p:cNvPr id="7" name="Table 6"/>
+          <p:cNvGraphicFramePr>
+            <a:graphicFrameLocks noGrp="1"/>
+          </p:cNvGraphicFramePr>
+          <p:nvPr/>
+        </p:nvGraphicFramePr>
+        <p:xfrm>
+          <a:off x="502920" y="1371600"/>
+          <a:ext cx="11155680" cy="4069080"/>
+        </p:xfrm>
+        <a:graphic>
+          <a:graphicData uri="http://schemas.openxmlformats.org/drawingml/2006/table">
+            <a:tbl>
+              <a:tblPr firstRow="1" bandRow="1">
+                <a:tableStyleId>{5C22544A-7EE6-4342-B048-85BDC9FD1C3A}</a:tableStyleId>
+              </a:tblPr>
+              <a:tblGrid>
+                <a:gridCol w="3108960"/>
+                <a:gridCol w="3291840"/>
+                <a:gridCol w="4754880"/>
+              </a:tblGrid>
+              <a:tr h="678180">
+                <a:tc>
+                  <a:txBody>
+                    <a:bodyPr/>
+                    <a:lstStyle/>
+                    <a:p>
+                      <a:r>
+                        <a:rPr sz="1300" b="1">
+                          <a:solidFill>
+                            <a:srgbClr val="FFFFFF"/>
+                          </a:solidFill>
+                          <a:latin typeface="微软雅黑"/>
+                        </a:rPr>
+                        <a:t>组织方</a:t>
+                      </a:r>
+                    </a:p>
+                  </a:txBody>
+                  <a:tcPr anchor="ctr" marL="91440" marR="73152" marT="36576" marB="36576">
+                    <a:solidFill>
+                      <a:srgbClr val="0B1F3A"/>
+                    </a:solidFill>
+                  </a:tcPr>
+                </a:tc>
+                <a:tc>
+                  <a:txBody>
+                    <a:bodyPr/>
+                    <a:lstStyle/>
+                    <a:p>
+                      <a:r>
+                        <a:rPr sz="1300" b="1">
+                          <a:solidFill>
+                            <a:srgbClr val="FFFFFF"/>
+                          </a:solidFill>
+                          <a:latin typeface="微软雅黑"/>
+                        </a:rPr>
+                        <a:t>定位 / 核心职责</a:t>
+                      </a:r>
+                    </a:p>
+                  </a:txBody>
+                  <a:tcPr anchor="ctr" marL="91440" marR="73152" marT="36576" marB="36576">
+                    <a:solidFill>
+                      <a:srgbClr val="0B1F3A"/>
+                    </a:solidFill>
+                  </a:tcPr>
+                </a:tc>
+                <a:tc>
+                  <a:txBody>
+                    <a:bodyPr/>
+                    <a:lstStyle/>
+                    <a:p>
+                      <a:r>
+                        <a:rPr sz="1300" b="1">
+                          <a:solidFill>
+                            <a:srgbClr val="FFFFFF"/>
+                          </a:solidFill>
+                          <a:latin typeface="微软雅黑"/>
+                        </a:rPr>
+                        <a:t>落地抓手</a:t>
+                      </a:r>
+                    </a:p>
+                  </a:txBody>
+                  <a:tcPr anchor="ctr" marL="91440" marR="73152" marT="36576" marB="36576">
+                    <a:solidFill>
+                      <a:srgbClr val="0B1F3A"/>
+                    </a:solidFill>
+                  </a:tcPr>
+                </a:tc>
+              </a:tr>
+              <a:tr h="678180">
+                <a:tc>
+                  <a:txBody>
+                    <a:bodyPr/>
+                    <a:lstStyle/>
+                    <a:p>
+                      <a:r>
+                        <a:rPr sz="1150">
+                          <a:solidFill>
+                            <a:srgbClr val="1A2638"/>
+                          </a:solidFill>
+                          <a:latin typeface="微软雅黑"/>
+                        </a:rPr>
+                        <a:t>云计算创新基地 / 五角场创新创业学院</a:t>
+                      </a:r>
+                    </a:p>
+                  </a:txBody>
+                  <a:tcPr anchor="ctr" marL="91440" marR="73152" marT="36576" marB="36576">
+                    <a:solidFill>
+                      <a:srgbClr val="FFFFFF"/>
+                    </a:solidFill>
+                  </a:tcPr>
+                </a:tc>
+                <a:tc>
+                  <a:txBody>
+                    <a:bodyPr/>
+                    <a:lstStyle/>
+                    <a:p>
+                      <a:r>
+                        <a:rPr sz="1150">
+                          <a:solidFill>
+                            <a:srgbClr val="1A2638"/>
+                          </a:solidFill>
+                          <a:latin typeface="微软雅黑"/>
+                        </a:rPr>
+                        <a:t>产业原点 · 孵化体系与空间品牌</a:t>
+                      </a:r>
+                    </a:p>
+                  </a:txBody>
+                  <a:tcPr anchor="ctr" marL="91440" marR="73152" marT="36576" marB="36576">
+                    <a:solidFill>
+                      <a:srgbClr val="FFFFFF"/>
+                    </a:solidFill>
+                  </a:tcPr>
+                </a:tc>
+                <a:tc>
+                  <a:txBody>
+                    <a:bodyPr/>
+                    <a:lstStyle/>
+                    <a:p>
+                      <a:r>
+                        <a:rPr sz="1150">
+                          <a:solidFill>
+                            <a:srgbClr val="1A2638"/>
+                          </a:solidFill>
+                          <a:latin typeface="微软雅黑"/>
+                        </a:rPr>
+                        <a:t>产业准入标准、开放活动平台、输出运营模式</a:t>
+                      </a:r>
+                    </a:p>
+                  </a:txBody>
+                  <a:tcPr anchor="ctr" marL="91440" marR="73152" marT="36576" marB="36576">
+                    <a:solidFill>
+                      <a:srgbClr val="FFFFFF"/>
+                    </a:solidFill>
+                  </a:tcPr>
+                </a:tc>
+              </a:tr>
+              <a:tr h="678180">
+                <a:tc>
+                  <a:txBody>
+                    <a:bodyPr/>
+                    <a:lstStyle/>
+                    <a:p>
+                      <a:r>
+                        <a:rPr sz="1150">
+                          <a:solidFill>
+                            <a:srgbClr val="1A2638"/>
+                          </a:solidFill>
+                          <a:latin typeface="微软雅黑"/>
+                        </a:rPr>
+                        <a:t>腾讯云</a:t>
+                      </a:r>
+                    </a:p>
+                  </a:txBody>
+                  <a:tcPr anchor="ctr" marL="91440" marR="73152" marT="36576" marB="36576">
+                    <a:solidFill>
+                      <a:srgbClr val="EDF2F9"/>
+                    </a:solidFill>
+                  </a:tcPr>
+                </a:tc>
+                <a:tc>
+                  <a:txBody>
+                    <a:bodyPr/>
+                    <a:lstStyle/>
+                    <a:p>
+                      <a:r>
+                        <a:rPr sz="1150">
+                          <a:solidFill>
+                            <a:srgbClr val="1A2638"/>
+                          </a:solidFill>
+                          <a:latin typeface="微软雅黑"/>
+                        </a:rPr>
+                        <a:t>算力与技术底座 · 全栈支撑</a:t>
+                      </a:r>
+                    </a:p>
+                  </a:txBody>
+                  <a:tcPr anchor="ctr" marL="91440" marR="73152" marT="36576" marB="36576">
+                    <a:solidFill>
+                      <a:srgbClr val="EDF2F9"/>
+                    </a:solidFill>
+                  </a:tcPr>
+                </a:tc>
+                <a:tc>
+                  <a:txBody>
+                    <a:bodyPr/>
+                    <a:lstStyle/>
+                    <a:p>
+                      <a:r>
+                        <a:rPr sz="1150">
+                          <a:solidFill>
+                            <a:srgbClr val="1A2638"/>
+                          </a:solidFill>
+                          <a:latin typeface="微软雅黑"/>
+                        </a:rPr>
+                        <a:t>算力补贴、大模型/API、技术中台、初创扶持</a:t>
+                      </a:r>
+                    </a:p>
+                  </a:txBody>
+                  <a:tcPr anchor="ctr" marL="91440" marR="73152" marT="36576" marB="36576">
+                    <a:solidFill>
+                      <a:srgbClr val="EDF2F9"/>
+                    </a:solidFill>
+                  </a:tcPr>
+                </a:tc>
+              </a:tr>
+              <a:tr h="678180">
+                <a:tc>
+                  <a:txBody>
+                    <a:bodyPr/>
+                    <a:lstStyle/>
+                    <a:p>
+                      <a:r>
+                        <a:rPr sz="1150">
+                          <a:solidFill>
+                            <a:srgbClr val="1A2638"/>
+                          </a:solidFill>
+                          <a:latin typeface="微软雅黑"/>
+                        </a:rPr>
+                        <a:t>复旦大学住房政策研究中心</a:t>
+                      </a:r>
+                    </a:p>
+                  </a:txBody>
+                  <a:tcPr anchor="ctr" marL="91440" marR="73152" marT="36576" marB="36576">
+                    <a:solidFill>
+                      <a:srgbClr val="FFFFFF"/>
+                    </a:solidFill>
+                  </a:tcPr>
+                </a:tc>
+                <a:tc>
+                  <a:txBody>
+                    <a:bodyPr/>
+                    <a:lstStyle/>
+                    <a:p>
+                      <a:r>
+                        <a:rPr sz="1150">
+                          <a:solidFill>
+                            <a:srgbClr val="1A2638"/>
+                          </a:solidFill>
+                          <a:latin typeface="微软雅黑"/>
+                        </a:rPr>
+                        <a:t>智库大脑 · 资产评估与政策支持</a:t>
+                      </a:r>
+                    </a:p>
+                  </a:txBody>
+                  <a:tcPr anchor="ctr" marL="91440" marR="73152" marT="36576" marB="36576">
+                    <a:solidFill>
+                      <a:srgbClr val="FFFFFF"/>
+                    </a:solidFill>
+                  </a:tcPr>
+                </a:tc>
+                <a:tc>
+                  <a:txBody>
+                    <a:bodyPr/>
+                    <a:lstStyle/>
+                    <a:p>
+                      <a:r>
+                        <a:rPr sz="1150">
+                          <a:solidFill>
+                            <a:srgbClr val="1A2638"/>
+                          </a:solidFill>
+                          <a:latin typeface="微软雅黑"/>
+                        </a:rPr>
+                        <a:t>物业改造可行性报告、城市更新补贴、人才公寓配套</a:t>
+                      </a:r>
+                    </a:p>
+                  </a:txBody>
+                  <a:tcPr anchor="ctr" marL="91440" marR="73152" marT="36576" marB="36576">
+                    <a:solidFill>
+                      <a:srgbClr val="FFFFFF"/>
+                    </a:solidFill>
+                  </a:tcPr>
+                </a:tc>
+              </a:tr>
+              <a:tr h="678180">
+                <a:tc>
+                  <a:txBody>
+                    <a:bodyPr/>
+                    <a:lstStyle/>
+                    <a:p>
+                      <a:r>
+                        <a:rPr sz="1150">
+                          <a:solidFill>
+                            <a:srgbClr val="1A2638"/>
+                          </a:solidFill>
+                          <a:latin typeface="微软雅黑"/>
+                        </a:rPr>
+                        <a:t>人工智能商业化落地组委会</a:t>
+                      </a:r>
+                    </a:p>
+                  </a:txBody>
+                  <a:tcPr anchor="ctr" marL="91440" marR="73152" marT="36576" marB="36576">
+                    <a:solidFill>
+                      <a:srgbClr val="EDF2F9"/>
+                    </a:solidFill>
+                  </a:tcPr>
+                </a:tc>
+                <a:tc>
+                  <a:txBody>
+                    <a:bodyPr/>
+                    <a:lstStyle/>
+                    <a:p>
+                      <a:r>
+                        <a:rPr sz="1150">
+                          <a:solidFill>
+                            <a:srgbClr val="1A2638"/>
+                          </a:solidFill>
+                          <a:latin typeface="微软雅黑"/>
+                        </a:rPr>
+                        <a:t>流量漏斗(技术) · AI 内容与投融资</a:t>
+                      </a:r>
+                    </a:p>
+                  </a:txBody>
+                  <a:tcPr anchor="ctr" marL="91440" marR="73152" marT="36576" marB="36576">
+                    <a:solidFill>
+                      <a:srgbClr val="EDF2F9"/>
+                    </a:solidFill>
+                  </a:tcPr>
+                </a:tc>
+                <a:tc>
+                  <a:txBody>
+                    <a:bodyPr/>
+                    <a:lstStyle/>
+                    <a:p>
+                      <a:r>
+                        <a:rPr sz="1150">
+                          <a:solidFill>
+                            <a:srgbClr val="1A2638"/>
+                          </a:solidFill>
+                          <a:latin typeface="微软雅黑"/>
+                        </a:rPr>
+                        <a:t>AI 切磋者大会、OPC 选育、商业化落地辅导</a:t>
+                      </a:r>
+                    </a:p>
+                  </a:txBody>
+                  <a:tcPr anchor="ctr" marL="91440" marR="73152" marT="36576" marB="36576">
+                    <a:solidFill>
+                      <a:srgbClr val="EDF2F9"/>
+                    </a:solidFill>
+                  </a:tcPr>
+                </a:tc>
+              </a:tr>
+              <a:tr h="678180">
+                <a:tc>
+                  <a:txBody>
+                    <a:bodyPr/>
+                    <a:lstStyle/>
+                    <a:p>
+                      <a:r>
+                        <a:rPr sz="1150">
+                          <a:solidFill>
+                            <a:srgbClr val="1A2638"/>
+                          </a:solidFill>
+                          <a:latin typeface="微软雅黑"/>
+                        </a:rPr>
+                        <a:t>杨浦区科技企业联合会</a:t>
+                      </a:r>
+                    </a:p>
+                  </a:txBody>
+                  <a:tcPr anchor="ctr" marL="91440" marR="73152" marT="36576" marB="36576">
+                    <a:solidFill>
+                      <a:srgbClr val="FFFFFF"/>
+                    </a:solidFill>
+                  </a:tcPr>
+                </a:tc>
+                <a:tc>
+                  <a:txBody>
+                    <a:bodyPr/>
+                    <a:lstStyle/>
+                    <a:p>
+                      <a:r>
+                        <a:rPr sz="1150">
+                          <a:solidFill>
+                            <a:srgbClr val="1A2638"/>
+                          </a:solidFill>
+                          <a:latin typeface="微软雅黑"/>
+                        </a:rPr>
+                        <a:t>流量漏斗(企业) · 招商渠道与跨区联动</a:t>
+                      </a:r>
+                    </a:p>
+                  </a:txBody>
+                  <a:tcPr anchor="ctr" marL="91440" marR="73152" marT="36576" marB="36576">
+                    <a:solidFill>
+                      <a:srgbClr val="FFFFFF"/>
+                    </a:solidFill>
+                  </a:tcPr>
+                </a:tc>
+                <a:tc>
+                  <a:txBody>
+                    <a:bodyPr/>
+                    <a:lstStyle/>
+                    <a:p>
+                      <a:r>
+                        <a:rPr sz="1150">
+                          <a:solidFill>
+                            <a:srgbClr val="1A2638"/>
+                          </a:solidFill>
+                          <a:latin typeface="微软雅黑"/>
+                        </a:rPr>
+                        <a:t>企业需求数据库、组织会员考察、对接各地商会</a:t>
+                      </a:r>
+                    </a:p>
+                  </a:txBody>
+                  <a:tcPr anchor="ctr" marL="91440" marR="73152" marT="36576" marB="36576">
+                    <a:solidFill>
+                      <a:srgbClr val="FFFFFF"/>
+                    </a:solidFill>
+                  </a:tcPr>
+                </a:tc>
+              </a:tr>
+            </a:tbl>
+          </a:graphicData>
+        </a:graphic>
+      </p:graphicFrame>
+      <p:sp>
+        <p:nvSpPr>
+          <p:cNvPr id="8" name="TextBox 7"/>
           <p:cNvSpPr txBox="1"/>
           <p:nvPr/>
         </p:nvSpPr>
         <p:spPr>
           <a:xfrm>
-            <a:off x="502920" y="1508760"/>
-            <a:ext cx="1188720" cy="1417320"/>
-          </a:xfrm>
-          <a:prstGeom prst="rect">
-            <a:avLst/>
-          </a:prstGeom>
-          <a:noFill/>
-        </p:spPr>
-        <p:txBody>
-          <a:bodyPr wrap="square" anchor="ctr">
-            <a:spAutoFit/>
-          </a:bodyPr>
-          <a:lstStyle/>
-          <a:p>
-            <a:pPr algn="ctr">
-              <a:lnSpc>
-                <a:spcPct val="105000"/>
-              </a:lnSpc>
-              <a:spcAft>
-                <a:spcPts val="600"/>
-              </a:spcAft>
-            </a:pPr>
-            <a:r>
-              <a:rPr sz="3400" b="1">
-                <a:solidFill>
-                  <a:srgbClr val="FFFFFF"/>
-                </a:solidFill>
-                <a:latin typeface="微软雅黑"/>
-                <a:ea typeface="微软雅黑"/>
-              </a:rPr>
-              <a:t>01</a:t>
-            </a:r>
-          </a:p>
-        </p:txBody>
-      </p:sp>
-      <p:sp>
-        <p:nvSpPr>
-          <p:cNvPr id="10" name="TextBox 9"/>
-          <p:cNvSpPr txBox="1"/>
-          <p:nvPr/>
-        </p:nvSpPr>
-        <p:spPr>
-          <a:xfrm>
-            <a:off x="1874519" y="1618488"/>
-            <a:ext cx="9509760" cy="1188720"/>
+            <a:off x="502920" y="5623560"/>
+            <a:ext cx="11155680" cy="914400"/>
           </a:xfrm>
           <a:prstGeom prst="rect">
             <a:avLst/>
@@ -4990,486 +5672,28 @@
                 <a:spcPct val="105000"/>
               </a:lnSpc>
               <a:spcAft>
-                <a:spcPts val="300"/>
-              </a:spcAft>
-            </a:pPr>
-            <a:r>
-              <a:rPr sz="1800" b="1">
-                <a:solidFill>
-                  <a:srgbClr val="1A2638"/>
-                </a:solidFill>
-                <a:latin typeface="微软雅黑"/>
-                <a:ea typeface="微软雅黑"/>
-              </a:rPr>
-              <a:t>AI 产业社区试点</a:t>
-            </a:r>
-          </a:p>
-          <a:p>
-            <a:pPr algn="l">
-              <a:lnSpc>
-                <a:spcPct val="105000"/>
-              </a:lnSpc>
-              <a:spcAft>
-                <a:spcPts val="300"/>
-              </a:spcAft>
-            </a:pPr>
-            <a:r>
-              <a:rPr sz="1350" b="0">
+                <a:spcPts val="600"/>
+              </a:spcAft>
+            </a:pPr>
+            <a:r>
+              <a:rPr sz="1300" b="1">
+                <a:solidFill>
+                  <a:srgbClr val="1B4F9C"/>
+                </a:solidFill>
+                <a:latin typeface="微软雅黑"/>
+                <a:ea typeface="微软雅黑"/>
+              </a:rPr>
+              <a:t>协同机制：</a:t>
+            </a:r>
+            <a:r>
+              <a:rPr sz="1300" b="0">
                 <a:solidFill>
                   <a:srgbClr val="5B6B82"/>
                 </a:solidFill>
                 <a:latin typeface="微软雅黑"/>
                 <a:ea typeface="微软雅黑"/>
               </a:rPr>
-              <a:t>联合考察对方推荐的 1–2 个空置物业（大学路 / 杨浦滨江）。</a:t>
-            </a:r>
-          </a:p>
-          <a:p>
-            <a:pPr algn="l">
-              <a:lnSpc>
-                <a:spcPct val="105000"/>
-              </a:lnSpc>
-              <a:spcAft>
-                <a:spcPts val="300"/>
-              </a:spcAft>
-            </a:pPr>
-            <a:r>
-              <a:rPr sz="1300" b="1">
-                <a:solidFill>
-                  <a:srgbClr val="1B4F9C"/>
-                </a:solidFill>
-                <a:latin typeface="微软雅黑"/>
-                <a:ea typeface="微软雅黑"/>
-              </a:rPr>
-              <a:t>交付：2 周内出具《产业社区改造初步方案》</a:t>
-            </a:r>
-          </a:p>
-        </p:txBody>
-      </p:sp>
-      <p:sp>
-        <p:nvSpPr>
-          <p:cNvPr id="11" name="Rectangle 10"/>
-          <p:cNvSpPr/>
-          <p:nvPr/>
-        </p:nvSpPr>
-        <p:spPr>
-          <a:xfrm>
-            <a:off x="502920" y="3108960"/>
-            <a:ext cx="11155680" cy="1417320"/>
-          </a:xfrm>
-          <a:prstGeom prst="rect">
-            <a:avLst/>
-          </a:prstGeom>
-          <a:solidFill>
-            <a:srgbClr val="E8EEF6"/>
-          </a:solidFill>
-          <a:ln>
-            <a:noFill/>
-          </a:ln>
-          <a:effectLst/>
-        </p:spPr>
-        <p:style>
-          <a:lnRef idx="1">
-            <a:schemeClr val="accent1"/>
-          </a:lnRef>
-          <a:fillRef idx="3">
-            <a:schemeClr val="accent1"/>
-          </a:fillRef>
-          <a:effectRef idx="2">
-            <a:schemeClr val="accent1"/>
-          </a:effectRef>
-          <a:fontRef idx="minor">
-            <a:schemeClr val="lt1"/>
-          </a:fontRef>
-        </p:style>
-        <p:txBody>
-          <a:bodyPr rtlCol="0" anchor="ctr"/>
-          <a:lstStyle/>
-          <a:p>
-            <a:pPr algn="ctr"/>
-          </a:p>
-        </p:txBody>
-      </p:sp>
-      <p:sp>
-        <p:nvSpPr>
-          <p:cNvPr id="12" name="Rectangle 11"/>
-          <p:cNvSpPr/>
-          <p:nvPr/>
-        </p:nvSpPr>
-        <p:spPr>
-          <a:xfrm>
-            <a:off x="502920" y="3108960"/>
-            <a:ext cx="1188720" cy="1417320"/>
-          </a:xfrm>
-          <a:prstGeom prst="rect">
-            <a:avLst/>
-          </a:prstGeom>
-          <a:solidFill>
-            <a:srgbClr val="16B8C6"/>
-          </a:solidFill>
-          <a:ln>
-            <a:noFill/>
-          </a:ln>
-          <a:effectLst/>
-        </p:spPr>
-        <p:style>
-          <a:lnRef idx="1">
-            <a:schemeClr val="accent1"/>
-          </a:lnRef>
-          <a:fillRef idx="3">
-            <a:schemeClr val="accent1"/>
-          </a:fillRef>
-          <a:effectRef idx="2">
-            <a:schemeClr val="accent1"/>
-          </a:effectRef>
-          <a:fontRef idx="minor">
-            <a:schemeClr val="lt1"/>
-          </a:fontRef>
-        </p:style>
-        <p:txBody>
-          <a:bodyPr rtlCol="0" anchor="ctr"/>
-          <a:lstStyle/>
-          <a:p>
-            <a:pPr algn="ctr"/>
-          </a:p>
-        </p:txBody>
-      </p:sp>
-      <p:sp>
-        <p:nvSpPr>
-          <p:cNvPr id="13" name="TextBox 12"/>
-          <p:cNvSpPr txBox="1"/>
-          <p:nvPr/>
-        </p:nvSpPr>
-        <p:spPr>
-          <a:xfrm>
-            <a:off x="502920" y="3108960"/>
-            <a:ext cx="1188720" cy="1417320"/>
-          </a:xfrm>
-          <a:prstGeom prst="rect">
-            <a:avLst/>
-          </a:prstGeom>
-          <a:noFill/>
-        </p:spPr>
-        <p:txBody>
-          <a:bodyPr wrap="square" anchor="ctr">
-            <a:spAutoFit/>
-          </a:bodyPr>
-          <a:lstStyle/>
-          <a:p>
-            <a:pPr algn="ctr">
-              <a:lnSpc>
-                <a:spcPct val="105000"/>
-              </a:lnSpc>
-              <a:spcAft>
-                <a:spcPts val="600"/>
-              </a:spcAft>
-            </a:pPr>
-            <a:r>
-              <a:rPr sz="3400" b="1">
-                <a:solidFill>
-                  <a:srgbClr val="FFFFFF"/>
-                </a:solidFill>
-                <a:latin typeface="微软雅黑"/>
-                <a:ea typeface="微软雅黑"/>
-              </a:rPr>
-              <a:t>02</a:t>
-            </a:r>
-          </a:p>
-        </p:txBody>
-      </p:sp>
-      <p:sp>
-        <p:nvSpPr>
-          <p:cNvPr id="14" name="TextBox 13"/>
-          <p:cNvSpPr txBox="1"/>
-          <p:nvPr/>
-        </p:nvSpPr>
-        <p:spPr>
-          <a:xfrm>
-            <a:off x="1874519" y="3218688"/>
-            <a:ext cx="9509760" cy="1188720"/>
-          </a:xfrm>
-          <a:prstGeom prst="rect">
-            <a:avLst/>
-          </a:prstGeom>
-          <a:noFill/>
-        </p:spPr>
-        <p:txBody>
-          <a:bodyPr wrap="square" anchor="t">
-            <a:spAutoFit/>
-          </a:bodyPr>
-          <a:lstStyle/>
-          <a:p>
-            <a:pPr algn="l">
-              <a:lnSpc>
-                <a:spcPct val="105000"/>
-              </a:lnSpc>
-              <a:spcAft>
-                <a:spcPts val="300"/>
-              </a:spcAft>
-            </a:pPr>
-            <a:r>
-              <a:rPr sz="1800" b="1">
-                <a:solidFill>
-                  <a:srgbClr val="1A2638"/>
-                </a:solidFill>
-                <a:latin typeface="微软雅黑"/>
-                <a:ea typeface="微软雅黑"/>
-              </a:rPr>
-              <a:t>企业需求数据库共建</a:t>
-            </a:r>
-          </a:p>
-          <a:p>
-            <a:pPr algn="l">
-              <a:lnSpc>
-                <a:spcPct val="105000"/>
-              </a:lnSpc>
-              <a:spcAft>
-                <a:spcPts val="300"/>
-              </a:spcAft>
-            </a:pPr>
-            <a:r>
-              <a:rPr sz="1350" b="0">
-                <a:solidFill>
-                  <a:srgbClr val="5B6B82"/>
-                </a:solidFill>
-                <a:latin typeface="微软雅黑"/>
-                <a:ea typeface="微软雅黑"/>
-              </a:rPr>
-              <a:t>本周启动联合会会员企业扩租 / 迁址需求调研。</a:t>
-            </a:r>
-          </a:p>
-          <a:p>
-            <a:pPr algn="l">
-              <a:lnSpc>
-                <a:spcPct val="105000"/>
-              </a:lnSpc>
-              <a:spcAft>
-                <a:spcPts val="300"/>
-              </a:spcAft>
-            </a:pPr>
-            <a:r>
-              <a:rPr sz="1300" b="1">
-                <a:solidFill>
-                  <a:srgbClr val="1B4F9C"/>
-                </a:solidFill>
-                <a:latin typeface="微软雅黑"/>
-                <a:ea typeface="微软雅黑"/>
-              </a:rPr>
-              <a:t>交付：1 个月内形成首批 50 家目标企业清单</a:t>
-            </a:r>
-          </a:p>
-        </p:txBody>
-      </p:sp>
-      <p:sp>
-        <p:nvSpPr>
-          <p:cNvPr id="15" name="Rectangle 14"/>
-          <p:cNvSpPr/>
-          <p:nvPr/>
-        </p:nvSpPr>
-        <p:spPr>
-          <a:xfrm>
-            <a:off x="502920" y="4709160"/>
-            <a:ext cx="11155680" cy="1417320"/>
-          </a:xfrm>
-          <a:prstGeom prst="rect">
-            <a:avLst/>
-          </a:prstGeom>
-          <a:solidFill>
-            <a:srgbClr val="E8EEF6"/>
-          </a:solidFill>
-          <a:ln>
-            <a:noFill/>
-          </a:ln>
-          <a:effectLst/>
-        </p:spPr>
-        <p:style>
-          <a:lnRef idx="1">
-            <a:schemeClr val="accent1"/>
-          </a:lnRef>
-          <a:fillRef idx="3">
-            <a:schemeClr val="accent1"/>
-          </a:fillRef>
-          <a:effectRef idx="2">
-            <a:schemeClr val="accent1"/>
-          </a:effectRef>
-          <a:fontRef idx="minor">
-            <a:schemeClr val="lt1"/>
-          </a:fontRef>
-        </p:style>
-        <p:txBody>
-          <a:bodyPr rtlCol="0" anchor="ctr"/>
-          <a:lstStyle/>
-          <a:p>
-            <a:pPr algn="ctr"/>
-          </a:p>
-        </p:txBody>
-      </p:sp>
-      <p:sp>
-        <p:nvSpPr>
-          <p:cNvPr id="16" name="Rectangle 15"/>
-          <p:cNvSpPr/>
-          <p:nvPr/>
-        </p:nvSpPr>
-        <p:spPr>
-          <a:xfrm>
-            <a:off x="502920" y="4709160"/>
-            <a:ext cx="1188720" cy="1417320"/>
-          </a:xfrm>
-          <a:prstGeom prst="rect">
-            <a:avLst/>
-          </a:prstGeom>
-          <a:solidFill>
-            <a:srgbClr val="F2B632"/>
-          </a:solidFill>
-          <a:ln>
-            <a:noFill/>
-          </a:ln>
-          <a:effectLst/>
-        </p:spPr>
-        <p:style>
-          <a:lnRef idx="1">
-            <a:schemeClr val="accent1"/>
-          </a:lnRef>
-          <a:fillRef idx="3">
-            <a:schemeClr val="accent1"/>
-          </a:fillRef>
-          <a:effectRef idx="2">
-            <a:schemeClr val="accent1"/>
-          </a:effectRef>
-          <a:fontRef idx="minor">
-            <a:schemeClr val="lt1"/>
-          </a:fontRef>
-        </p:style>
-        <p:txBody>
-          <a:bodyPr rtlCol="0" anchor="ctr"/>
-          <a:lstStyle/>
-          <a:p>
-            <a:pPr algn="ctr"/>
-          </a:p>
-        </p:txBody>
-      </p:sp>
-      <p:sp>
-        <p:nvSpPr>
-          <p:cNvPr id="17" name="TextBox 16"/>
-          <p:cNvSpPr txBox="1"/>
-          <p:nvPr/>
-        </p:nvSpPr>
-        <p:spPr>
-          <a:xfrm>
-            <a:off x="502920" y="4709160"/>
-            <a:ext cx="1188720" cy="1417320"/>
-          </a:xfrm>
-          <a:prstGeom prst="rect">
-            <a:avLst/>
-          </a:prstGeom>
-          <a:noFill/>
-        </p:spPr>
-        <p:txBody>
-          <a:bodyPr wrap="square" anchor="ctr">
-            <a:spAutoFit/>
-          </a:bodyPr>
-          <a:lstStyle/>
-          <a:p>
-            <a:pPr algn="ctr">
-              <a:lnSpc>
-                <a:spcPct val="105000"/>
-              </a:lnSpc>
-              <a:spcAft>
-                <a:spcPts val="600"/>
-              </a:spcAft>
-            </a:pPr>
-            <a:r>
-              <a:rPr sz="3400" b="1">
-                <a:solidFill>
-                  <a:srgbClr val="0B1F3A"/>
-                </a:solidFill>
-                <a:latin typeface="微软雅黑"/>
-                <a:ea typeface="微软雅黑"/>
-              </a:rPr>
-              <a:t>03</a:t>
-            </a:r>
-          </a:p>
-        </p:txBody>
-      </p:sp>
-      <p:sp>
-        <p:nvSpPr>
-          <p:cNvPr id="18" name="TextBox 17"/>
-          <p:cNvSpPr txBox="1"/>
-          <p:nvPr/>
-        </p:nvSpPr>
-        <p:spPr>
-          <a:xfrm>
-            <a:off x="1874519" y="4818888"/>
-            <a:ext cx="9509760" cy="1188720"/>
-          </a:xfrm>
-          <a:prstGeom prst="rect">
-            <a:avLst/>
-          </a:prstGeom>
-          <a:noFill/>
-        </p:spPr>
-        <p:txBody>
-          <a:bodyPr wrap="square" anchor="t">
-            <a:spAutoFit/>
-          </a:bodyPr>
-          <a:lstStyle/>
-          <a:p>
-            <a:pPr algn="l">
-              <a:lnSpc>
-                <a:spcPct val="105000"/>
-              </a:lnSpc>
-              <a:spcAft>
-                <a:spcPts val="300"/>
-              </a:spcAft>
-            </a:pPr>
-            <a:r>
-              <a:rPr sz="1800" b="1">
-                <a:solidFill>
-                  <a:srgbClr val="1A2638"/>
-                </a:solidFill>
-                <a:latin typeface="微软雅黑"/>
-                <a:ea typeface="微软雅黑"/>
-              </a:rPr>
-              <a:t>首场 AI 场景对接会</a:t>
-            </a:r>
-          </a:p>
-          <a:p>
-            <a:pPr algn="l">
-              <a:lnSpc>
-                <a:spcPct val="105000"/>
-              </a:lnSpc>
-              <a:spcAft>
-                <a:spcPts val="300"/>
-              </a:spcAft>
-            </a:pPr>
-            <a:r>
-              <a:rPr sz="1350" b="0">
-                <a:solidFill>
-                  <a:srgbClr val="5B6B82"/>
-                </a:solidFill>
-                <a:latin typeface="微软雅黑"/>
-                <a:ea typeface="微软雅黑"/>
-              </a:rPr>
-              <a:t>7 月办首场“AI 企业走进云计算创新基地”活动。</a:t>
-            </a:r>
-          </a:p>
-          <a:p>
-            <a:pPr algn="l">
-              <a:lnSpc>
-                <a:spcPct val="105000"/>
-              </a:lnSpc>
-              <a:spcAft>
-                <a:spcPts val="300"/>
-              </a:spcAft>
-            </a:pPr>
-            <a:r>
-              <a:rPr sz="1300" b="1">
-                <a:solidFill>
-                  <a:srgbClr val="1B4F9C"/>
-                </a:solidFill>
-                <a:latin typeface="微软雅黑"/>
-                <a:ea typeface="微软雅黑"/>
-              </a:rPr>
-              <a:t>交付：活动方案 + 拟邀企业名单（本周完成）</a:t>
+              <a:t>五方联席工作组（每月对齐）· 资源共享清单 · 战略合作备忘录（明确佣金、运营分成与算力补贴口径）。</a:t>
             </a:r>
           </a:p>
         </p:txBody>
@@ -5483,6 +5707,2260 @@
 </file>
 
 <file path=ppt/slides/slide12.xml><?xml version="1.0" encoding="utf-8"?>
+<p:sld xmlns:a="http://schemas.openxmlformats.org/drawingml/2006/main" xmlns:p="http://schemas.openxmlformats.org/presentationml/2006/main" xmlns:r="http://schemas.openxmlformats.org/officeDocument/2006/relationships">
+  <p:cSld>
+    <p:bg>
+      <p:bgPr>
+        <a:solidFill>
+          <a:srgbClr val="FFFFFF"/>
+        </a:solidFill>
+        <a:effectLst/>
+      </p:bgPr>
+    </p:bg>
+    <p:spTree>
+      <p:nvGrpSpPr>
+        <p:cNvPr id="1" name=""/>
+        <p:cNvGrpSpPr/>
+        <p:nvPr/>
+      </p:nvGrpSpPr>
+      <p:grpSpPr/>
+      <p:sp>
+        <p:nvSpPr>
+          <p:cNvPr id="2" name="Rectangle 1"/>
+          <p:cNvSpPr/>
+          <p:nvPr/>
+        </p:nvSpPr>
+        <p:spPr>
+          <a:xfrm>
+            <a:off x="0" y="0"/>
+            <a:ext cx="12191695" cy="1143000"/>
+          </a:xfrm>
+          <a:prstGeom prst="rect">
+            <a:avLst/>
+          </a:prstGeom>
+          <a:solidFill>
+            <a:srgbClr val="0B1F3A"/>
+          </a:solidFill>
+          <a:ln>
+            <a:noFill/>
+          </a:ln>
+          <a:effectLst/>
+        </p:spPr>
+        <p:style>
+          <a:lnRef idx="1">
+            <a:schemeClr val="accent1"/>
+          </a:lnRef>
+          <a:fillRef idx="3">
+            <a:schemeClr val="accent1"/>
+          </a:fillRef>
+          <a:effectRef idx="2">
+            <a:schemeClr val="accent1"/>
+          </a:effectRef>
+          <a:fontRef idx="minor">
+            <a:schemeClr val="lt1"/>
+          </a:fontRef>
+        </p:style>
+        <p:txBody>
+          <a:bodyPr rtlCol="0" anchor="ctr"/>
+          <a:lstStyle/>
+          <a:p>
+            <a:pPr algn="ctr"/>
+          </a:p>
+        </p:txBody>
+      </p:sp>
+      <p:sp>
+        <p:nvSpPr>
+          <p:cNvPr id="3" name="Rectangle 2"/>
+          <p:cNvSpPr/>
+          <p:nvPr/>
+        </p:nvSpPr>
+        <p:spPr>
+          <a:xfrm>
+            <a:off x="0" y="1143000"/>
+            <a:ext cx="12191695" cy="54864"/>
+          </a:xfrm>
+          <a:prstGeom prst="rect">
+            <a:avLst/>
+          </a:prstGeom>
+          <a:solidFill>
+            <a:srgbClr val="16B8C6"/>
+          </a:solidFill>
+          <a:ln>
+            <a:noFill/>
+          </a:ln>
+          <a:effectLst/>
+        </p:spPr>
+        <p:style>
+          <a:lnRef idx="1">
+            <a:schemeClr val="accent1"/>
+          </a:lnRef>
+          <a:fillRef idx="3">
+            <a:schemeClr val="accent1"/>
+          </a:fillRef>
+          <a:effectRef idx="2">
+            <a:schemeClr val="accent1"/>
+          </a:effectRef>
+          <a:fontRef idx="minor">
+            <a:schemeClr val="lt1"/>
+          </a:fontRef>
+        </p:style>
+        <p:txBody>
+          <a:bodyPr rtlCol="0" anchor="ctr"/>
+          <a:lstStyle/>
+          <a:p>
+            <a:pPr algn="ctr"/>
+          </a:p>
+        </p:txBody>
+      </p:sp>
+      <p:sp>
+        <p:nvSpPr>
+          <p:cNvPr id="4" name="Rectangle 3"/>
+          <p:cNvSpPr/>
+          <p:nvPr/>
+        </p:nvSpPr>
+        <p:spPr>
+          <a:xfrm>
+            <a:off x="0" y="0"/>
+            <a:ext cx="164592" cy="1143000"/>
+          </a:xfrm>
+          <a:prstGeom prst="rect">
+            <a:avLst/>
+          </a:prstGeom>
+          <a:solidFill>
+            <a:srgbClr val="F2B632"/>
+          </a:solidFill>
+          <a:ln>
+            <a:noFill/>
+          </a:ln>
+          <a:effectLst/>
+        </p:spPr>
+        <p:style>
+          <a:lnRef idx="1">
+            <a:schemeClr val="accent1"/>
+          </a:lnRef>
+          <a:fillRef idx="3">
+            <a:schemeClr val="accent1"/>
+          </a:fillRef>
+          <a:effectRef idx="2">
+            <a:schemeClr val="accent1"/>
+          </a:effectRef>
+          <a:fontRef idx="minor">
+            <a:schemeClr val="lt1"/>
+          </a:fontRef>
+        </p:style>
+        <p:txBody>
+          <a:bodyPr rtlCol="0" anchor="ctr"/>
+          <a:lstStyle/>
+          <a:p>
+            <a:pPr algn="ctr"/>
+          </a:p>
+        </p:txBody>
+      </p:sp>
+      <p:sp>
+        <p:nvSpPr>
+          <p:cNvPr id="5" name="TextBox 4"/>
+          <p:cNvSpPr txBox="1"/>
+          <p:nvPr/>
+        </p:nvSpPr>
+        <p:spPr>
+          <a:xfrm>
+            <a:off x="502920" y="146304"/>
+            <a:ext cx="10515600" cy="914400"/>
+          </a:xfrm>
+          <a:prstGeom prst="rect">
+            <a:avLst/>
+          </a:prstGeom>
+          <a:noFill/>
+        </p:spPr>
+        <p:txBody>
+          <a:bodyPr wrap="square" anchor="ctr">
+            <a:spAutoFit/>
+          </a:bodyPr>
+          <a:lstStyle/>
+          <a:p>
+            <a:pPr algn="l">
+              <a:lnSpc>
+                <a:spcPct val="105000"/>
+              </a:lnSpc>
+              <a:spcAft>
+                <a:spcPts val="200"/>
+              </a:spcAft>
+            </a:pPr>
+            <a:r>
+              <a:rPr sz="1200" b="1">
+                <a:solidFill>
+                  <a:srgbClr val="16B8C6"/>
+                </a:solidFill>
+                <a:latin typeface="微软雅黑"/>
+                <a:ea typeface="微软雅黑"/>
+              </a:rPr>
+              <a:t>BUSINESS MODEL · 收益结构</a:t>
+            </a:r>
+          </a:p>
+          <a:p>
+            <a:pPr algn="l">
+              <a:lnSpc>
+                <a:spcPct val="105000"/>
+              </a:lnSpc>
+              <a:spcAft>
+                <a:spcPts val="200"/>
+              </a:spcAft>
+            </a:pPr>
+            <a:r>
+              <a:rPr sz="2600" b="1">
+                <a:solidFill>
+                  <a:srgbClr val="FFFFFF"/>
+                </a:solidFill>
+                <a:latin typeface="微软雅黑"/>
+                <a:ea typeface="微软雅黑"/>
+              </a:rPr>
+              <a:t>合作分工 × 收益模式：拿到“运营权 + 导入权”</a:t>
+            </a:r>
+          </a:p>
+        </p:txBody>
+      </p:sp>
+      <p:sp>
+        <p:nvSpPr>
+          <p:cNvPr id="6" name="TextBox 5"/>
+          <p:cNvSpPr txBox="1"/>
+          <p:nvPr/>
+        </p:nvSpPr>
+        <p:spPr>
+          <a:xfrm>
+            <a:off x="10789920" y="146304"/>
+            <a:ext cx="1188720" cy="914400"/>
+          </a:xfrm>
+          <a:prstGeom prst="rect">
+            <a:avLst/>
+          </a:prstGeom>
+          <a:noFill/>
+        </p:spPr>
+        <p:txBody>
+          <a:bodyPr wrap="square" anchor="ctr">
+            <a:spAutoFit/>
+          </a:bodyPr>
+          <a:lstStyle/>
+          <a:p>
+            <a:pPr algn="r">
+              <a:lnSpc>
+                <a:spcPct val="105000"/>
+              </a:lnSpc>
+              <a:spcAft>
+                <a:spcPts val="600"/>
+              </a:spcAft>
+            </a:pPr>
+            <a:r>
+              <a:rPr sz="4000" b="1">
+                <a:solidFill>
+                  <a:srgbClr val="2C446E"/>
+                </a:solidFill>
+                <a:latin typeface="微软雅黑"/>
+                <a:ea typeface="微软雅黑"/>
+              </a:rPr>
+              <a:t>08</a:t>
+            </a:r>
+          </a:p>
+        </p:txBody>
+      </p:sp>
+      <p:sp>
+        <p:nvSpPr>
+          <p:cNvPr id="7" name="TextBox 6"/>
+          <p:cNvSpPr txBox="1"/>
+          <p:nvPr/>
+        </p:nvSpPr>
+        <p:spPr>
+          <a:xfrm>
+            <a:off x="502920" y="1371600"/>
+            <a:ext cx="5486400" cy="365760"/>
+          </a:xfrm>
+          <a:prstGeom prst="rect">
+            <a:avLst/>
+          </a:prstGeom>
+          <a:noFill/>
+        </p:spPr>
+        <p:txBody>
+          <a:bodyPr wrap="square" anchor="t">
+            <a:spAutoFit/>
+          </a:bodyPr>
+          <a:lstStyle/>
+          <a:p>
+            <a:pPr algn="l">
+              <a:lnSpc>
+                <a:spcPct val="105000"/>
+              </a:lnSpc>
+              <a:spcAft>
+                <a:spcPts val="600"/>
+              </a:spcAft>
+            </a:pPr>
+            <a:r>
+              <a:rPr sz="1400" b="1">
+                <a:solidFill>
+                  <a:srgbClr val="1B4F9C"/>
+                </a:solidFill>
+                <a:latin typeface="微软雅黑"/>
+                <a:ea typeface="微软雅黑"/>
+              </a:rPr>
+              <a:t>合作分工</a:t>
+            </a:r>
+          </a:p>
+        </p:txBody>
+      </p:sp>
+      <p:graphicFrame>
+        <p:nvGraphicFramePr>
+          <p:cNvPr id="8" name="Table 7"/>
+          <p:cNvGraphicFramePr>
+            <a:graphicFrameLocks noGrp="1"/>
+          </p:cNvGraphicFramePr>
+          <p:nvPr/>
+        </p:nvGraphicFramePr>
+        <p:xfrm>
+          <a:off x="502920" y="1737360"/>
+          <a:ext cx="5486400" cy="3200400"/>
+        </p:xfrm>
+        <a:graphic>
+          <a:graphicData uri="http://schemas.openxmlformats.org/drawingml/2006/table">
+            <a:tbl>
+              <a:tblPr firstRow="1" bandRow="1">
+                <a:tableStyleId>{5C22544A-7EE6-4342-B048-85BDC9FD1C3A}</a:tableStyleId>
+              </a:tblPr>
+              <a:tblGrid>
+                <a:gridCol w="1188720"/>
+                <a:gridCol w="2148840"/>
+                <a:gridCol w="2148840"/>
+              </a:tblGrid>
+              <a:tr h="533400">
+                <a:tc>
+                  <a:txBody>
+                    <a:bodyPr/>
+                    <a:lstStyle/>
+                    <a:p>
+                      <a:r>
+                        <a:rPr sz="1150" b="1">
+                          <a:solidFill>
+                            <a:srgbClr val="FFFFFF"/>
+                          </a:solidFill>
+                          <a:latin typeface="微软雅黑"/>
+                        </a:rPr>
+                        <a:t>模块</a:t>
+                      </a:r>
+                    </a:p>
+                  </a:txBody>
+                  <a:tcPr anchor="ctr" marL="91440" marR="73152" marT="36576" marB="36576">
+                    <a:solidFill>
+                      <a:srgbClr val="1B4F9C"/>
+                    </a:solidFill>
+                  </a:tcPr>
+                </a:tc>
+                <a:tc>
+                  <a:txBody>
+                    <a:bodyPr/>
+                    <a:lstStyle/>
+                    <a:p>
+                      <a:r>
+                        <a:rPr sz="1150" b="1">
+                          <a:solidFill>
+                            <a:srgbClr val="FFFFFF"/>
+                          </a:solidFill>
+                          <a:latin typeface="微软雅黑"/>
+                        </a:rPr>
+                        <a:t>平台方（云基地/腾讯云）</a:t>
+                      </a:r>
+                    </a:p>
+                  </a:txBody>
+                  <a:tcPr anchor="ctr" marL="91440" marR="73152" marT="36576" marB="36576">
+                    <a:solidFill>
+                      <a:srgbClr val="1B4F9C"/>
+                    </a:solidFill>
+                  </a:tcPr>
+                </a:tc>
+                <a:tc>
+                  <a:txBody>
+                    <a:bodyPr/>
+                    <a:lstStyle/>
+                    <a:p>
+                      <a:r>
+                        <a:rPr sz="1150" b="1">
+                          <a:solidFill>
+                            <a:srgbClr val="FFFFFF"/>
+                          </a:solidFill>
+                          <a:latin typeface="微软雅黑"/>
+                        </a:rPr>
+                        <a:t>我们</a:t>
+                      </a:r>
+                    </a:p>
+                  </a:txBody>
+                  <a:tcPr anchor="ctr" marL="91440" marR="73152" marT="36576" marB="36576">
+                    <a:solidFill>
+                      <a:srgbClr val="1B4F9C"/>
+                    </a:solidFill>
+                  </a:tcPr>
+                </a:tc>
+              </a:tr>
+              <a:tr h="533400">
+                <a:tc>
+                  <a:txBody>
+                    <a:bodyPr/>
+                    <a:lstStyle/>
+                    <a:p>
+                      <a:r>
+                        <a:rPr sz="1150">
+                          <a:solidFill>
+                            <a:srgbClr val="1A2638"/>
+                          </a:solidFill>
+                          <a:latin typeface="微软雅黑"/>
+                        </a:rPr>
+                        <a:t>空间</a:t>
+                      </a:r>
+                    </a:p>
+                  </a:txBody>
+                  <a:tcPr anchor="ctr" marL="91440" marR="73152" marT="36576" marB="36576">
+                    <a:solidFill>
+                      <a:srgbClr val="FFFFFF"/>
+                    </a:solidFill>
+                  </a:tcPr>
+                </a:tc>
+                <a:tc>
+                  <a:txBody>
+                    <a:bodyPr/>
+                    <a:lstStyle/>
+                    <a:p>
+                      <a:r>
+                        <a:rPr sz="1150">
+                          <a:solidFill>
+                            <a:srgbClr val="1A2638"/>
+                          </a:solidFill>
+                          <a:latin typeface="微软雅黑"/>
+                        </a:rPr>
+                        <a:t>提供物业</a:t>
+                      </a:r>
+                    </a:p>
+                  </a:txBody>
+                  <a:tcPr anchor="ctr" marL="91440" marR="73152" marT="36576" marB="36576">
+                    <a:solidFill>
+                      <a:srgbClr val="FFFFFF"/>
+                    </a:solidFill>
+                  </a:tcPr>
+                </a:tc>
+                <a:tc>
+                  <a:txBody>
+                    <a:bodyPr/>
+                    <a:lstStyle/>
+                    <a:p>
+                      <a:r>
+                        <a:rPr sz="1150">
+                          <a:solidFill>
+                            <a:srgbClr val="1A2638"/>
+                          </a:solidFill>
+                          <a:latin typeface="微软雅黑"/>
+                        </a:rPr>
+                        <a:t>选址 + 定位</a:t>
+                      </a:r>
+                    </a:p>
+                  </a:txBody>
+                  <a:tcPr anchor="ctr" marL="91440" marR="73152" marT="36576" marB="36576">
+                    <a:solidFill>
+                      <a:srgbClr val="FFFFFF"/>
+                    </a:solidFill>
+                  </a:tcPr>
+                </a:tc>
+              </a:tr>
+              <a:tr h="533400">
+                <a:tc>
+                  <a:txBody>
+                    <a:bodyPr/>
+                    <a:lstStyle/>
+                    <a:p>
+                      <a:r>
+                        <a:rPr sz="1150">
+                          <a:solidFill>
+                            <a:srgbClr val="1A2638"/>
+                          </a:solidFill>
+                          <a:latin typeface="微软雅黑"/>
+                        </a:rPr>
+                        <a:t>算力技术</a:t>
+                      </a:r>
+                    </a:p>
+                  </a:txBody>
+                  <a:tcPr anchor="ctr" marL="91440" marR="73152" marT="36576" marB="36576">
+                    <a:solidFill>
+                      <a:srgbClr val="EDF2F9"/>
+                    </a:solidFill>
+                  </a:tcPr>
+                </a:tc>
+                <a:tc>
+                  <a:txBody>
+                    <a:bodyPr/>
+                    <a:lstStyle/>
+                    <a:p>
+                      <a:r>
+                        <a:rPr sz="1150">
+                          <a:solidFill>
+                            <a:srgbClr val="1A2638"/>
+                          </a:solidFill>
+                          <a:latin typeface="微软雅黑"/>
+                        </a:rPr>
+                        <a:t>腾讯云补贴 + 中台</a:t>
+                      </a:r>
+                    </a:p>
+                  </a:txBody>
+                  <a:tcPr anchor="ctr" marL="91440" marR="73152" marT="36576" marB="36576">
+                    <a:solidFill>
+                      <a:srgbClr val="EDF2F9"/>
+                    </a:solidFill>
+                  </a:tcPr>
+                </a:tc>
+                <a:tc>
+                  <a:txBody>
+                    <a:bodyPr/>
+                    <a:lstStyle/>
+                    <a:p>
+                      <a:r>
+                        <a:rPr sz="1150">
+                          <a:solidFill>
+                            <a:srgbClr val="1A2638"/>
+                          </a:solidFill>
+                          <a:latin typeface="微软雅黑"/>
+                        </a:rPr>
+                        <a:t>OPC 孵化 + 工作流</a:t>
+                      </a:r>
+                    </a:p>
+                  </a:txBody>
+                  <a:tcPr anchor="ctr" marL="91440" marR="73152" marT="36576" marB="36576">
+                    <a:solidFill>
+                      <a:srgbClr val="EDF2F9"/>
+                    </a:solidFill>
+                  </a:tcPr>
+                </a:tc>
+              </a:tr>
+              <a:tr h="533400">
+                <a:tc>
+                  <a:txBody>
+                    <a:bodyPr/>
+                    <a:lstStyle/>
+                    <a:p>
+                      <a:r>
+                        <a:rPr sz="1150">
+                          <a:solidFill>
+                            <a:srgbClr val="1A2638"/>
+                          </a:solidFill>
+                          <a:latin typeface="微软雅黑"/>
+                        </a:rPr>
+                        <a:t>招商</a:t>
+                      </a:r>
+                    </a:p>
+                  </a:txBody>
+                  <a:tcPr anchor="ctr" marL="91440" marR="73152" marT="36576" marB="36576">
+                    <a:solidFill>
+                      <a:srgbClr val="FFFFFF"/>
+                    </a:solidFill>
+                  </a:tcPr>
+                </a:tc>
+                <a:tc>
+                  <a:txBody>
+                    <a:bodyPr/>
+                    <a:lstStyle/>
+                    <a:p>
+                      <a:r>
+                        <a:rPr sz="1150">
+                          <a:solidFill>
+                            <a:srgbClr val="1A2638"/>
+                          </a:solidFill>
+                          <a:latin typeface="微软雅黑"/>
+                        </a:rPr>
+                        <a:t>政策资源</a:t>
+                      </a:r>
+                    </a:p>
+                  </a:txBody>
+                  <a:tcPr anchor="ctr" marL="91440" marR="73152" marT="36576" marB="36576">
+                    <a:solidFill>
+                      <a:srgbClr val="FFFFFF"/>
+                    </a:solidFill>
+                  </a:tcPr>
+                </a:tc>
+                <a:tc>
+                  <a:txBody>
+                    <a:bodyPr/>
+                    <a:lstStyle/>
+                    <a:p>
+                      <a:r>
+                        <a:rPr sz="1150">
+                          <a:solidFill>
+                            <a:srgbClr val="1A2638"/>
+                          </a:solidFill>
+                          <a:latin typeface="微软雅黑"/>
+                        </a:rPr>
+                        <a:t>企业导入</a:t>
+                      </a:r>
+                    </a:p>
+                  </a:txBody>
+                  <a:tcPr anchor="ctr" marL="91440" marR="73152" marT="36576" marB="36576">
+                    <a:solidFill>
+                      <a:srgbClr val="FFFFFF"/>
+                    </a:solidFill>
+                  </a:tcPr>
+                </a:tc>
+              </a:tr>
+              <a:tr h="533400">
+                <a:tc>
+                  <a:txBody>
+                    <a:bodyPr/>
+                    <a:lstStyle/>
+                    <a:p>
+                      <a:r>
+                        <a:rPr sz="1150">
+                          <a:solidFill>
+                            <a:srgbClr val="1A2638"/>
+                          </a:solidFill>
+                          <a:latin typeface="微软雅黑"/>
+                        </a:rPr>
+                        <a:t>运营</a:t>
+                      </a:r>
+                    </a:p>
+                  </a:txBody>
+                  <a:tcPr anchor="ctr" marL="91440" marR="73152" marT="36576" marB="36576">
+                    <a:solidFill>
+                      <a:srgbClr val="EDF2F9"/>
+                    </a:solidFill>
+                  </a:tcPr>
+                </a:tc>
+                <a:tc>
+                  <a:txBody>
+                    <a:bodyPr/>
+                    <a:lstStyle/>
+                    <a:p>
+                      <a:r>
+                        <a:rPr sz="1150">
+                          <a:solidFill>
+                            <a:srgbClr val="1A2638"/>
+                          </a:solidFill>
+                          <a:latin typeface="微软雅黑"/>
+                        </a:rPr>
+                        <a:t>基础管理</a:t>
+                      </a:r>
+                    </a:p>
+                  </a:txBody>
+                  <a:tcPr anchor="ctr" marL="91440" marR="73152" marT="36576" marB="36576">
+                    <a:solidFill>
+                      <a:srgbClr val="EDF2F9"/>
+                    </a:solidFill>
+                  </a:tcPr>
+                </a:tc>
+                <a:tc>
+                  <a:txBody>
+                    <a:bodyPr/>
+                    <a:lstStyle/>
+                    <a:p>
+                      <a:r>
+                        <a:rPr sz="1150">
+                          <a:solidFill>
+                            <a:srgbClr val="1A2638"/>
+                          </a:solidFill>
+                          <a:latin typeface="微软雅黑"/>
+                        </a:rPr>
+                        <a:t>内容 + 活动 + 社群</a:t>
+                      </a:r>
+                    </a:p>
+                  </a:txBody>
+                  <a:tcPr anchor="ctr" marL="91440" marR="73152" marT="36576" marB="36576">
+                    <a:solidFill>
+                      <a:srgbClr val="EDF2F9"/>
+                    </a:solidFill>
+                  </a:tcPr>
+                </a:tc>
+              </a:tr>
+              <a:tr h="533400">
+                <a:tc>
+                  <a:txBody>
+                    <a:bodyPr/>
+                    <a:lstStyle/>
+                    <a:p>
+                      <a:r>
+                        <a:rPr sz="1150">
+                          <a:solidFill>
+                            <a:srgbClr val="1A2638"/>
+                          </a:solidFill>
+                          <a:latin typeface="微软雅黑"/>
+                        </a:rPr>
+                        <a:t>品牌</a:t>
+                      </a:r>
+                    </a:p>
+                  </a:txBody>
+                  <a:tcPr anchor="ctr" marL="91440" marR="73152" marT="36576" marB="36576">
+                    <a:solidFill>
+                      <a:srgbClr val="FFFFFF"/>
+                    </a:solidFill>
+                  </a:tcPr>
+                </a:tc>
+                <a:tc>
+                  <a:txBody>
+                    <a:bodyPr/>
+                    <a:lstStyle/>
+                    <a:p>
+                      <a:r>
+                        <a:rPr sz="1150">
+                          <a:solidFill>
+                            <a:srgbClr val="1A2638"/>
+                          </a:solidFill>
+                          <a:latin typeface="微软雅黑"/>
+                        </a:rPr>
+                        <a:t>政府/腾讯云背书</a:t>
+                      </a:r>
+                    </a:p>
+                  </a:txBody>
+                  <a:tcPr anchor="ctr" marL="91440" marR="73152" marT="36576" marB="36576">
+                    <a:solidFill>
+                      <a:srgbClr val="FFFFFF"/>
+                    </a:solidFill>
+                  </a:tcPr>
+                </a:tc>
+                <a:tc>
+                  <a:txBody>
+                    <a:bodyPr/>
+                    <a:lstStyle/>
+                    <a:p>
+                      <a:r>
+                        <a:rPr sz="1150">
+                          <a:solidFill>
+                            <a:srgbClr val="1A2638"/>
+                          </a:solidFill>
+                          <a:latin typeface="微软雅黑"/>
+                        </a:rPr>
+                        <a:t>AI 产业 IP</a:t>
+                      </a:r>
+                    </a:p>
+                  </a:txBody>
+                  <a:tcPr anchor="ctr" marL="91440" marR="73152" marT="36576" marB="36576">
+                    <a:solidFill>
+                      <a:srgbClr val="FFFFFF"/>
+                    </a:solidFill>
+                  </a:tcPr>
+                </a:tc>
+              </a:tr>
+            </a:tbl>
+          </a:graphicData>
+        </a:graphic>
+      </p:graphicFrame>
+      <p:sp>
+        <p:nvSpPr>
+          <p:cNvPr id="9" name="TextBox 8"/>
+          <p:cNvSpPr txBox="1"/>
+          <p:nvPr/>
+        </p:nvSpPr>
+        <p:spPr>
+          <a:xfrm>
+            <a:off x="6400800" y="1371600"/>
+            <a:ext cx="5486400" cy="365760"/>
+          </a:xfrm>
+          <a:prstGeom prst="rect">
+            <a:avLst/>
+          </a:prstGeom>
+          <a:noFill/>
+        </p:spPr>
+        <p:txBody>
+          <a:bodyPr wrap="square" anchor="t">
+            <a:spAutoFit/>
+          </a:bodyPr>
+          <a:lstStyle/>
+          <a:p>
+            <a:pPr algn="l">
+              <a:lnSpc>
+                <a:spcPct val="105000"/>
+              </a:lnSpc>
+              <a:spcAft>
+                <a:spcPts val="600"/>
+              </a:spcAft>
+            </a:pPr>
+            <a:r>
+              <a:rPr sz="1400" b="1">
+                <a:solidFill>
+                  <a:srgbClr val="16B8C6"/>
+                </a:solidFill>
+                <a:latin typeface="微软雅黑"/>
+                <a:ea typeface="微软雅黑"/>
+              </a:rPr>
+              <a:t>收入模式（我方主动提）</a:t>
+            </a:r>
+          </a:p>
+        </p:txBody>
+      </p:sp>
+      <p:sp>
+        <p:nvSpPr>
+          <p:cNvPr id="10" name="TextBox 9"/>
+          <p:cNvSpPr txBox="1"/>
+          <p:nvPr/>
+        </p:nvSpPr>
+        <p:spPr>
+          <a:xfrm>
+            <a:off x="6400800" y="1737360"/>
+            <a:ext cx="5303520" cy="3200400"/>
+          </a:xfrm>
+          <a:prstGeom prst="rect">
+            <a:avLst/>
+          </a:prstGeom>
+          <a:noFill/>
+        </p:spPr>
+        <p:txBody>
+          <a:bodyPr wrap="square">
+            <a:spAutoFit/>
+          </a:bodyPr>
+          <a:lstStyle/>
+          <a:p>
+            <a:pPr>
+              <a:lnSpc>
+                <a:spcPct val="112000"/>
+              </a:lnSpc>
+              <a:spcAft>
+                <a:spcPts val="1000"/>
+              </a:spcAft>
+            </a:pPr>
+            <a:r>
+              <a:rPr sz="1300" b="1">
+                <a:solidFill>
+                  <a:srgbClr val="16B8C6"/>
+                </a:solidFill>
+                <a:latin typeface="微软雅黑"/>
+              </a:rPr>
+              <a:t>▍</a:t>
+            </a:r>
+            <a:r>
+              <a:rPr sz="1300" b="1">
+                <a:solidFill>
+                  <a:srgbClr val="1A2638"/>
+                </a:solidFill>
+                <a:latin typeface="微软雅黑"/>
+              </a:rPr>
+              <a:t>① 租金分成  </a:t>
+            </a:r>
+            <a:r>
+              <a:rPr sz="1300" b="0">
+                <a:solidFill>
+                  <a:srgbClr val="5B6B82"/>
+                </a:solidFill>
+                <a:latin typeface="微软雅黑"/>
+              </a:rPr>
+              <a:t>—— 核心收益来源。</a:t>
+            </a:r>
+          </a:p>
+          <a:p>
+            <a:pPr>
+              <a:lnSpc>
+                <a:spcPct val="112000"/>
+              </a:lnSpc>
+              <a:spcAft>
+                <a:spcPts val="1000"/>
+              </a:spcAft>
+            </a:pPr>
+            <a:r>
+              <a:rPr sz="1300" b="1">
+                <a:solidFill>
+                  <a:srgbClr val="16B8C6"/>
+                </a:solidFill>
+                <a:latin typeface="微软雅黑"/>
+              </a:rPr>
+              <a:t>▍</a:t>
+            </a:r>
+            <a:r>
+              <a:rPr sz="1300" b="1">
+                <a:solidFill>
+                  <a:srgbClr val="1A2638"/>
+                </a:solidFill>
+                <a:latin typeface="微软雅黑"/>
+              </a:rPr>
+              <a:t>② 企业服务费  </a:t>
+            </a:r>
+            <a:r>
+              <a:rPr sz="1300" b="0">
+                <a:solidFill>
+                  <a:srgbClr val="5B6B82"/>
+                </a:solidFill>
+                <a:latin typeface="微软雅黑"/>
+              </a:rPr>
+              <a:t>—— 培训 / 咨询 / AI 赋能包。</a:t>
+            </a:r>
+          </a:p>
+          <a:p>
+            <a:pPr>
+              <a:lnSpc>
+                <a:spcPct val="112000"/>
+              </a:lnSpc>
+              <a:spcAft>
+                <a:spcPts val="1000"/>
+              </a:spcAft>
+            </a:pPr>
+            <a:r>
+              <a:rPr sz="1300" b="1">
+                <a:solidFill>
+                  <a:srgbClr val="16B8C6"/>
+                </a:solidFill>
+                <a:latin typeface="微软雅黑"/>
+              </a:rPr>
+              <a:t>▍</a:t>
+            </a:r>
+            <a:r>
+              <a:rPr sz="1300" b="1">
+                <a:solidFill>
+                  <a:srgbClr val="1A2638"/>
+                </a:solidFill>
+                <a:latin typeface="微软雅黑"/>
+              </a:rPr>
+              <a:t>③ 活动收入  </a:t>
+            </a:r>
+            <a:r>
+              <a:rPr sz="1300" b="0">
+                <a:solidFill>
+                  <a:srgbClr val="5B6B82"/>
+                </a:solidFill>
+                <a:latin typeface="微软雅黑"/>
+              </a:rPr>
+              <a:t>—— 切磋者大会 / Demo Day / 展会。</a:t>
+            </a:r>
+          </a:p>
+          <a:p>
+            <a:pPr>
+              <a:lnSpc>
+                <a:spcPct val="112000"/>
+              </a:lnSpc>
+              <a:spcAft>
+                <a:spcPts val="1000"/>
+              </a:spcAft>
+            </a:pPr>
+            <a:r>
+              <a:rPr sz="1300" b="1">
+                <a:solidFill>
+                  <a:srgbClr val="16B8C6"/>
+                </a:solidFill>
+                <a:latin typeface="微软雅黑"/>
+              </a:rPr>
+              <a:t>▍</a:t>
+            </a:r>
+            <a:r>
+              <a:rPr sz="1300" b="1">
+                <a:solidFill>
+                  <a:srgbClr val="1A2638"/>
+                </a:solidFill>
+                <a:latin typeface="微软雅黑"/>
+              </a:rPr>
+              <a:t>④ 算力 / 技术服务分成  </a:t>
+            </a:r>
+            <a:r>
+              <a:rPr sz="1300" b="0">
+                <a:solidFill>
+                  <a:srgbClr val="5B6B82"/>
+                </a:solidFill>
+                <a:latin typeface="微软雅黑"/>
+              </a:rPr>
+              <a:t>—— 腾讯云算力分销 + OPC 孵化服务。</a:t>
+            </a:r>
+          </a:p>
+          <a:p>
+            <a:pPr>
+              <a:lnSpc>
+                <a:spcPct val="112000"/>
+              </a:lnSpc>
+              <a:spcAft>
+                <a:spcPts val="1000"/>
+              </a:spcAft>
+            </a:pPr>
+            <a:r>
+              <a:rPr sz="1300" b="1">
+                <a:solidFill>
+                  <a:srgbClr val="16B8C6"/>
+                </a:solidFill>
+                <a:latin typeface="微软雅黑"/>
+              </a:rPr>
+              <a:t>▍</a:t>
+            </a:r>
+            <a:r>
+              <a:rPr sz="1300" b="1">
+                <a:solidFill>
+                  <a:srgbClr val="1A2638"/>
+                </a:solidFill>
+                <a:latin typeface="微软雅黑"/>
+              </a:rPr>
+              <a:t>⑤ 政策补贴联合申报  </a:t>
+            </a:r>
+            <a:r>
+              <a:rPr sz="1300" b="0">
+                <a:solidFill>
+                  <a:srgbClr val="5B6B82"/>
+                </a:solidFill>
+                <a:latin typeface="微软雅黑"/>
+              </a:rPr>
+              <a:t>—— 城市更新、保租房、算力补贴。</a:t>
+            </a:r>
+          </a:p>
+        </p:txBody>
+      </p:sp>
+      <p:sp>
+        <p:nvSpPr>
+          <p:cNvPr id="11" name="Rectangle 10"/>
+          <p:cNvSpPr/>
+          <p:nvPr/>
+        </p:nvSpPr>
+        <p:spPr>
+          <a:xfrm>
+            <a:off x="502920" y="5212080"/>
+            <a:ext cx="11155680" cy="1188720"/>
+          </a:xfrm>
+          <a:prstGeom prst="rect">
+            <a:avLst/>
+          </a:prstGeom>
+          <a:solidFill>
+            <a:srgbClr val="EAF6F8"/>
+          </a:solidFill>
+          <a:ln>
+            <a:noFill/>
+          </a:ln>
+          <a:effectLst/>
+        </p:spPr>
+        <p:style>
+          <a:lnRef idx="1">
+            <a:schemeClr val="accent1"/>
+          </a:lnRef>
+          <a:fillRef idx="3">
+            <a:schemeClr val="accent1"/>
+          </a:fillRef>
+          <a:effectRef idx="2">
+            <a:schemeClr val="accent1"/>
+          </a:effectRef>
+          <a:fontRef idx="minor">
+            <a:schemeClr val="lt1"/>
+          </a:fontRef>
+        </p:style>
+        <p:txBody>
+          <a:bodyPr rtlCol="0" anchor="ctr"/>
+          <a:lstStyle/>
+          <a:p>
+            <a:pPr algn="ctr"/>
+          </a:p>
+        </p:txBody>
+      </p:sp>
+      <p:sp>
+        <p:nvSpPr>
+          <p:cNvPr id="12" name="Rectangle 11"/>
+          <p:cNvSpPr/>
+          <p:nvPr/>
+        </p:nvSpPr>
+        <p:spPr>
+          <a:xfrm>
+            <a:off x="502920" y="5212080"/>
+            <a:ext cx="146304" cy="1188720"/>
+          </a:xfrm>
+          <a:prstGeom prst="rect">
+            <a:avLst/>
+          </a:prstGeom>
+          <a:solidFill>
+            <a:srgbClr val="F2B632"/>
+          </a:solidFill>
+          <a:ln>
+            <a:noFill/>
+          </a:ln>
+          <a:effectLst/>
+        </p:spPr>
+        <p:style>
+          <a:lnRef idx="1">
+            <a:schemeClr val="accent1"/>
+          </a:lnRef>
+          <a:fillRef idx="3">
+            <a:schemeClr val="accent1"/>
+          </a:fillRef>
+          <a:effectRef idx="2">
+            <a:schemeClr val="accent1"/>
+          </a:effectRef>
+          <a:fontRef idx="minor">
+            <a:schemeClr val="lt1"/>
+          </a:fontRef>
+        </p:style>
+        <p:txBody>
+          <a:bodyPr rtlCol="0" anchor="ctr"/>
+          <a:lstStyle/>
+          <a:p>
+            <a:pPr algn="ctr"/>
+          </a:p>
+        </p:txBody>
+      </p:sp>
+      <p:sp>
+        <p:nvSpPr>
+          <p:cNvPr id="13" name="TextBox 12"/>
+          <p:cNvSpPr txBox="1"/>
+          <p:nvPr/>
+        </p:nvSpPr>
+        <p:spPr>
+          <a:xfrm>
+            <a:off x="868680" y="5321808"/>
+            <a:ext cx="10607040" cy="960120"/>
+          </a:xfrm>
+          <a:prstGeom prst="rect">
+            <a:avLst/>
+          </a:prstGeom>
+          <a:noFill/>
+        </p:spPr>
+        <p:txBody>
+          <a:bodyPr wrap="square" anchor="ctr">
+            <a:spAutoFit/>
+          </a:bodyPr>
+          <a:lstStyle/>
+          <a:p>
+            <a:pPr algn="l">
+              <a:lnSpc>
+                <a:spcPct val="105000"/>
+              </a:lnSpc>
+              <a:spcAft>
+                <a:spcPts val="600"/>
+              </a:spcAft>
+            </a:pPr>
+            <a:r>
+              <a:rPr sz="1500" b="1">
+                <a:solidFill>
+                  <a:srgbClr val="1B4F9C"/>
+                </a:solidFill>
+                <a:latin typeface="微软雅黑"/>
+                <a:ea typeface="微软雅黑"/>
+              </a:rPr>
+              <a:t>关键原则：</a:t>
+            </a:r>
+            <a:r>
+              <a:rPr sz="1500" b="0">
+                <a:solidFill>
+                  <a:srgbClr val="1A2638"/>
+                </a:solidFill>
+                <a:latin typeface="微软雅黑"/>
+                <a:ea typeface="微软雅黑"/>
+              </a:rPr>
+              <a:t>我方必须拿到“运营权 + 产业导入权”，否则只是给资源平台打工，无法形成可复制的产品与护城河。</a:t>
+            </a:r>
+          </a:p>
+        </p:txBody>
+      </p:sp>
+    </p:spTree>
+  </p:cSld>
+  <p:clrMapOvr>
+    <a:masterClrMapping/>
+  </p:clrMapOvr>
+</p:sld>
+</file>
+
+<file path=ppt/slides/slide13.xml><?xml version="1.0" encoding="utf-8"?>
+<p:sld xmlns:a="http://schemas.openxmlformats.org/drawingml/2006/main" xmlns:p="http://schemas.openxmlformats.org/presentationml/2006/main" xmlns:r="http://schemas.openxmlformats.org/officeDocument/2006/relationships">
+  <p:cSld>
+    <p:bg>
+      <p:bgPr>
+        <a:solidFill>
+          <a:srgbClr val="FFFFFF"/>
+        </a:solidFill>
+        <a:effectLst/>
+      </p:bgPr>
+    </p:bg>
+    <p:spTree>
+      <p:nvGrpSpPr>
+        <p:cNvPr id="1" name=""/>
+        <p:cNvGrpSpPr/>
+        <p:nvPr/>
+      </p:nvGrpSpPr>
+      <p:grpSpPr/>
+      <p:sp>
+        <p:nvSpPr>
+          <p:cNvPr id="2" name="Rectangle 1"/>
+          <p:cNvSpPr/>
+          <p:nvPr/>
+        </p:nvSpPr>
+        <p:spPr>
+          <a:xfrm>
+            <a:off x="0" y="0"/>
+            <a:ext cx="12191695" cy="1143000"/>
+          </a:xfrm>
+          <a:prstGeom prst="rect">
+            <a:avLst/>
+          </a:prstGeom>
+          <a:solidFill>
+            <a:srgbClr val="0B1F3A"/>
+          </a:solidFill>
+          <a:ln>
+            <a:noFill/>
+          </a:ln>
+          <a:effectLst/>
+        </p:spPr>
+        <p:style>
+          <a:lnRef idx="1">
+            <a:schemeClr val="accent1"/>
+          </a:lnRef>
+          <a:fillRef idx="3">
+            <a:schemeClr val="accent1"/>
+          </a:fillRef>
+          <a:effectRef idx="2">
+            <a:schemeClr val="accent1"/>
+          </a:effectRef>
+          <a:fontRef idx="minor">
+            <a:schemeClr val="lt1"/>
+          </a:fontRef>
+        </p:style>
+        <p:txBody>
+          <a:bodyPr rtlCol="0" anchor="ctr"/>
+          <a:lstStyle/>
+          <a:p>
+            <a:pPr algn="ctr"/>
+          </a:p>
+        </p:txBody>
+      </p:sp>
+      <p:sp>
+        <p:nvSpPr>
+          <p:cNvPr id="3" name="Rectangle 2"/>
+          <p:cNvSpPr/>
+          <p:nvPr/>
+        </p:nvSpPr>
+        <p:spPr>
+          <a:xfrm>
+            <a:off x="0" y="1143000"/>
+            <a:ext cx="12191695" cy="54864"/>
+          </a:xfrm>
+          <a:prstGeom prst="rect">
+            <a:avLst/>
+          </a:prstGeom>
+          <a:solidFill>
+            <a:srgbClr val="16B8C6"/>
+          </a:solidFill>
+          <a:ln>
+            <a:noFill/>
+          </a:ln>
+          <a:effectLst/>
+        </p:spPr>
+        <p:style>
+          <a:lnRef idx="1">
+            <a:schemeClr val="accent1"/>
+          </a:lnRef>
+          <a:fillRef idx="3">
+            <a:schemeClr val="accent1"/>
+          </a:fillRef>
+          <a:effectRef idx="2">
+            <a:schemeClr val="accent1"/>
+          </a:effectRef>
+          <a:fontRef idx="minor">
+            <a:schemeClr val="lt1"/>
+          </a:fontRef>
+        </p:style>
+        <p:txBody>
+          <a:bodyPr rtlCol="0" anchor="ctr"/>
+          <a:lstStyle/>
+          <a:p>
+            <a:pPr algn="ctr"/>
+          </a:p>
+        </p:txBody>
+      </p:sp>
+      <p:sp>
+        <p:nvSpPr>
+          <p:cNvPr id="4" name="Rectangle 3"/>
+          <p:cNvSpPr/>
+          <p:nvPr/>
+        </p:nvSpPr>
+        <p:spPr>
+          <a:xfrm>
+            <a:off x="0" y="0"/>
+            <a:ext cx="164592" cy="1143000"/>
+          </a:xfrm>
+          <a:prstGeom prst="rect">
+            <a:avLst/>
+          </a:prstGeom>
+          <a:solidFill>
+            <a:srgbClr val="F2B632"/>
+          </a:solidFill>
+          <a:ln>
+            <a:noFill/>
+          </a:ln>
+          <a:effectLst/>
+        </p:spPr>
+        <p:style>
+          <a:lnRef idx="1">
+            <a:schemeClr val="accent1"/>
+          </a:lnRef>
+          <a:fillRef idx="3">
+            <a:schemeClr val="accent1"/>
+          </a:fillRef>
+          <a:effectRef idx="2">
+            <a:schemeClr val="accent1"/>
+          </a:effectRef>
+          <a:fontRef idx="minor">
+            <a:schemeClr val="lt1"/>
+          </a:fontRef>
+        </p:style>
+        <p:txBody>
+          <a:bodyPr rtlCol="0" anchor="ctr"/>
+          <a:lstStyle/>
+          <a:p>
+            <a:pPr algn="ctr"/>
+          </a:p>
+        </p:txBody>
+      </p:sp>
+      <p:sp>
+        <p:nvSpPr>
+          <p:cNvPr id="5" name="TextBox 4"/>
+          <p:cNvSpPr txBox="1"/>
+          <p:nvPr/>
+        </p:nvSpPr>
+        <p:spPr>
+          <a:xfrm>
+            <a:off x="502920" y="146304"/>
+            <a:ext cx="10515600" cy="914400"/>
+          </a:xfrm>
+          <a:prstGeom prst="rect">
+            <a:avLst/>
+          </a:prstGeom>
+          <a:noFill/>
+        </p:spPr>
+        <p:txBody>
+          <a:bodyPr wrap="square" anchor="ctr">
+            <a:spAutoFit/>
+          </a:bodyPr>
+          <a:lstStyle/>
+          <a:p>
+            <a:pPr algn="l">
+              <a:lnSpc>
+                <a:spcPct val="105000"/>
+              </a:lnSpc>
+              <a:spcAft>
+                <a:spcPts val="200"/>
+              </a:spcAft>
+            </a:pPr>
+            <a:r>
+              <a:rPr sz="1200" b="1">
+                <a:solidFill>
+                  <a:srgbClr val="16B8C6"/>
+                </a:solidFill>
+                <a:latin typeface="微软雅黑"/>
+                <a:ea typeface="微软雅黑"/>
+              </a:rPr>
+              <a:t>ACTION · 即刻启动</a:t>
+            </a:r>
+          </a:p>
+          <a:p>
+            <a:pPr algn="l">
+              <a:lnSpc>
+                <a:spcPct val="105000"/>
+              </a:lnSpc>
+              <a:spcAft>
+                <a:spcPts val="200"/>
+              </a:spcAft>
+            </a:pPr>
+            <a:r>
+              <a:rPr sz="2600" b="1">
+                <a:solidFill>
+                  <a:srgbClr val="FFFFFF"/>
+                </a:solidFill>
+                <a:latin typeface="微软雅黑"/>
+                <a:ea typeface="微软雅黑"/>
+              </a:rPr>
+              <a:t>四个“立即启动”项目（承接 5·22 峰会余热）</a:t>
+            </a:r>
+          </a:p>
+        </p:txBody>
+      </p:sp>
+      <p:sp>
+        <p:nvSpPr>
+          <p:cNvPr id="6" name="TextBox 5"/>
+          <p:cNvSpPr txBox="1"/>
+          <p:nvPr/>
+        </p:nvSpPr>
+        <p:spPr>
+          <a:xfrm>
+            <a:off x="10789920" y="146304"/>
+            <a:ext cx="1188720" cy="914400"/>
+          </a:xfrm>
+          <a:prstGeom prst="rect">
+            <a:avLst/>
+          </a:prstGeom>
+          <a:noFill/>
+        </p:spPr>
+        <p:txBody>
+          <a:bodyPr wrap="square" anchor="ctr">
+            <a:spAutoFit/>
+          </a:bodyPr>
+          <a:lstStyle/>
+          <a:p>
+            <a:pPr algn="r">
+              <a:lnSpc>
+                <a:spcPct val="105000"/>
+              </a:lnSpc>
+              <a:spcAft>
+                <a:spcPts val="600"/>
+              </a:spcAft>
+            </a:pPr>
+            <a:r>
+              <a:rPr sz="4000" b="1">
+                <a:solidFill>
+                  <a:srgbClr val="2C446E"/>
+                </a:solidFill>
+                <a:latin typeface="微软雅黑"/>
+                <a:ea typeface="微软雅黑"/>
+              </a:rPr>
+              <a:t>09</a:t>
+            </a:r>
+          </a:p>
+        </p:txBody>
+      </p:sp>
+      <p:sp>
+        <p:nvSpPr>
+          <p:cNvPr id="7" name="Rectangle 6"/>
+          <p:cNvSpPr/>
+          <p:nvPr/>
+        </p:nvSpPr>
+        <p:spPr>
+          <a:xfrm>
+            <a:off x="502920" y="1417320"/>
+            <a:ext cx="11155680" cy="1115568"/>
+          </a:xfrm>
+          <a:prstGeom prst="rect">
+            <a:avLst/>
+          </a:prstGeom>
+          <a:solidFill>
+            <a:srgbClr val="E8EEF6"/>
+          </a:solidFill>
+          <a:ln>
+            <a:noFill/>
+          </a:ln>
+          <a:effectLst/>
+        </p:spPr>
+        <p:style>
+          <a:lnRef idx="1">
+            <a:schemeClr val="accent1"/>
+          </a:lnRef>
+          <a:fillRef idx="3">
+            <a:schemeClr val="accent1"/>
+          </a:fillRef>
+          <a:effectRef idx="2">
+            <a:schemeClr val="accent1"/>
+          </a:effectRef>
+          <a:fontRef idx="minor">
+            <a:schemeClr val="lt1"/>
+          </a:fontRef>
+        </p:style>
+        <p:txBody>
+          <a:bodyPr rtlCol="0" anchor="ctr"/>
+          <a:lstStyle/>
+          <a:p>
+            <a:pPr algn="ctr"/>
+          </a:p>
+        </p:txBody>
+      </p:sp>
+      <p:sp>
+        <p:nvSpPr>
+          <p:cNvPr id="8" name="Rectangle 7"/>
+          <p:cNvSpPr/>
+          <p:nvPr/>
+        </p:nvSpPr>
+        <p:spPr>
+          <a:xfrm>
+            <a:off x="502920" y="1417320"/>
+            <a:ext cx="1188720" cy="1115568"/>
+          </a:xfrm>
+          <a:prstGeom prst="rect">
+            <a:avLst/>
+          </a:prstGeom>
+          <a:solidFill>
+            <a:srgbClr val="1B4F9C"/>
+          </a:solidFill>
+          <a:ln>
+            <a:noFill/>
+          </a:ln>
+          <a:effectLst/>
+        </p:spPr>
+        <p:style>
+          <a:lnRef idx="1">
+            <a:schemeClr val="accent1"/>
+          </a:lnRef>
+          <a:fillRef idx="3">
+            <a:schemeClr val="accent1"/>
+          </a:fillRef>
+          <a:effectRef idx="2">
+            <a:schemeClr val="accent1"/>
+          </a:effectRef>
+          <a:fontRef idx="minor">
+            <a:schemeClr val="lt1"/>
+          </a:fontRef>
+        </p:style>
+        <p:txBody>
+          <a:bodyPr rtlCol="0" anchor="ctr"/>
+          <a:lstStyle/>
+          <a:p>
+            <a:pPr algn="ctr"/>
+          </a:p>
+        </p:txBody>
+      </p:sp>
+      <p:sp>
+        <p:nvSpPr>
+          <p:cNvPr id="9" name="TextBox 8"/>
+          <p:cNvSpPr txBox="1"/>
+          <p:nvPr/>
+        </p:nvSpPr>
+        <p:spPr>
+          <a:xfrm>
+            <a:off x="502920" y="1417320"/>
+            <a:ext cx="1188720" cy="1115568"/>
+          </a:xfrm>
+          <a:prstGeom prst="rect">
+            <a:avLst/>
+          </a:prstGeom>
+          <a:noFill/>
+        </p:spPr>
+        <p:txBody>
+          <a:bodyPr wrap="square" anchor="ctr">
+            <a:spAutoFit/>
+          </a:bodyPr>
+          <a:lstStyle/>
+          <a:p>
+            <a:pPr algn="ctr">
+              <a:lnSpc>
+                <a:spcPct val="105000"/>
+              </a:lnSpc>
+              <a:spcAft>
+                <a:spcPts val="600"/>
+              </a:spcAft>
+            </a:pPr>
+            <a:r>
+              <a:rPr sz="3000" b="1">
+                <a:solidFill>
+                  <a:srgbClr val="FFFFFF"/>
+                </a:solidFill>
+                <a:latin typeface="微软雅黑"/>
+                <a:ea typeface="微软雅黑"/>
+              </a:rPr>
+              <a:t>01</a:t>
+            </a:r>
+          </a:p>
+        </p:txBody>
+      </p:sp>
+      <p:sp>
+        <p:nvSpPr>
+          <p:cNvPr id="10" name="TextBox 9"/>
+          <p:cNvSpPr txBox="1"/>
+          <p:nvPr/>
+        </p:nvSpPr>
+        <p:spPr>
+          <a:xfrm>
+            <a:off x="1874519" y="1490472"/>
+            <a:ext cx="9509760" cy="1005840"/>
+          </a:xfrm>
+          <a:prstGeom prst="rect">
+            <a:avLst/>
+          </a:prstGeom>
+          <a:noFill/>
+        </p:spPr>
+        <p:txBody>
+          <a:bodyPr wrap="square" anchor="t">
+            <a:spAutoFit/>
+          </a:bodyPr>
+          <a:lstStyle/>
+          <a:p>
+            <a:pPr algn="l">
+              <a:lnSpc>
+                <a:spcPct val="103000"/>
+              </a:lnSpc>
+              <a:spcAft>
+                <a:spcPts val="200"/>
+              </a:spcAft>
+            </a:pPr>
+            <a:r>
+              <a:rPr sz="1600" b="1">
+                <a:solidFill>
+                  <a:srgbClr val="1A2638"/>
+                </a:solidFill>
+                <a:latin typeface="微软雅黑"/>
+                <a:ea typeface="微软雅黑"/>
+              </a:rPr>
+              <a:t>AI 产业社区试点</a:t>
+            </a:r>
+          </a:p>
+          <a:p>
+            <a:pPr algn="l">
+              <a:lnSpc>
+                <a:spcPct val="103000"/>
+              </a:lnSpc>
+              <a:spcAft>
+                <a:spcPts val="200"/>
+              </a:spcAft>
+            </a:pPr>
+            <a:r>
+              <a:rPr sz="1250" b="0">
+                <a:solidFill>
+                  <a:srgbClr val="5B6B82"/>
+                </a:solidFill>
+                <a:latin typeface="微软雅黑"/>
+                <a:ea typeface="微软雅黑"/>
+              </a:rPr>
+              <a:t>联合考察对方推荐的 1–2 个空置物业（大学路 / 杨浦滨江）。</a:t>
+            </a:r>
+          </a:p>
+          <a:p>
+            <a:pPr algn="l">
+              <a:lnSpc>
+                <a:spcPct val="103000"/>
+              </a:lnSpc>
+              <a:spcAft>
+                <a:spcPts val="200"/>
+              </a:spcAft>
+            </a:pPr>
+            <a:r>
+              <a:rPr sz="1250" b="1">
+                <a:solidFill>
+                  <a:srgbClr val="1B4F9C"/>
+                </a:solidFill>
+                <a:latin typeface="微软雅黑"/>
+                <a:ea typeface="微软雅黑"/>
+              </a:rPr>
+              <a:t>交付：2 周内出具《产业社区改造初步方案》</a:t>
+            </a:r>
+          </a:p>
+        </p:txBody>
+      </p:sp>
+      <p:sp>
+        <p:nvSpPr>
+          <p:cNvPr id="11" name="Rectangle 10"/>
+          <p:cNvSpPr/>
+          <p:nvPr/>
+        </p:nvSpPr>
+        <p:spPr>
+          <a:xfrm>
+            <a:off x="502920" y="2679191"/>
+            <a:ext cx="11155680" cy="1115568"/>
+          </a:xfrm>
+          <a:prstGeom prst="rect">
+            <a:avLst/>
+          </a:prstGeom>
+          <a:solidFill>
+            <a:srgbClr val="E8EEF6"/>
+          </a:solidFill>
+          <a:ln>
+            <a:noFill/>
+          </a:ln>
+          <a:effectLst/>
+        </p:spPr>
+        <p:style>
+          <a:lnRef idx="1">
+            <a:schemeClr val="accent1"/>
+          </a:lnRef>
+          <a:fillRef idx="3">
+            <a:schemeClr val="accent1"/>
+          </a:fillRef>
+          <a:effectRef idx="2">
+            <a:schemeClr val="accent1"/>
+          </a:effectRef>
+          <a:fontRef idx="minor">
+            <a:schemeClr val="lt1"/>
+          </a:fontRef>
+        </p:style>
+        <p:txBody>
+          <a:bodyPr rtlCol="0" anchor="ctr"/>
+          <a:lstStyle/>
+          <a:p>
+            <a:pPr algn="ctr"/>
+          </a:p>
+        </p:txBody>
+      </p:sp>
+      <p:sp>
+        <p:nvSpPr>
+          <p:cNvPr id="12" name="Rectangle 11"/>
+          <p:cNvSpPr/>
+          <p:nvPr/>
+        </p:nvSpPr>
+        <p:spPr>
+          <a:xfrm>
+            <a:off x="502920" y="2679191"/>
+            <a:ext cx="1188720" cy="1115568"/>
+          </a:xfrm>
+          <a:prstGeom prst="rect">
+            <a:avLst/>
+          </a:prstGeom>
+          <a:solidFill>
+            <a:srgbClr val="F2B632"/>
+          </a:solidFill>
+          <a:ln>
+            <a:noFill/>
+          </a:ln>
+          <a:effectLst/>
+        </p:spPr>
+        <p:style>
+          <a:lnRef idx="1">
+            <a:schemeClr val="accent1"/>
+          </a:lnRef>
+          <a:fillRef idx="3">
+            <a:schemeClr val="accent1"/>
+          </a:fillRef>
+          <a:effectRef idx="2">
+            <a:schemeClr val="accent1"/>
+          </a:effectRef>
+          <a:fontRef idx="minor">
+            <a:schemeClr val="lt1"/>
+          </a:fontRef>
+        </p:style>
+        <p:txBody>
+          <a:bodyPr rtlCol="0" anchor="ctr"/>
+          <a:lstStyle/>
+          <a:p>
+            <a:pPr algn="ctr"/>
+          </a:p>
+        </p:txBody>
+      </p:sp>
+      <p:sp>
+        <p:nvSpPr>
+          <p:cNvPr id="13" name="TextBox 12"/>
+          <p:cNvSpPr txBox="1"/>
+          <p:nvPr/>
+        </p:nvSpPr>
+        <p:spPr>
+          <a:xfrm>
+            <a:off x="502920" y="2679191"/>
+            <a:ext cx="1188720" cy="1115568"/>
+          </a:xfrm>
+          <a:prstGeom prst="rect">
+            <a:avLst/>
+          </a:prstGeom>
+          <a:noFill/>
+        </p:spPr>
+        <p:txBody>
+          <a:bodyPr wrap="square" anchor="ctr">
+            <a:spAutoFit/>
+          </a:bodyPr>
+          <a:lstStyle/>
+          <a:p>
+            <a:pPr algn="ctr">
+              <a:lnSpc>
+                <a:spcPct val="105000"/>
+              </a:lnSpc>
+              <a:spcAft>
+                <a:spcPts val="600"/>
+              </a:spcAft>
+            </a:pPr>
+            <a:r>
+              <a:rPr sz="3000" b="1">
+                <a:solidFill>
+                  <a:srgbClr val="0B1F3A"/>
+                </a:solidFill>
+                <a:latin typeface="微软雅黑"/>
+                <a:ea typeface="微软雅黑"/>
+              </a:rPr>
+              <a:t>02</a:t>
+            </a:r>
+          </a:p>
+        </p:txBody>
+      </p:sp>
+      <p:sp>
+        <p:nvSpPr>
+          <p:cNvPr id="14" name="TextBox 13"/>
+          <p:cNvSpPr txBox="1"/>
+          <p:nvPr/>
+        </p:nvSpPr>
+        <p:spPr>
+          <a:xfrm>
+            <a:off x="1874519" y="2752343"/>
+            <a:ext cx="9509760" cy="1005840"/>
+          </a:xfrm>
+          <a:prstGeom prst="rect">
+            <a:avLst/>
+          </a:prstGeom>
+          <a:noFill/>
+        </p:spPr>
+        <p:txBody>
+          <a:bodyPr wrap="square" anchor="t">
+            <a:spAutoFit/>
+          </a:bodyPr>
+          <a:lstStyle/>
+          <a:p>
+            <a:pPr algn="l">
+              <a:lnSpc>
+                <a:spcPct val="103000"/>
+              </a:lnSpc>
+              <a:spcAft>
+                <a:spcPts val="200"/>
+              </a:spcAft>
+            </a:pPr>
+            <a:r>
+              <a:rPr sz="1600" b="1">
+                <a:solidFill>
+                  <a:srgbClr val="1A2638"/>
+                </a:solidFill>
+                <a:latin typeface="微软雅黑"/>
+                <a:ea typeface="微软雅黑"/>
+              </a:rPr>
+              <a:t>首场 AI 切磋者大会 + OPC 超级孵化营</a:t>
+            </a:r>
+          </a:p>
+          <a:p>
+            <a:pPr algn="l">
+              <a:lnSpc>
+                <a:spcPct val="103000"/>
+              </a:lnSpc>
+              <a:spcAft>
+                <a:spcPts val="200"/>
+              </a:spcAft>
+            </a:pPr>
+            <a:r>
+              <a:rPr sz="1250" b="0">
+                <a:solidFill>
+                  <a:srgbClr val="5B6B82"/>
+                </a:solidFill>
+                <a:latin typeface="微软雅黑"/>
+                <a:ea typeface="微软雅黑"/>
+              </a:rPr>
+              <a:t>承接峰会余热，7 月办首站，选育首批种子 OPC。</a:t>
+            </a:r>
+          </a:p>
+          <a:p>
+            <a:pPr algn="l">
+              <a:lnSpc>
+                <a:spcPct val="103000"/>
+              </a:lnSpc>
+              <a:spcAft>
+                <a:spcPts val="200"/>
+              </a:spcAft>
+            </a:pPr>
+            <a:r>
+              <a:rPr sz="1250" b="1">
+                <a:solidFill>
+                  <a:srgbClr val="1B4F9C"/>
+                </a:solidFill>
+                <a:latin typeface="微软雅黑"/>
+                <a:ea typeface="微软雅黑"/>
+              </a:rPr>
+              <a:t>交付：活动方案 + 拟邀 OPC/企业名单（本周完成）</a:t>
+            </a:r>
+          </a:p>
+        </p:txBody>
+      </p:sp>
+      <p:sp>
+        <p:nvSpPr>
+          <p:cNvPr id="15" name="Rectangle 14"/>
+          <p:cNvSpPr/>
+          <p:nvPr/>
+        </p:nvSpPr>
+        <p:spPr>
+          <a:xfrm>
+            <a:off x="502920" y="3941063"/>
+            <a:ext cx="11155680" cy="1115568"/>
+          </a:xfrm>
+          <a:prstGeom prst="rect">
+            <a:avLst/>
+          </a:prstGeom>
+          <a:solidFill>
+            <a:srgbClr val="E8EEF6"/>
+          </a:solidFill>
+          <a:ln>
+            <a:noFill/>
+          </a:ln>
+          <a:effectLst/>
+        </p:spPr>
+        <p:style>
+          <a:lnRef idx="1">
+            <a:schemeClr val="accent1"/>
+          </a:lnRef>
+          <a:fillRef idx="3">
+            <a:schemeClr val="accent1"/>
+          </a:fillRef>
+          <a:effectRef idx="2">
+            <a:schemeClr val="accent1"/>
+          </a:effectRef>
+          <a:fontRef idx="minor">
+            <a:schemeClr val="lt1"/>
+          </a:fontRef>
+        </p:style>
+        <p:txBody>
+          <a:bodyPr rtlCol="0" anchor="ctr"/>
+          <a:lstStyle/>
+          <a:p>
+            <a:pPr algn="ctr"/>
+          </a:p>
+        </p:txBody>
+      </p:sp>
+      <p:sp>
+        <p:nvSpPr>
+          <p:cNvPr id="16" name="Rectangle 15"/>
+          <p:cNvSpPr/>
+          <p:nvPr/>
+        </p:nvSpPr>
+        <p:spPr>
+          <a:xfrm>
+            <a:off x="502920" y="3941063"/>
+            <a:ext cx="1188720" cy="1115568"/>
+          </a:xfrm>
+          <a:prstGeom prst="rect">
+            <a:avLst/>
+          </a:prstGeom>
+          <a:solidFill>
+            <a:srgbClr val="16B8C6"/>
+          </a:solidFill>
+          <a:ln>
+            <a:noFill/>
+          </a:ln>
+          <a:effectLst/>
+        </p:spPr>
+        <p:style>
+          <a:lnRef idx="1">
+            <a:schemeClr val="accent1"/>
+          </a:lnRef>
+          <a:fillRef idx="3">
+            <a:schemeClr val="accent1"/>
+          </a:fillRef>
+          <a:effectRef idx="2">
+            <a:schemeClr val="accent1"/>
+          </a:effectRef>
+          <a:fontRef idx="minor">
+            <a:schemeClr val="lt1"/>
+          </a:fontRef>
+        </p:style>
+        <p:txBody>
+          <a:bodyPr rtlCol="0" anchor="ctr"/>
+          <a:lstStyle/>
+          <a:p>
+            <a:pPr algn="ctr"/>
+          </a:p>
+        </p:txBody>
+      </p:sp>
+      <p:sp>
+        <p:nvSpPr>
+          <p:cNvPr id="17" name="TextBox 16"/>
+          <p:cNvSpPr txBox="1"/>
+          <p:nvPr/>
+        </p:nvSpPr>
+        <p:spPr>
+          <a:xfrm>
+            <a:off x="502920" y="3941063"/>
+            <a:ext cx="1188720" cy="1115568"/>
+          </a:xfrm>
+          <a:prstGeom prst="rect">
+            <a:avLst/>
+          </a:prstGeom>
+          <a:noFill/>
+        </p:spPr>
+        <p:txBody>
+          <a:bodyPr wrap="square" anchor="ctr">
+            <a:spAutoFit/>
+          </a:bodyPr>
+          <a:lstStyle/>
+          <a:p>
+            <a:pPr algn="ctr">
+              <a:lnSpc>
+                <a:spcPct val="105000"/>
+              </a:lnSpc>
+              <a:spcAft>
+                <a:spcPts val="600"/>
+              </a:spcAft>
+            </a:pPr>
+            <a:r>
+              <a:rPr sz="3000" b="1">
+                <a:solidFill>
+                  <a:srgbClr val="FFFFFF"/>
+                </a:solidFill>
+                <a:latin typeface="微软雅黑"/>
+                <a:ea typeface="微软雅黑"/>
+              </a:rPr>
+              <a:t>03</a:t>
+            </a:r>
+          </a:p>
+        </p:txBody>
+      </p:sp>
+      <p:sp>
+        <p:nvSpPr>
+          <p:cNvPr id="18" name="TextBox 17"/>
+          <p:cNvSpPr txBox="1"/>
+          <p:nvPr/>
+        </p:nvSpPr>
+        <p:spPr>
+          <a:xfrm>
+            <a:off x="1874519" y="4014215"/>
+            <a:ext cx="9509760" cy="1005840"/>
+          </a:xfrm>
+          <a:prstGeom prst="rect">
+            <a:avLst/>
+          </a:prstGeom>
+          <a:noFill/>
+        </p:spPr>
+        <p:txBody>
+          <a:bodyPr wrap="square" anchor="t">
+            <a:spAutoFit/>
+          </a:bodyPr>
+          <a:lstStyle/>
+          <a:p>
+            <a:pPr algn="l">
+              <a:lnSpc>
+                <a:spcPct val="103000"/>
+              </a:lnSpc>
+              <a:spcAft>
+                <a:spcPts val="200"/>
+              </a:spcAft>
+            </a:pPr>
+            <a:r>
+              <a:rPr sz="1600" b="1">
+                <a:solidFill>
+                  <a:srgbClr val="1A2638"/>
+                </a:solidFill>
+                <a:latin typeface="微软雅黑"/>
+                <a:ea typeface="微软雅黑"/>
+              </a:rPr>
+              <a:t>腾讯云算力补贴包落地</a:t>
+            </a:r>
+          </a:p>
+          <a:p>
+            <a:pPr algn="l">
+              <a:lnSpc>
+                <a:spcPct val="103000"/>
+              </a:lnSpc>
+              <a:spcAft>
+                <a:spcPts val="200"/>
+              </a:spcAft>
+            </a:pPr>
+            <a:r>
+              <a:rPr sz="1250" b="0">
+                <a:solidFill>
+                  <a:srgbClr val="5B6B82"/>
+                </a:solidFill>
+                <a:latin typeface="微软雅黑"/>
+                <a:ea typeface="微软雅黑"/>
+              </a:rPr>
+              <a:t>联合腾讯云敲定面向入驻 OPC 的算力补贴与扶持政策。</a:t>
+            </a:r>
+          </a:p>
+          <a:p>
+            <a:pPr algn="l">
+              <a:lnSpc>
+                <a:spcPct val="103000"/>
+              </a:lnSpc>
+              <a:spcAft>
+                <a:spcPts val="200"/>
+              </a:spcAft>
+            </a:pPr>
+            <a:r>
+              <a:rPr sz="1250" b="1">
+                <a:solidFill>
+                  <a:srgbClr val="1B4F9C"/>
+                </a:solidFill>
+                <a:latin typeface="微软雅黑"/>
+                <a:ea typeface="微软雅黑"/>
+              </a:rPr>
+              <a:t>交付：2 周内确定补贴口径、额度与申领流程</a:t>
+            </a:r>
+          </a:p>
+        </p:txBody>
+      </p:sp>
+      <p:sp>
+        <p:nvSpPr>
+          <p:cNvPr id="19" name="Rectangle 18"/>
+          <p:cNvSpPr/>
+          <p:nvPr/>
+        </p:nvSpPr>
+        <p:spPr>
+          <a:xfrm>
+            <a:off x="502920" y="5202936"/>
+            <a:ext cx="11155680" cy="1115568"/>
+          </a:xfrm>
+          <a:prstGeom prst="rect">
+            <a:avLst/>
+          </a:prstGeom>
+          <a:solidFill>
+            <a:srgbClr val="E8EEF6"/>
+          </a:solidFill>
+          <a:ln>
+            <a:noFill/>
+          </a:ln>
+          <a:effectLst/>
+        </p:spPr>
+        <p:style>
+          <a:lnRef idx="1">
+            <a:schemeClr val="accent1"/>
+          </a:lnRef>
+          <a:fillRef idx="3">
+            <a:schemeClr val="accent1"/>
+          </a:fillRef>
+          <a:effectRef idx="2">
+            <a:schemeClr val="accent1"/>
+          </a:effectRef>
+          <a:fontRef idx="minor">
+            <a:schemeClr val="lt1"/>
+          </a:fontRef>
+        </p:style>
+        <p:txBody>
+          <a:bodyPr rtlCol="0" anchor="ctr"/>
+          <a:lstStyle/>
+          <a:p>
+            <a:pPr algn="ctr"/>
+          </a:p>
+        </p:txBody>
+      </p:sp>
+      <p:sp>
+        <p:nvSpPr>
+          <p:cNvPr id="20" name="Rectangle 19"/>
+          <p:cNvSpPr/>
+          <p:nvPr/>
+        </p:nvSpPr>
+        <p:spPr>
+          <a:xfrm>
+            <a:off x="502920" y="5202936"/>
+            <a:ext cx="1188720" cy="1115568"/>
+          </a:xfrm>
+          <a:prstGeom prst="rect">
+            <a:avLst/>
+          </a:prstGeom>
+          <a:solidFill>
+            <a:srgbClr val="1B4F9C"/>
+          </a:solidFill>
+          <a:ln>
+            <a:noFill/>
+          </a:ln>
+          <a:effectLst/>
+        </p:spPr>
+        <p:style>
+          <a:lnRef idx="1">
+            <a:schemeClr val="accent1"/>
+          </a:lnRef>
+          <a:fillRef idx="3">
+            <a:schemeClr val="accent1"/>
+          </a:fillRef>
+          <a:effectRef idx="2">
+            <a:schemeClr val="accent1"/>
+          </a:effectRef>
+          <a:fontRef idx="minor">
+            <a:schemeClr val="lt1"/>
+          </a:fontRef>
+        </p:style>
+        <p:txBody>
+          <a:bodyPr rtlCol="0" anchor="ctr"/>
+          <a:lstStyle/>
+          <a:p>
+            <a:pPr algn="ctr"/>
+          </a:p>
+        </p:txBody>
+      </p:sp>
+      <p:sp>
+        <p:nvSpPr>
+          <p:cNvPr id="21" name="TextBox 20"/>
+          <p:cNvSpPr txBox="1"/>
+          <p:nvPr/>
+        </p:nvSpPr>
+        <p:spPr>
+          <a:xfrm>
+            <a:off x="502920" y="5202936"/>
+            <a:ext cx="1188720" cy="1115568"/>
+          </a:xfrm>
+          <a:prstGeom prst="rect">
+            <a:avLst/>
+          </a:prstGeom>
+          <a:noFill/>
+        </p:spPr>
+        <p:txBody>
+          <a:bodyPr wrap="square" anchor="ctr">
+            <a:spAutoFit/>
+          </a:bodyPr>
+          <a:lstStyle/>
+          <a:p>
+            <a:pPr algn="ctr">
+              <a:lnSpc>
+                <a:spcPct val="105000"/>
+              </a:lnSpc>
+              <a:spcAft>
+                <a:spcPts val="600"/>
+              </a:spcAft>
+            </a:pPr>
+            <a:r>
+              <a:rPr sz="3000" b="1">
+                <a:solidFill>
+                  <a:srgbClr val="FFFFFF"/>
+                </a:solidFill>
+                <a:latin typeface="微软雅黑"/>
+                <a:ea typeface="微软雅黑"/>
+              </a:rPr>
+              <a:t>04</a:t>
+            </a:r>
+          </a:p>
+        </p:txBody>
+      </p:sp>
+      <p:sp>
+        <p:nvSpPr>
+          <p:cNvPr id="22" name="TextBox 21"/>
+          <p:cNvSpPr txBox="1"/>
+          <p:nvPr/>
+        </p:nvSpPr>
+        <p:spPr>
+          <a:xfrm>
+            <a:off x="1874519" y="5276088"/>
+            <a:ext cx="9509760" cy="1005840"/>
+          </a:xfrm>
+          <a:prstGeom prst="rect">
+            <a:avLst/>
+          </a:prstGeom>
+          <a:noFill/>
+        </p:spPr>
+        <p:txBody>
+          <a:bodyPr wrap="square" anchor="t">
+            <a:spAutoFit/>
+          </a:bodyPr>
+          <a:lstStyle/>
+          <a:p>
+            <a:pPr algn="l">
+              <a:lnSpc>
+                <a:spcPct val="103000"/>
+              </a:lnSpc>
+              <a:spcAft>
+                <a:spcPts val="200"/>
+              </a:spcAft>
+            </a:pPr>
+            <a:r>
+              <a:rPr sz="1600" b="1">
+                <a:solidFill>
+                  <a:srgbClr val="1A2638"/>
+                </a:solidFill>
+                <a:latin typeface="微软雅黑"/>
+                <a:ea typeface="微软雅黑"/>
+              </a:rPr>
+              <a:t>企业需求数据库共建</a:t>
+            </a:r>
+          </a:p>
+          <a:p>
+            <a:pPr algn="l">
+              <a:lnSpc>
+                <a:spcPct val="103000"/>
+              </a:lnSpc>
+              <a:spcAft>
+                <a:spcPts val="200"/>
+              </a:spcAft>
+            </a:pPr>
+            <a:r>
+              <a:rPr sz="1250" b="0">
+                <a:solidFill>
+                  <a:srgbClr val="5B6B82"/>
+                </a:solidFill>
+                <a:latin typeface="微软雅黑"/>
+                <a:ea typeface="微软雅黑"/>
+              </a:rPr>
+              <a:t>本周启动联合会会员企业扩租 / 迁址需求调研。</a:t>
+            </a:r>
+          </a:p>
+          <a:p>
+            <a:pPr algn="l">
+              <a:lnSpc>
+                <a:spcPct val="103000"/>
+              </a:lnSpc>
+              <a:spcAft>
+                <a:spcPts val="200"/>
+              </a:spcAft>
+            </a:pPr>
+            <a:r>
+              <a:rPr sz="1250" b="1">
+                <a:solidFill>
+                  <a:srgbClr val="1B4F9C"/>
+                </a:solidFill>
+                <a:latin typeface="微软雅黑"/>
+                <a:ea typeface="微软雅黑"/>
+              </a:rPr>
+              <a:t>交付：1 个月内形成首批 50 家目标企业清单</a:t>
+            </a:r>
+          </a:p>
+        </p:txBody>
+      </p:sp>
+    </p:spTree>
+  </p:cSld>
+  <p:clrMapOvr>
+    <a:masterClrMapping/>
+  </p:clrMapOvr>
+</p:sld>
+</file>
+
+<file path=ppt/slides/slide14.xml><?xml version="1.0" encoding="utf-8"?>
 <p:sld xmlns:a="http://schemas.openxmlformats.org/drawingml/2006/main" xmlns:p="http://schemas.openxmlformats.org/presentationml/2006/main" xmlns:r="http://schemas.openxmlformats.org/officeDocument/2006/relationships">
   <p:cSld>
     <p:bg>
@@ -6545,8 +9023,8 @@
         </p:nvSpPr>
         <p:spPr>
           <a:xfrm>
-            <a:off x="914400" y="5029200"/>
-            <a:ext cx="10332720" cy="1097280"/>
+            <a:off x="914400" y="4892040"/>
+            <a:ext cx="10515600" cy="1463040"/>
           </a:xfrm>
           <a:prstGeom prst="rect">
             <a:avLst/>
@@ -6564,18 +9042,18 @@
                 <a:spcPct val="105000"/>
               </a:lnSpc>
               <a:spcAft>
-                <a:spcPts val="800"/>
-              </a:spcAft>
-            </a:pPr>
-            <a:r>
-              <a:rPr sz="1700" b="0">
+                <a:spcPts val="600"/>
+              </a:spcAft>
+            </a:pPr>
+            <a:r>
+              <a:rPr sz="1600" b="0">
                 <a:solidFill>
                   <a:srgbClr val="E8EEF6"/>
                 </a:solidFill>
                 <a:latin typeface="微软雅黑"/>
                 <a:ea typeface="微软雅黑"/>
               </a:rPr>
-              <a:t>对方本质是“资源平台”（空间 + 政府背书 + 双创资源）；</a:t>
+              <a:t>对方提供“资源平台”（空间 + 政府背书 + 双创资源），腾讯云提供“算力 + 技术底座”；</a:t>
             </a:r>
           </a:p>
           <a:p>
@@ -6584,18 +9062,38 @@
                 <a:spcPct val="105000"/>
               </a:lnSpc>
               <a:spcAft>
-                <a:spcPts val="800"/>
-              </a:spcAft>
-            </a:pPr>
-            <a:r>
-              <a:rPr sz="1700" b="0">
+                <a:spcPts val="600"/>
+              </a:spcAft>
+            </a:pPr>
+            <a:r>
+              <a:rPr sz="1600" b="0">
                 <a:solidFill>
                   <a:srgbClr val="E8EEF6"/>
                 </a:solidFill>
                 <a:latin typeface="微软雅黑"/>
                 <a:ea typeface="微软雅黑"/>
               </a:rPr>
-              <a:t>我们要补上的是“内容 + 运营 + 产业导入 + 商业化变现”的闭环能力。</a:t>
+              <a:t>我们补上“内容 + 运营 + 产业导入 + 商业化变现”，并用「超级孵化器」批量孵化 OPC，</a:t>
+            </a:r>
+          </a:p>
+          <a:p>
+            <a:pPr algn="l">
+              <a:lnSpc>
+                <a:spcPct val="105000"/>
+              </a:lnSpc>
+              <a:spcAft>
+                <a:spcPts val="600"/>
+              </a:spcAft>
+            </a:pPr>
+            <a:r>
+              <a:rPr sz="1600" b="1">
+                <a:solidFill>
+                  <a:srgbClr val="F2B632"/>
+                </a:solidFill>
+                <a:latin typeface="微软雅黑"/>
+                <a:ea typeface="微软雅黑"/>
+              </a:rPr>
+              <a:t>（AI 一人公司 / 超级个体）—— 让所有 OPC 在生态链里完成闭环。</a:t>
             </a:r>
           </a:p>
         </p:txBody>
@@ -6816,7 +9314,7 @@
                 <a:latin typeface="微软雅黑"/>
                 <a:ea typeface="微软雅黑"/>
               </a:rPr>
-              <a:t>双方资源盘点：壳 × 内容，天然互补</a:t>
+              <a:t>五方资源盘点：空间 × 内容 × 算力，三位一体</a:t>
             </a:r>
           </a:p>
         </p:txBody>
@@ -6872,8 +9370,8 @@
         </p:nvSpPr>
         <p:spPr>
           <a:xfrm>
-            <a:off x="502920" y="1463040"/>
-            <a:ext cx="5394960" cy="4846320"/>
+            <a:off x="502920" y="1371600"/>
+            <a:ext cx="5394960" cy="3977639"/>
           </a:xfrm>
           <a:prstGeom prst="rect">
             <a:avLst/>
@@ -6916,8 +9414,8 @@
         </p:nvSpPr>
         <p:spPr>
           <a:xfrm>
-            <a:off x="502920" y="1463040"/>
-            <a:ext cx="5394960" cy="548640"/>
+            <a:off x="502920" y="1371600"/>
+            <a:ext cx="5394960" cy="502920"/>
           </a:xfrm>
           <a:prstGeom prst="rect">
             <a:avLst/>
@@ -6960,8 +9458,8 @@
         </p:nvSpPr>
         <p:spPr>
           <a:xfrm>
-            <a:off x="685800" y="1463040"/>
-            <a:ext cx="5120640" cy="548640"/>
+            <a:off x="685800" y="1371600"/>
+            <a:ext cx="5120640" cy="502920"/>
           </a:xfrm>
           <a:prstGeom prst="rect">
             <a:avLst/>
@@ -6983,7 +9481,7 @@
               </a:spcAft>
             </a:pPr>
             <a:r>
-              <a:rPr sz="1600" b="1">
+              <a:rPr sz="1500" b="1">
                 <a:solidFill>
                   <a:srgbClr val="FFFFFF"/>
                 </a:solidFill>
@@ -7003,8 +9501,8 @@
         </p:nvSpPr>
         <p:spPr>
           <a:xfrm>
-            <a:off x="685800" y="2194560"/>
-            <a:ext cx="5029200" cy="4023360"/>
+            <a:off x="685800" y="2011680"/>
+            <a:ext cx="5029200" cy="3291840"/>
           </a:xfrm>
           <a:prstGeom prst="rect">
             <a:avLst/>
@@ -7026,7 +9524,7 @@
               </a:spcAft>
             </a:pPr>
             <a:r>
-              <a:rPr sz="1400" b="1">
+              <a:rPr sz="1300" b="1">
                 <a:solidFill>
                   <a:srgbClr val="1B4F9C"/>
                 </a:solidFill>
@@ -7035,7 +9533,7 @@
               <a:t>▍</a:t>
             </a:r>
             <a:r>
-              <a:rPr sz="1400" b="1">
+              <a:rPr sz="1300" b="1">
                 <a:solidFill>
                   <a:srgbClr val="1A2638"/>
                 </a:solidFill>
@@ -7044,7 +9542,7 @@
               <a:t>云计算创新基地：  </a:t>
             </a:r>
             <a:r>
-              <a:rPr sz="1400" b="0">
+              <a:rPr sz="1300" b="0">
                 <a:solidFill>
                   <a:srgbClr val="5B6B82"/>
                 </a:solidFill>
@@ -7063,7 +9561,7 @@
               </a:spcAft>
             </a:pPr>
             <a:r>
-              <a:rPr sz="1400" b="1">
+              <a:rPr sz="1300" b="1">
                 <a:solidFill>
                   <a:srgbClr val="1B4F9C"/>
                 </a:solidFill>
@@ -7072,7 +9570,7 @@
               <a:t>▍</a:t>
             </a:r>
             <a:r>
-              <a:rPr sz="1400" b="1">
+              <a:rPr sz="1300" b="1">
                 <a:solidFill>
                   <a:srgbClr val="1A2638"/>
                 </a:solidFill>
@@ -7081,13 +9579,13 @@
               <a:t>五角场创新创业学院：  </a:t>
             </a:r>
             <a:r>
-              <a:rPr sz="1400" b="0">
+              <a:rPr sz="1300" b="0">
                 <a:solidFill>
                   <a:srgbClr val="5B6B82"/>
                 </a:solidFill>
                 <a:latin typeface="微软雅黑"/>
               </a:rPr>
-              <a:t>双创资源连接器 + 加速器，“募课”模式、长三角科创板预备营等全周期服务。</a:t>
+              <a:t>双创资源连接器，“募课”模式、长三角科创板预备营等全周期服务。</a:t>
             </a:r>
           </a:p>
           <a:p>
@@ -7100,7 +9598,7 @@
               </a:spcAft>
             </a:pPr>
             <a:r>
-              <a:rPr sz="1400" b="1">
+              <a:rPr sz="1300" b="1">
                 <a:solidFill>
                   <a:srgbClr val="1B4F9C"/>
                 </a:solidFill>
@@ -7109,53 +9607,16 @@
               <a:t>▍</a:t>
             </a:r>
             <a:r>
-              <a:rPr sz="1400" b="1">
+              <a:rPr sz="1300" b="1">
                 <a:solidFill>
                   <a:srgbClr val="1A2638"/>
                 </a:solidFill>
                 <a:latin typeface="微软雅黑"/>
               </a:rPr>
-              <a:t>政府背书：  </a:t>
-            </a:r>
-            <a:r>
-              <a:rPr sz="1400" b="0">
-                <a:solidFill>
-                  <a:srgbClr val="5B6B82"/>
-                </a:solidFill>
-                <a:latin typeface="微软雅黑"/>
-              </a:rPr>
-              <a:t>杨浦区政策明确支持盘活低效物业、发展孵化器、引入 AI 企业。</a:t>
-            </a:r>
-          </a:p>
-          <a:p>
-            <a:pPr>
-              <a:lnSpc>
-                <a:spcPct val="112000"/>
-              </a:lnSpc>
-              <a:spcAft>
-                <a:spcPts val="1000"/>
-              </a:spcAft>
-            </a:pPr>
-            <a:r>
-              <a:rPr sz="1400" b="1">
-                <a:solidFill>
-                  <a:srgbClr val="1B4F9C"/>
-                </a:solidFill>
-                <a:latin typeface="微软雅黑"/>
-              </a:rPr>
-              <a:t>▍</a:t>
-            </a:r>
-            <a:r>
-              <a:rPr sz="1400" b="1">
-                <a:solidFill>
-                  <a:srgbClr val="1A2638"/>
-                </a:solidFill>
-                <a:latin typeface="微软雅黑"/>
-              </a:rPr>
               <a:t>缺口：  </a:t>
             </a:r>
             <a:r>
-              <a:rPr sz="1400" b="0">
+              <a:rPr sz="1300" b="0">
                 <a:solidFill>
                   <a:srgbClr val="5B6B82"/>
                 </a:solidFill>
@@ -7174,8 +9635,8 @@
         </p:nvSpPr>
         <p:spPr>
           <a:xfrm>
-            <a:off x="6263640" y="1463040"/>
-            <a:ext cx="5394960" cy="4846320"/>
+            <a:off x="6263640" y="1371600"/>
+            <a:ext cx="5394960" cy="3977639"/>
           </a:xfrm>
           <a:prstGeom prst="rect">
             <a:avLst/>
@@ -7218,8 +9679,8 @@
         </p:nvSpPr>
         <p:spPr>
           <a:xfrm>
-            <a:off x="6263640" y="1463040"/>
-            <a:ext cx="5394960" cy="548640"/>
+            <a:off x="6263640" y="1371600"/>
+            <a:ext cx="5394960" cy="502920"/>
           </a:xfrm>
           <a:prstGeom prst="rect">
             <a:avLst/>
@@ -7262,8 +9723,8 @@
         </p:nvSpPr>
         <p:spPr>
           <a:xfrm>
-            <a:off x="6446520" y="1463040"/>
-            <a:ext cx="5120640" cy="548640"/>
+            <a:off x="6446520" y="1371600"/>
+            <a:ext cx="5120640" cy="502920"/>
           </a:xfrm>
           <a:prstGeom prst="rect">
             <a:avLst/>
@@ -7285,7 +9746,7 @@
               </a:spcAft>
             </a:pPr>
             <a:r>
-              <a:rPr sz="1600" b="1">
+              <a:rPr sz="1500" b="1">
                 <a:solidFill>
                   <a:srgbClr val="FFFFFF"/>
                 </a:solidFill>
@@ -7305,8 +9766,8 @@
         </p:nvSpPr>
         <p:spPr>
           <a:xfrm>
-            <a:off x="6446520" y="2194560"/>
-            <a:ext cx="5029200" cy="4023360"/>
+            <a:off x="6446520" y="2011680"/>
+            <a:ext cx="5029200" cy="3291840"/>
           </a:xfrm>
           <a:prstGeom prst="rect">
             <a:avLst/>
@@ -7328,142 +9789,283 @@
               </a:spcAft>
             </a:pPr>
             <a:r>
+              <a:rPr sz="1300" b="1">
+                <a:solidFill>
+                  <a:srgbClr val="16B8C6"/>
+                </a:solidFill>
+                <a:latin typeface="微软雅黑"/>
+              </a:rPr>
+              <a:t>▍</a:t>
+            </a:r>
+            <a:r>
+              <a:rPr sz="1300" b="1">
+                <a:solidFill>
+                  <a:srgbClr val="1A2638"/>
+                </a:solidFill>
+                <a:latin typeface="微软雅黑"/>
+              </a:rPr>
+              <a:t>复旦住房政策研究中心：  </a:t>
+            </a:r>
+            <a:r>
+              <a:rPr sz="1300" b="0">
+                <a:solidFill>
+                  <a:srgbClr val="5B6B82"/>
+                </a:solidFill>
+                <a:latin typeface="微软雅黑"/>
+              </a:rPr>
+              <a:t>城市更新、存量盘活、产业社区规划与政策背书。</a:t>
+            </a:r>
+          </a:p>
+          <a:p>
+            <a:pPr>
+              <a:lnSpc>
+                <a:spcPct val="112000"/>
+              </a:lnSpc>
+              <a:spcAft>
+                <a:spcPts val="1000"/>
+              </a:spcAft>
+            </a:pPr>
+            <a:r>
+              <a:rPr sz="1300" b="1">
+                <a:solidFill>
+                  <a:srgbClr val="16B8C6"/>
+                </a:solidFill>
+                <a:latin typeface="微软雅黑"/>
+              </a:rPr>
+              <a:t>▍</a:t>
+            </a:r>
+            <a:r>
+              <a:rPr sz="1300" b="1">
+                <a:solidFill>
+                  <a:srgbClr val="1A2638"/>
+                </a:solidFill>
+                <a:latin typeface="微软雅黑"/>
+              </a:rPr>
+              <a:t>AI 商业化落地组委会：  </a:t>
+            </a:r>
+            <a:r>
+              <a:rPr sz="1300" b="0">
+                <a:solidFill>
+                  <a:srgbClr val="5B6B82"/>
+                </a:solidFill>
+                <a:latin typeface="微软雅黑"/>
+              </a:rPr>
+              <a:t>5·22 峰会汇聚 AI 全产业链企业与投融资资源。</a:t>
+            </a:r>
+          </a:p>
+          <a:p>
+            <a:pPr>
+              <a:lnSpc>
+                <a:spcPct val="112000"/>
+              </a:lnSpc>
+              <a:spcAft>
+                <a:spcPts val="1000"/>
+              </a:spcAft>
+            </a:pPr>
+            <a:r>
+              <a:rPr sz="1300" b="1">
+                <a:solidFill>
+                  <a:srgbClr val="16B8C6"/>
+                </a:solidFill>
+                <a:latin typeface="微软雅黑"/>
+              </a:rPr>
+              <a:t>▍</a:t>
+            </a:r>
+            <a:r>
+              <a:rPr sz="1300" b="1">
+                <a:solidFill>
+                  <a:srgbClr val="1A2638"/>
+                </a:solidFill>
+                <a:latin typeface="微软雅黑"/>
+              </a:rPr>
+              <a:t>杨浦区科技企业联合会：  </a:t>
+            </a:r>
+            <a:r>
+              <a:rPr sz="1300" b="0">
+                <a:solidFill>
+                  <a:srgbClr val="5B6B82"/>
+                </a:solidFill>
+                <a:latin typeface="微软雅黑"/>
+              </a:rPr>
+              <a:t>覆盖七大战新产业会员企业网络，直接招商渠道。</a:t>
+            </a:r>
+          </a:p>
+          <a:p>
+            <a:pPr>
+              <a:lnSpc>
+                <a:spcPct val="112000"/>
+              </a:lnSpc>
+              <a:spcAft>
+                <a:spcPts val="1000"/>
+              </a:spcAft>
+            </a:pPr>
+            <a:r>
+              <a:rPr sz="1300" b="1">
+                <a:solidFill>
+                  <a:srgbClr val="16B8C6"/>
+                </a:solidFill>
+                <a:latin typeface="微软雅黑"/>
+              </a:rPr>
+              <a:t>▍</a:t>
+            </a:r>
+            <a:r>
+              <a:rPr sz="1300" b="1">
+                <a:solidFill>
+                  <a:srgbClr val="1A2638"/>
+                </a:solidFill>
+                <a:latin typeface="微软雅黑"/>
+              </a:rPr>
+              <a:t>您本人：  </a:t>
+            </a:r>
+            <a:r>
+              <a:rPr sz="1300" b="0">
+                <a:solidFill>
+                  <a:srgbClr val="5B6B82"/>
+                </a:solidFill>
+                <a:latin typeface="微软雅黑"/>
+              </a:rPr>
+              <a:t>跨组织协同纽带 + 轻资产拓展操盘能力（关键）。</a:t>
+            </a:r>
+          </a:p>
+        </p:txBody>
+      </p:sp>
+      <p:sp>
+        <p:nvSpPr>
+          <p:cNvPr id="15" name="Rectangle 14"/>
+          <p:cNvSpPr/>
+          <p:nvPr/>
+        </p:nvSpPr>
+        <p:spPr>
+          <a:xfrm>
+            <a:off x="502920" y="5486400"/>
+            <a:ext cx="11155680" cy="868680"/>
+          </a:xfrm>
+          <a:prstGeom prst="rect">
+            <a:avLst/>
+          </a:prstGeom>
+          <a:solidFill>
+            <a:srgbClr val="0B1F3A"/>
+          </a:solidFill>
+          <a:ln>
+            <a:noFill/>
+          </a:ln>
+          <a:effectLst/>
+        </p:spPr>
+        <p:style>
+          <a:lnRef idx="1">
+            <a:schemeClr val="accent1"/>
+          </a:lnRef>
+          <a:fillRef idx="3">
+            <a:schemeClr val="accent1"/>
+          </a:fillRef>
+          <a:effectRef idx="2">
+            <a:schemeClr val="accent1"/>
+          </a:effectRef>
+          <a:fontRef idx="minor">
+            <a:schemeClr val="lt1"/>
+          </a:fontRef>
+        </p:style>
+        <p:txBody>
+          <a:bodyPr rtlCol="0" anchor="ctr"/>
+          <a:lstStyle/>
+          <a:p>
+            <a:pPr algn="ctr"/>
+          </a:p>
+        </p:txBody>
+      </p:sp>
+      <p:sp>
+        <p:nvSpPr>
+          <p:cNvPr id="16" name="Rectangle 15"/>
+          <p:cNvSpPr/>
+          <p:nvPr/>
+        </p:nvSpPr>
+        <p:spPr>
+          <a:xfrm>
+            <a:off x="502920" y="5486400"/>
+            <a:ext cx="146304" cy="868680"/>
+          </a:xfrm>
+          <a:prstGeom prst="rect">
+            <a:avLst/>
+          </a:prstGeom>
+          <a:solidFill>
+            <a:srgbClr val="F2B632"/>
+          </a:solidFill>
+          <a:ln>
+            <a:noFill/>
+          </a:ln>
+          <a:effectLst/>
+        </p:spPr>
+        <p:style>
+          <a:lnRef idx="1">
+            <a:schemeClr val="accent1"/>
+          </a:lnRef>
+          <a:fillRef idx="3">
+            <a:schemeClr val="accent1"/>
+          </a:fillRef>
+          <a:effectRef idx="2">
+            <a:schemeClr val="accent1"/>
+          </a:effectRef>
+          <a:fontRef idx="minor">
+            <a:schemeClr val="lt1"/>
+          </a:fontRef>
+        </p:style>
+        <p:txBody>
+          <a:bodyPr rtlCol="0" anchor="ctr"/>
+          <a:lstStyle/>
+          <a:p>
+            <a:pPr algn="ctr"/>
+          </a:p>
+        </p:txBody>
+      </p:sp>
+      <p:sp>
+        <p:nvSpPr>
+          <p:cNvPr id="17" name="TextBox 16"/>
+          <p:cNvSpPr txBox="1"/>
+          <p:nvPr/>
+        </p:nvSpPr>
+        <p:spPr>
+          <a:xfrm>
+            <a:off x="868680" y="5532120"/>
+            <a:ext cx="10607040" cy="777240"/>
+          </a:xfrm>
+          <a:prstGeom prst="rect">
+            <a:avLst/>
+          </a:prstGeom>
+          <a:noFill/>
+        </p:spPr>
+        <p:txBody>
+          <a:bodyPr wrap="square" anchor="ctr">
+            <a:spAutoFit/>
+          </a:bodyPr>
+          <a:lstStyle/>
+          <a:p>
+            <a:pPr algn="l">
+              <a:lnSpc>
+                <a:spcPct val="105000"/>
+              </a:lnSpc>
+              <a:spcAft>
+                <a:spcPts val="600"/>
+              </a:spcAft>
+            </a:pPr>
+            <a:r>
               <a:rPr sz="1400" b="1">
                 <a:solidFill>
-                  <a:srgbClr val="16B8C6"/>
-                </a:solidFill>
-                <a:latin typeface="微软雅黑"/>
-              </a:rPr>
-              <a:t>▍</a:t>
-            </a:r>
-            <a:r>
-              <a:rPr sz="1400" b="1">
-                <a:solidFill>
-                  <a:srgbClr val="1A2638"/>
-                </a:solidFill>
-                <a:latin typeface="微软雅黑"/>
-              </a:rPr>
-              <a:t>复旦住房政策研究中心：  </a:t>
+                  <a:srgbClr val="F2B632"/>
+                </a:solidFill>
+                <a:latin typeface="微软雅黑"/>
+                <a:ea typeface="微软雅黑"/>
+              </a:rPr>
+              <a:t>新伙伴 · 腾讯云（算力与技术底座）：</a:t>
             </a:r>
             <a:r>
               <a:rPr sz="1400" b="0">
                 <a:solidFill>
-                  <a:srgbClr val="5B6B82"/>
-                </a:solidFill>
-                <a:latin typeface="微软雅黑"/>
-              </a:rPr>
-              <a:t>城市更新、存量盘活、产业社区规划与政策研判背书。</a:t>
-            </a:r>
-          </a:p>
-          <a:p>
-            <a:pPr>
-              <a:lnSpc>
-                <a:spcPct val="112000"/>
-              </a:lnSpc>
-              <a:spcAft>
-                <a:spcPts val="1000"/>
-              </a:spcAft>
-            </a:pPr>
-            <a:r>
-              <a:rPr sz="1400" b="1">
-                <a:solidFill>
-                  <a:srgbClr val="16B8C6"/>
-                </a:solidFill>
-                <a:latin typeface="微软雅黑"/>
-              </a:rPr>
-              <a:t>▍</a:t>
-            </a:r>
-            <a:r>
-              <a:rPr sz="1400" b="1">
-                <a:solidFill>
-                  <a:srgbClr val="1A2638"/>
-                </a:solidFill>
-                <a:latin typeface="微软雅黑"/>
-              </a:rPr>
-              <a:t>AI 商业化落地组委会：  </a:t>
-            </a:r>
-            <a:r>
-              <a:rPr sz="1400" b="0">
-                <a:solidFill>
-                  <a:srgbClr val="5B6B82"/>
-                </a:solidFill>
-                <a:latin typeface="微软雅黑"/>
-              </a:rPr>
-              <a:t>5·22 峰会汇聚 AI 全产业链企业与投融资资源。</a:t>
-            </a:r>
-          </a:p>
-          <a:p>
-            <a:pPr>
-              <a:lnSpc>
-                <a:spcPct val="112000"/>
-              </a:lnSpc>
-              <a:spcAft>
-                <a:spcPts val="1000"/>
-              </a:spcAft>
-            </a:pPr>
-            <a:r>
-              <a:rPr sz="1400" b="1">
-                <a:solidFill>
-                  <a:srgbClr val="16B8C6"/>
-                </a:solidFill>
-                <a:latin typeface="微软雅黑"/>
-              </a:rPr>
-              <a:t>▍</a:t>
-            </a:r>
-            <a:r>
-              <a:rPr sz="1400" b="1">
-                <a:solidFill>
-                  <a:srgbClr val="1A2638"/>
-                </a:solidFill>
-                <a:latin typeface="微软雅黑"/>
-              </a:rPr>
-              <a:t>杨浦区科技企业联合会：  </a:t>
-            </a:r>
-            <a:r>
-              <a:rPr sz="1400" b="0">
-                <a:solidFill>
-                  <a:srgbClr val="5B6B82"/>
-                </a:solidFill>
-                <a:latin typeface="微软雅黑"/>
-              </a:rPr>
-              <a:t>覆盖七大战新产业的会员企业网络，直接招商渠道。</a:t>
-            </a:r>
-          </a:p>
-          <a:p>
-            <a:pPr>
-              <a:lnSpc>
-                <a:spcPct val="112000"/>
-              </a:lnSpc>
-              <a:spcAft>
-                <a:spcPts val="1000"/>
-              </a:spcAft>
-            </a:pPr>
-            <a:r>
-              <a:rPr sz="1400" b="1">
-                <a:solidFill>
-                  <a:srgbClr val="16B8C6"/>
-                </a:solidFill>
-                <a:latin typeface="微软雅黑"/>
-              </a:rPr>
-              <a:t>▍</a:t>
-            </a:r>
-            <a:r>
-              <a:rPr sz="1400" b="1">
-                <a:solidFill>
-                  <a:srgbClr val="1A2638"/>
-                </a:solidFill>
-                <a:latin typeface="微软雅黑"/>
-              </a:rPr>
-              <a:t>您本人：  </a:t>
-            </a:r>
-            <a:r>
-              <a:rPr sz="1400" b="0">
-                <a:solidFill>
-                  <a:srgbClr val="5B6B82"/>
-                </a:solidFill>
-                <a:latin typeface="微软雅黑"/>
-              </a:rPr>
-              <a:t>跨组织协同纽带 + 轻资产拓展操盘能力（关键）。</a:t>
+                  <a:srgbClr val="FFFFFF"/>
+                </a:solidFill>
+                <a:latin typeface="微软雅黑"/>
+                <a:ea typeface="微软雅黑"/>
+              </a:rPr>
+              <a:t>算力补贴 + 混元大模型/API + 云开发技术中台 + 初创扶持计划 —— 补齐“算力+技术”底座，支撑 OPC 规模化孵化。</a:t>
             </a:r>
           </a:p>
         </p:txBody>
@@ -12365,7 +14967,7 @@
                 <a:latin typeface="微软雅黑"/>
                 <a:ea typeface="微软雅黑"/>
               </a:rPr>
-              <a:t>运营引流 · 治本之策</a:t>
+              <a:t>新伙伴 · 腾讯云</a:t>
             </a:r>
           </a:p>
           <a:p>
@@ -12385,7 +14987,7 @@
                 <a:latin typeface="微软雅黑"/>
                 <a:ea typeface="微软雅黑"/>
               </a:rPr>
-              <a:t>内容 + 活动引流：空间是容器，没有内容必然空置</a:t>
+              <a:t>引入腾讯云：补齐“算力 + 技术”全栈底座</a:t>
             </a:r>
           </a:p>
         </p:txBody>
@@ -12428,21 +15030,64 @@
                 <a:latin typeface="微软雅黑"/>
                 <a:ea typeface="微软雅黑"/>
               </a:rPr>
-              <a:t>06</a:t>
-            </a:r>
-          </a:p>
-        </p:txBody>
-      </p:sp>
-      <p:sp>
-        <p:nvSpPr>
-          <p:cNvPr id="7" name="Rectangle 6"/>
+              <a:t>+</a:t>
+            </a:r>
+          </a:p>
+        </p:txBody>
+      </p:sp>
+      <p:sp>
+        <p:nvSpPr>
+          <p:cNvPr id="7" name="TextBox 6"/>
+          <p:cNvSpPr txBox="1"/>
+          <p:nvPr/>
+        </p:nvSpPr>
+        <p:spPr>
+          <a:xfrm>
+            <a:off x="502920" y="1325880"/>
+            <a:ext cx="10972800" cy="502920"/>
+          </a:xfrm>
+          <a:prstGeom prst="rect">
+            <a:avLst/>
+          </a:prstGeom>
+          <a:noFill/>
+        </p:spPr>
+        <p:txBody>
+          <a:bodyPr wrap="square" anchor="t">
+            <a:spAutoFit/>
+          </a:bodyPr>
+          <a:lstStyle/>
+          <a:p>
+            <a:pPr algn="l">
+              <a:lnSpc>
+                <a:spcPct val="105000"/>
+              </a:lnSpc>
+              <a:spcAft>
+                <a:spcPts val="600"/>
+              </a:spcAft>
+            </a:pPr>
+            <a:r>
+              <a:rPr sz="1600" b="1">
+                <a:solidFill>
+                  <a:srgbClr val="1B4F9C"/>
+                </a:solidFill>
+                <a:latin typeface="微软雅黑"/>
+                <a:ea typeface="微软雅黑"/>
+              </a:rPr>
+              <a:t>生态从“空间 + 产业”升级为“空间 + 产业 + 算力 + 技术”全栈闭环。</a:t>
+            </a:r>
+          </a:p>
+        </p:txBody>
+      </p:sp>
+      <p:sp>
+        <p:nvSpPr>
+          <p:cNvPr id="8" name="Rectangle 7"/>
           <p:cNvSpPr/>
           <p:nvPr/>
         </p:nvSpPr>
         <p:spPr>
           <a:xfrm>
-            <a:off x="502920" y="1737360"/>
-            <a:ext cx="2606040" cy="2103120"/>
+            <a:off x="502920" y="1920240"/>
+            <a:ext cx="2606040" cy="2331720"/>
           </a:xfrm>
           <a:prstGeom prst="rect">
             <a:avLst/>
@@ -12479,14 +15124,14 @@
       </p:sp>
       <p:sp>
         <p:nvSpPr>
-          <p:cNvPr id="8" name="Rectangle 7"/>
+          <p:cNvPr id="9" name="Rectangle 8"/>
           <p:cNvSpPr/>
           <p:nvPr/>
         </p:nvSpPr>
         <p:spPr>
           <a:xfrm>
-            <a:off x="502920" y="1737360"/>
-            <a:ext cx="2606040" cy="640080"/>
+            <a:off x="502920" y="1920240"/>
+            <a:ext cx="2606040" cy="566928"/>
           </a:xfrm>
           <a:prstGeom prst="rect">
             <a:avLst/>
@@ -12523,14 +15168,14 @@
       </p:sp>
       <p:sp>
         <p:nvSpPr>
-          <p:cNvPr id="9" name="TextBox 8"/>
+          <p:cNvPr id="10" name="TextBox 9"/>
           <p:cNvSpPr txBox="1"/>
           <p:nvPr/>
         </p:nvSpPr>
         <p:spPr>
           <a:xfrm>
-            <a:off x="502920" y="1737360"/>
-            <a:ext cx="2606040" cy="640080"/>
+            <a:off x="667512" y="1920240"/>
+            <a:ext cx="2331720" cy="566928"/>
           </a:xfrm>
           <a:prstGeom prst="rect">
             <a:avLst/>
@@ -12543,7 +15188,7 @@
           </a:bodyPr>
           <a:lstStyle/>
           <a:p>
-            <a:pPr algn="ctr">
+            <a:pPr algn="l">
               <a:lnSpc>
                 <a:spcPct val="105000"/>
               </a:lnSpc>
@@ -12552,28 +15197,28 @@
               </a:spcAft>
             </a:pPr>
             <a:r>
-              <a:rPr sz="1300" b="1">
+              <a:rPr sz="1400" b="1">
                 <a:solidFill>
                   <a:srgbClr val="FFFFFF"/>
                 </a:solidFill>
                 <a:latin typeface="微软雅黑"/>
                 <a:ea typeface="微软雅黑"/>
               </a:rPr>
-              <a:t>IP 1</a:t>
-            </a:r>
-          </a:p>
-        </p:txBody>
-      </p:sp>
-      <p:sp>
-        <p:nvSpPr>
-          <p:cNvPr id="10" name="TextBox 9"/>
+              <a:t>① 算力补贴</a:t>
+            </a:r>
+          </a:p>
+        </p:txBody>
+      </p:sp>
+      <p:sp>
+        <p:nvSpPr>
+          <p:cNvPr id="11" name="TextBox 10"/>
           <p:cNvSpPr txBox="1"/>
           <p:nvPr/>
         </p:nvSpPr>
         <p:spPr>
           <a:xfrm>
-            <a:off x="640080" y="2514600"/>
-            <a:ext cx="2331720" cy="1188720"/>
+            <a:off x="667512" y="2578608"/>
+            <a:ext cx="2295144" cy="1600200"/>
           </a:xfrm>
           <a:prstGeom prst="rect">
             <a:avLst/>
@@ -12586,57 +15231,77 @@
           </a:bodyPr>
           <a:lstStyle/>
           <a:p>
-            <a:pPr algn="ctr">
-              <a:lnSpc>
-                <a:spcPct val="105000"/>
-              </a:lnSpc>
-              <a:spcAft>
-                <a:spcPts val="600"/>
-              </a:spcAft>
-            </a:pPr>
-            <a:r>
-              <a:rPr sz="1700" b="1">
+            <a:pPr algn="l">
+              <a:lnSpc>
+                <a:spcPct val="110000"/>
+              </a:lnSpc>
+              <a:spcAft>
+                <a:spcPts val="500"/>
+              </a:spcAft>
+            </a:pPr>
+            <a:r>
+              <a:rPr sz="1250" b="0">
                 <a:solidFill>
                   <a:srgbClr val="1A2638"/>
                 </a:solidFill>
                 <a:latin typeface="微软雅黑"/>
                 <a:ea typeface="微软雅黑"/>
               </a:rPr>
-              <a:t>AI 产业私董会</a:t>
-            </a:r>
-          </a:p>
-          <a:p>
-            <a:pPr algn="ctr">
-              <a:lnSpc>
-                <a:spcPct val="105000"/>
-              </a:lnSpc>
-              <a:spcAft>
-                <a:spcPts val="600"/>
-              </a:spcAft>
-            </a:pPr>
-            <a:r>
-              <a:rPr sz="1300" b="0">
-                <a:solidFill>
-                  <a:srgbClr val="5B6B82"/>
-                </a:solidFill>
-                <a:latin typeface="微软雅黑"/>
-                <a:ea typeface="微软雅黑"/>
-              </a:rPr>
-              <a:t>高端 · 圈层</a:t>
-            </a:r>
-          </a:p>
-        </p:txBody>
-      </p:sp>
-      <p:sp>
-        <p:nvSpPr>
-          <p:cNvPr id="11" name="Rectangle 10"/>
+              <a:t>为入驻 OPC / 企业发放</a:t>
+            </a:r>
+          </a:p>
+          <a:p>
+            <a:pPr algn="l">
+              <a:lnSpc>
+                <a:spcPct val="110000"/>
+              </a:lnSpc>
+              <a:spcAft>
+                <a:spcPts val="500"/>
+              </a:spcAft>
+            </a:pPr>
+            <a:r>
+              <a:rPr sz="1250" b="0">
+                <a:solidFill>
+                  <a:srgbClr val="1A2638"/>
+                </a:solidFill>
+                <a:latin typeface="微软雅黑"/>
+                <a:ea typeface="微软雅黑"/>
+              </a:rPr>
+              <a:t>云资源代金券与算力补贴，</a:t>
+            </a:r>
+          </a:p>
+          <a:p>
+            <a:pPr algn="l">
+              <a:lnSpc>
+                <a:spcPct val="110000"/>
+              </a:lnSpc>
+              <a:spcAft>
+                <a:spcPts val="500"/>
+              </a:spcAft>
+            </a:pPr>
+            <a:r>
+              <a:rPr sz="1250" b="0">
+                <a:solidFill>
+                  <a:srgbClr val="1A2638"/>
+                </a:solidFill>
+                <a:latin typeface="微软雅黑"/>
+                <a:ea typeface="微软雅黑"/>
+              </a:rPr>
+              <a:t>直接降本，跑通 AI 应用。</a:t>
+            </a:r>
+          </a:p>
+        </p:txBody>
+      </p:sp>
+      <p:sp>
+        <p:nvSpPr>
+          <p:cNvPr id="12" name="Rectangle 11"/>
           <p:cNvSpPr/>
           <p:nvPr/>
         </p:nvSpPr>
         <p:spPr>
           <a:xfrm>
-            <a:off x="3337560" y="1737360"/>
-            <a:ext cx="2606040" cy="2103120"/>
+            <a:off x="3319272" y="1920240"/>
+            <a:ext cx="2606040" cy="2331720"/>
           </a:xfrm>
           <a:prstGeom prst="rect">
             <a:avLst/>
@@ -12673,14 +15338,14 @@
       </p:sp>
       <p:sp>
         <p:nvSpPr>
-          <p:cNvPr id="12" name="Rectangle 11"/>
+          <p:cNvPr id="13" name="Rectangle 12"/>
           <p:cNvSpPr/>
           <p:nvPr/>
         </p:nvSpPr>
         <p:spPr>
           <a:xfrm>
-            <a:off x="3337560" y="1737360"/>
-            <a:ext cx="2606040" cy="640080"/>
+            <a:off x="3319272" y="1920240"/>
+            <a:ext cx="2606040" cy="566928"/>
           </a:xfrm>
           <a:prstGeom prst="rect">
             <a:avLst/>
@@ -12717,14 +15382,14 @@
       </p:sp>
       <p:sp>
         <p:nvSpPr>
-          <p:cNvPr id="13" name="TextBox 12"/>
+          <p:cNvPr id="14" name="TextBox 13"/>
           <p:cNvSpPr txBox="1"/>
           <p:nvPr/>
         </p:nvSpPr>
         <p:spPr>
           <a:xfrm>
-            <a:off x="3337560" y="1737360"/>
-            <a:ext cx="2606040" cy="640080"/>
+            <a:off x="3483864" y="1920240"/>
+            <a:ext cx="2331720" cy="566928"/>
           </a:xfrm>
           <a:prstGeom prst="rect">
             <a:avLst/>
@@ -12737,7 +15402,7 @@
           </a:bodyPr>
           <a:lstStyle/>
           <a:p>
-            <a:pPr algn="ctr">
+            <a:pPr algn="l">
               <a:lnSpc>
                 <a:spcPct val="105000"/>
               </a:lnSpc>
@@ -12746,28 +15411,28 @@
               </a:spcAft>
             </a:pPr>
             <a:r>
-              <a:rPr sz="1300" b="1">
+              <a:rPr sz="1400" b="1">
                 <a:solidFill>
                   <a:srgbClr val="FFFFFF"/>
                 </a:solidFill>
                 <a:latin typeface="微软雅黑"/>
                 <a:ea typeface="微软雅黑"/>
               </a:rPr>
-              <a:t>IP 2</a:t>
-            </a:r>
-          </a:p>
-        </p:txBody>
-      </p:sp>
-      <p:sp>
-        <p:nvSpPr>
-          <p:cNvPr id="14" name="TextBox 13"/>
+              <a:t>② 大模型与 API</a:t>
+            </a:r>
+          </a:p>
+        </p:txBody>
+      </p:sp>
+      <p:sp>
+        <p:nvSpPr>
+          <p:cNvPr id="15" name="TextBox 14"/>
           <p:cNvSpPr txBox="1"/>
           <p:nvPr/>
         </p:nvSpPr>
         <p:spPr>
           <a:xfrm>
-            <a:off x="3474720" y="2514600"/>
-            <a:ext cx="2331720" cy="1188720"/>
+            <a:off x="3483864" y="2578608"/>
+            <a:ext cx="2295144" cy="1600200"/>
           </a:xfrm>
           <a:prstGeom prst="rect">
             <a:avLst/>
@@ -12780,57 +15445,77 @@
           </a:bodyPr>
           <a:lstStyle/>
           <a:p>
-            <a:pPr algn="ctr">
-              <a:lnSpc>
-                <a:spcPct val="105000"/>
-              </a:lnSpc>
-              <a:spcAft>
-                <a:spcPts val="600"/>
-              </a:spcAft>
-            </a:pPr>
-            <a:r>
-              <a:rPr sz="1700" b="1">
+            <a:pPr algn="l">
+              <a:lnSpc>
+                <a:spcPct val="110000"/>
+              </a:lnSpc>
+              <a:spcAft>
+                <a:spcPts val="500"/>
+              </a:spcAft>
+            </a:pPr>
+            <a:r>
+              <a:rPr sz="1250" b="0">
                 <a:solidFill>
                   <a:srgbClr val="1A2638"/>
                 </a:solidFill>
                 <a:latin typeface="微软雅黑"/>
                 <a:ea typeface="微软雅黑"/>
               </a:rPr>
-              <a:t>AI Demo Day</a:t>
-            </a:r>
-          </a:p>
-          <a:p>
-            <a:pPr algn="ctr">
-              <a:lnSpc>
-                <a:spcPct val="105000"/>
-              </a:lnSpc>
-              <a:spcAft>
-                <a:spcPts val="600"/>
-              </a:spcAft>
-            </a:pPr>
-            <a:r>
-              <a:rPr sz="1300" b="0">
-                <a:solidFill>
-                  <a:srgbClr val="5B6B82"/>
-                </a:solidFill>
-                <a:latin typeface="微软雅黑"/>
-                <a:ea typeface="微软雅黑"/>
-              </a:rPr>
-              <a:t>招商 · 路演</a:t>
-            </a:r>
-          </a:p>
-        </p:txBody>
-      </p:sp>
-      <p:sp>
-        <p:nvSpPr>
-          <p:cNvPr id="15" name="Rectangle 14"/>
+              <a:t>混元大模型、API、</a:t>
+            </a:r>
+          </a:p>
+          <a:p>
+            <a:pPr algn="l">
+              <a:lnSpc>
+                <a:spcPct val="110000"/>
+              </a:lnSpc>
+              <a:spcAft>
+                <a:spcPts val="500"/>
+              </a:spcAft>
+            </a:pPr>
+            <a:r>
+              <a:rPr sz="1250" b="0">
+                <a:solidFill>
+                  <a:srgbClr val="1A2638"/>
+                </a:solidFill>
+                <a:latin typeface="微软雅黑"/>
+                <a:ea typeface="微软雅黑"/>
+              </a:rPr>
+              <a:t>Agent 开发工具，</a:t>
+            </a:r>
+          </a:p>
+          <a:p>
+            <a:pPr algn="l">
+              <a:lnSpc>
+                <a:spcPct val="110000"/>
+              </a:lnSpc>
+              <a:spcAft>
+                <a:spcPts val="500"/>
+              </a:spcAft>
+            </a:pPr>
+            <a:r>
+              <a:rPr sz="1250" b="0">
+                <a:solidFill>
+                  <a:srgbClr val="1A2638"/>
+                </a:solidFill>
+                <a:latin typeface="微软雅黑"/>
+                <a:ea typeface="微软雅黑"/>
+              </a:rPr>
+              <a:t>加速 AI 应用快速落地。</a:t>
+            </a:r>
+          </a:p>
+        </p:txBody>
+      </p:sp>
+      <p:sp>
+        <p:nvSpPr>
+          <p:cNvPr id="16" name="Rectangle 15"/>
           <p:cNvSpPr/>
           <p:nvPr/>
         </p:nvSpPr>
         <p:spPr>
           <a:xfrm>
-            <a:off x="6172200" y="1737360"/>
-            <a:ext cx="2606040" cy="2103120"/>
+            <a:off x="6135624" y="1920240"/>
+            <a:ext cx="2606040" cy="2331720"/>
           </a:xfrm>
           <a:prstGeom prst="rect">
             <a:avLst/>
@@ -12867,14 +15552,228 @@
       </p:sp>
       <p:sp>
         <p:nvSpPr>
-          <p:cNvPr id="16" name="Rectangle 15"/>
+          <p:cNvPr id="17" name="Rectangle 16"/>
           <p:cNvSpPr/>
           <p:nvPr/>
         </p:nvSpPr>
         <p:spPr>
           <a:xfrm>
-            <a:off x="6172200" y="1737360"/>
-            <a:ext cx="2606040" cy="640080"/>
+            <a:off x="6135624" y="1920240"/>
+            <a:ext cx="2606040" cy="566928"/>
+          </a:xfrm>
+          <a:prstGeom prst="rect">
+            <a:avLst/>
+          </a:prstGeom>
+          <a:solidFill>
+            <a:srgbClr val="1B4F9C"/>
+          </a:solidFill>
+          <a:ln>
+            <a:noFill/>
+          </a:ln>
+          <a:effectLst/>
+        </p:spPr>
+        <p:style>
+          <a:lnRef idx="1">
+            <a:schemeClr val="accent1"/>
+          </a:lnRef>
+          <a:fillRef idx="3">
+            <a:schemeClr val="accent1"/>
+          </a:fillRef>
+          <a:effectRef idx="2">
+            <a:schemeClr val="accent1"/>
+          </a:effectRef>
+          <a:fontRef idx="minor">
+            <a:schemeClr val="lt1"/>
+          </a:fontRef>
+        </p:style>
+        <p:txBody>
+          <a:bodyPr rtlCol="0" anchor="ctr"/>
+          <a:lstStyle/>
+          <a:p>
+            <a:pPr algn="ctr"/>
+          </a:p>
+        </p:txBody>
+      </p:sp>
+      <p:sp>
+        <p:nvSpPr>
+          <p:cNvPr id="18" name="TextBox 17"/>
+          <p:cNvSpPr txBox="1"/>
+          <p:nvPr/>
+        </p:nvSpPr>
+        <p:spPr>
+          <a:xfrm>
+            <a:off x="6300216" y="1920240"/>
+            <a:ext cx="2331720" cy="566928"/>
+          </a:xfrm>
+          <a:prstGeom prst="rect">
+            <a:avLst/>
+          </a:prstGeom>
+          <a:noFill/>
+        </p:spPr>
+        <p:txBody>
+          <a:bodyPr wrap="square" anchor="ctr">
+            <a:spAutoFit/>
+          </a:bodyPr>
+          <a:lstStyle/>
+          <a:p>
+            <a:pPr algn="l">
+              <a:lnSpc>
+                <a:spcPct val="105000"/>
+              </a:lnSpc>
+              <a:spcAft>
+                <a:spcPts val="600"/>
+              </a:spcAft>
+            </a:pPr>
+            <a:r>
+              <a:rPr sz="1400" b="1">
+                <a:solidFill>
+                  <a:srgbClr val="FFFFFF"/>
+                </a:solidFill>
+                <a:latin typeface="微软雅黑"/>
+                <a:ea typeface="微软雅黑"/>
+              </a:rPr>
+              <a:t>③ 技术中台</a:t>
+            </a:r>
+          </a:p>
+        </p:txBody>
+      </p:sp>
+      <p:sp>
+        <p:nvSpPr>
+          <p:cNvPr id="19" name="TextBox 18"/>
+          <p:cNvSpPr txBox="1"/>
+          <p:nvPr/>
+        </p:nvSpPr>
+        <p:spPr>
+          <a:xfrm>
+            <a:off x="6300216" y="2578608"/>
+            <a:ext cx="2295144" cy="1600200"/>
+          </a:xfrm>
+          <a:prstGeom prst="rect">
+            <a:avLst/>
+          </a:prstGeom>
+          <a:noFill/>
+        </p:spPr>
+        <p:txBody>
+          <a:bodyPr wrap="square" anchor="t">
+            <a:spAutoFit/>
+          </a:bodyPr>
+          <a:lstStyle/>
+          <a:p>
+            <a:pPr algn="l">
+              <a:lnSpc>
+                <a:spcPct val="110000"/>
+              </a:lnSpc>
+              <a:spcAft>
+                <a:spcPts val="500"/>
+              </a:spcAft>
+            </a:pPr>
+            <a:r>
+              <a:rPr sz="1250" b="0">
+                <a:solidFill>
+                  <a:srgbClr val="1A2638"/>
+                </a:solidFill>
+                <a:latin typeface="微软雅黑"/>
+                <a:ea typeface="微软雅黑"/>
+              </a:rPr>
+              <a:t>云开发、数据库、音视频</a:t>
+            </a:r>
+          </a:p>
+          <a:p>
+            <a:pPr algn="l">
+              <a:lnSpc>
+                <a:spcPct val="110000"/>
+              </a:lnSpc>
+              <a:spcAft>
+                <a:spcPts val="500"/>
+              </a:spcAft>
+            </a:pPr>
+            <a:r>
+              <a:rPr sz="1250" b="0">
+                <a:solidFill>
+                  <a:srgbClr val="1A2638"/>
+                </a:solidFill>
+                <a:latin typeface="微软雅黑"/>
+                <a:ea typeface="微软雅黑"/>
+              </a:rPr>
+              <a:t>等中台能力，</a:t>
+            </a:r>
+          </a:p>
+          <a:p>
+            <a:pPr algn="l">
+              <a:lnSpc>
+                <a:spcPct val="110000"/>
+              </a:lnSpc>
+              <a:spcAft>
+                <a:spcPts val="500"/>
+              </a:spcAft>
+            </a:pPr>
+            <a:r>
+              <a:rPr sz="1250" b="0">
+                <a:solidFill>
+                  <a:srgbClr val="1A2638"/>
+                </a:solidFill>
+                <a:latin typeface="微软雅黑"/>
+                <a:ea typeface="微软雅黑"/>
+              </a:rPr>
+              <a:t>支撑 AI 工作流规模化。</a:t>
+            </a:r>
+          </a:p>
+        </p:txBody>
+      </p:sp>
+      <p:sp>
+        <p:nvSpPr>
+          <p:cNvPr id="20" name="Rectangle 19"/>
+          <p:cNvSpPr/>
+          <p:nvPr/>
+        </p:nvSpPr>
+        <p:spPr>
+          <a:xfrm>
+            <a:off x="8951976" y="1920240"/>
+            <a:ext cx="2606040" cy="2331720"/>
+          </a:xfrm>
+          <a:prstGeom prst="rect">
+            <a:avLst/>
+          </a:prstGeom>
+          <a:solidFill>
+            <a:srgbClr val="E8EEF6"/>
+          </a:solidFill>
+          <a:ln>
+            <a:noFill/>
+          </a:ln>
+          <a:effectLst/>
+        </p:spPr>
+        <p:style>
+          <a:lnRef idx="1">
+            <a:schemeClr val="accent1"/>
+          </a:lnRef>
+          <a:fillRef idx="3">
+            <a:schemeClr val="accent1"/>
+          </a:fillRef>
+          <a:effectRef idx="2">
+            <a:schemeClr val="accent1"/>
+          </a:effectRef>
+          <a:fontRef idx="minor">
+            <a:schemeClr val="lt1"/>
+          </a:fontRef>
+        </p:style>
+        <p:txBody>
+          <a:bodyPr rtlCol="0" anchor="ctr"/>
+          <a:lstStyle/>
+          <a:p>
+            <a:pPr algn="ctr"/>
+          </a:p>
+        </p:txBody>
+      </p:sp>
+      <p:sp>
+        <p:nvSpPr>
+          <p:cNvPr id="21" name="Rectangle 20"/>
+          <p:cNvSpPr/>
+          <p:nvPr/>
+        </p:nvSpPr>
+        <p:spPr>
+          <a:xfrm>
+            <a:off x="8951976" y="1920240"/>
+            <a:ext cx="2606040" cy="566928"/>
           </a:xfrm>
           <a:prstGeom prst="rect">
             <a:avLst/>
@@ -12911,14 +15810,14 @@
       </p:sp>
       <p:sp>
         <p:nvSpPr>
-          <p:cNvPr id="17" name="TextBox 16"/>
+          <p:cNvPr id="22" name="TextBox 21"/>
           <p:cNvSpPr txBox="1"/>
           <p:nvPr/>
         </p:nvSpPr>
         <p:spPr>
           <a:xfrm>
-            <a:off x="6172200" y="1737360"/>
-            <a:ext cx="2606040" cy="640080"/>
+            <a:off x="9116568" y="1920240"/>
+            <a:ext cx="2331720" cy="566928"/>
           </a:xfrm>
           <a:prstGeom prst="rect">
             <a:avLst/>
@@ -12931,7 +15830,7 @@
           </a:bodyPr>
           <a:lstStyle/>
           <a:p>
-            <a:pPr algn="ctr">
+            <a:pPr algn="l">
               <a:lnSpc>
                 <a:spcPct val="105000"/>
               </a:lnSpc>
@@ -12940,28 +15839,28 @@
               </a:spcAft>
             </a:pPr>
             <a:r>
-              <a:rPr sz="1300" b="1">
+              <a:rPr sz="1400" b="1">
                 <a:solidFill>
                   <a:srgbClr val="0B1F3A"/>
                 </a:solidFill>
                 <a:latin typeface="微软雅黑"/>
                 <a:ea typeface="微软雅黑"/>
               </a:rPr>
-              <a:t>IP 3</a:t>
-            </a:r>
-          </a:p>
-        </p:txBody>
-      </p:sp>
-      <p:sp>
-        <p:nvSpPr>
-          <p:cNvPr id="18" name="TextBox 17"/>
+              <a:t>④ 创业扶持</a:t>
+            </a:r>
+          </a:p>
+        </p:txBody>
+      </p:sp>
+      <p:sp>
+        <p:nvSpPr>
+          <p:cNvPr id="23" name="TextBox 22"/>
           <p:cNvSpPr txBox="1"/>
           <p:nvPr/>
         </p:nvSpPr>
         <p:spPr>
           <a:xfrm>
-            <a:off x="6309360" y="2514600"/>
-            <a:ext cx="2331720" cy="1188720"/>
+            <a:off x="9116568" y="2578608"/>
+            <a:ext cx="2295144" cy="1600200"/>
           </a:xfrm>
           <a:prstGeom prst="rect">
             <a:avLst/>
@@ -12974,251 +15873,77 @@
           </a:bodyPr>
           <a:lstStyle/>
           <a:p>
-            <a:pPr algn="ctr">
-              <a:lnSpc>
-                <a:spcPct val="105000"/>
-              </a:lnSpc>
-              <a:spcAft>
-                <a:spcPts val="600"/>
-              </a:spcAft>
-            </a:pPr>
-            <a:r>
-              <a:rPr sz="1700" b="1">
+            <a:pPr algn="l">
+              <a:lnSpc>
+                <a:spcPct val="110000"/>
+              </a:lnSpc>
+              <a:spcAft>
+                <a:spcPts val="500"/>
+              </a:spcAft>
+            </a:pPr>
+            <a:r>
+              <a:rPr sz="1250" b="0">
                 <a:solidFill>
                   <a:srgbClr val="1A2638"/>
                 </a:solidFill>
                 <a:latin typeface="微软雅黑"/>
                 <a:ea typeface="微软雅黑"/>
               </a:rPr>
-              <a:t>AI 应用展</a:t>
-            </a:r>
-          </a:p>
-          <a:p>
-            <a:pPr algn="ctr">
-              <a:lnSpc>
-                <a:spcPct val="105000"/>
-              </a:lnSpc>
-              <a:spcAft>
-                <a:spcPts val="600"/>
-              </a:spcAft>
-            </a:pPr>
-            <a:r>
-              <a:rPr sz="1300" b="0">
-                <a:solidFill>
-                  <a:srgbClr val="5B6B82"/>
-                </a:solidFill>
-                <a:latin typeface="微软雅黑"/>
-                <a:ea typeface="微软雅黑"/>
-              </a:rPr>
-              <a:t>To G / To B</a:t>
-            </a:r>
-          </a:p>
-        </p:txBody>
-      </p:sp>
-      <p:sp>
-        <p:nvSpPr>
-          <p:cNvPr id="19" name="Rectangle 18"/>
+              <a:t>腾讯云初创扶持计划 +</a:t>
+            </a:r>
+          </a:p>
+          <a:p>
+            <a:pPr algn="l">
+              <a:lnSpc>
+                <a:spcPct val="110000"/>
+              </a:lnSpc>
+              <a:spcAft>
+                <a:spcPts val="500"/>
+              </a:spcAft>
+            </a:pPr>
+            <a:r>
+              <a:rPr sz="1250" b="0">
+                <a:solidFill>
+                  <a:srgbClr val="1A2638"/>
+                </a:solidFill>
+                <a:latin typeface="微软雅黑"/>
+                <a:ea typeface="微软雅黑"/>
+              </a:rPr>
+              <a:t>生态资源对接，</a:t>
+            </a:r>
+          </a:p>
+          <a:p>
+            <a:pPr algn="l">
+              <a:lnSpc>
+                <a:spcPct val="110000"/>
+              </a:lnSpc>
+              <a:spcAft>
+                <a:spcPts val="500"/>
+              </a:spcAft>
+            </a:pPr>
+            <a:r>
+              <a:rPr sz="1250" b="0">
+                <a:solidFill>
+                  <a:srgbClr val="1A2638"/>
+                </a:solidFill>
+                <a:latin typeface="微软雅黑"/>
+                <a:ea typeface="微软雅黑"/>
+              </a:rPr>
+              <a:t>技术背书提升招商力。</a:t>
+            </a:r>
+          </a:p>
+        </p:txBody>
+      </p:sp>
+      <p:sp>
+        <p:nvSpPr>
+          <p:cNvPr id="24" name="Rectangle 23"/>
           <p:cNvSpPr/>
           <p:nvPr/>
         </p:nvSpPr>
         <p:spPr>
           <a:xfrm>
-            <a:off x="9006840" y="1737360"/>
-            <a:ext cx="2606040" cy="2103120"/>
-          </a:xfrm>
-          <a:prstGeom prst="rect">
-            <a:avLst/>
-          </a:prstGeom>
-          <a:solidFill>
-            <a:srgbClr val="E8EEF6"/>
-          </a:solidFill>
-          <a:ln>
-            <a:noFill/>
-          </a:ln>
-          <a:effectLst/>
-        </p:spPr>
-        <p:style>
-          <a:lnRef idx="1">
-            <a:schemeClr val="accent1"/>
-          </a:lnRef>
-          <a:fillRef idx="3">
-            <a:schemeClr val="accent1"/>
-          </a:fillRef>
-          <a:effectRef idx="2">
-            <a:schemeClr val="accent1"/>
-          </a:effectRef>
-          <a:fontRef idx="minor">
-            <a:schemeClr val="lt1"/>
-          </a:fontRef>
-        </p:style>
-        <p:txBody>
-          <a:bodyPr rtlCol="0" anchor="ctr"/>
-          <a:lstStyle/>
-          <a:p>
-            <a:pPr algn="ctr"/>
-          </a:p>
-        </p:txBody>
-      </p:sp>
-      <p:sp>
-        <p:nvSpPr>
-          <p:cNvPr id="20" name="Rectangle 19"/>
-          <p:cNvSpPr/>
-          <p:nvPr/>
-        </p:nvSpPr>
-        <p:spPr>
-          <a:xfrm>
-            <a:off x="9006840" y="1737360"/>
-            <a:ext cx="2606040" cy="640080"/>
-          </a:xfrm>
-          <a:prstGeom prst="rect">
-            <a:avLst/>
-          </a:prstGeom>
-          <a:solidFill>
-            <a:srgbClr val="1B4F9C"/>
-          </a:solidFill>
-          <a:ln>
-            <a:noFill/>
-          </a:ln>
-          <a:effectLst/>
-        </p:spPr>
-        <p:style>
-          <a:lnRef idx="1">
-            <a:schemeClr val="accent1"/>
-          </a:lnRef>
-          <a:fillRef idx="3">
-            <a:schemeClr val="accent1"/>
-          </a:fillRef>
-          <a:effectRef idx="2">
-            <a:schemeClr val="accent1"/>
-          </a:effectRef>
-          <a:fontRef idx="minor">
-            <a:schemeClr val="lt1"/>
-          </a:fontRef>
-        </p:style>
-        <p:txBody>
-          <a:bodyPr rtlCol="0" anchor="ctr"/>
-          <a:lstStyle/>
-          <a:p>
-            <a:pPr algn="ctr"/>
-          </a:p>
-        </p:txBody>
-      </p:sp>
-      <p:sp>
-        <p:nvSpPr>
-          <p:cNvPr id="21" name="TextBox 20"/>
-          <p:cNvSpPr txBox="1"/>
-          <p:nvPr/>
-        </p:nvSpPr>
-        <p:spPr>
-          <a:xfrm>
-            <a:off x="9006840" y="1737360"/>
-            <a:ext cx="2606040" cy="640080"/>
-          </a:xfrm>
-          <a:prstGeom prst="rect">
-            <a:avLst/>
-          </a:prstGeom>
-          <a:noFill/>
-        </p:spPr>
-        <p:txBody>
-          <a:bodyPr wrap="square" anchor="ctr">
-            <a:spAutoFit/>
-          </a:bodyPr>
-          <a:lstStyle/>
-          <a:p>
-            <a:pPr algn="ctr">
-              <a:lnSpc>
-                <a:spcPct val="105000"/>
-              </a:lnSpc>
-              <a:spcAft>
-                <a:spcPts val="600"/>
-              </a:spcAft>
-            </a:pPr>
-            <a:r>
-              <a:rPr sz="1300" b="1">
-                <a:solidFill>
-                  <a:srgbClr val="FFFFFF"/>
-                </a:solidFill>
-                <a:latin typeface="微软雅黑"/>
-                <a:ea typeface="微软雅黑"/>
-              </a:rPr>
-              <a:t>IP 4</a:t>
-            </a:r>
-          </a:p>
-        </p:txBody>
-      </p:sp>
-      <p:sp>
-        <p:nvSpPr>
-          <p:cNvPr id="22" name="TextBox 21"/>
-          <p:cNvSpPr txBox="1"/>
-          <p:nvPr/>
-        </p:nvSpPr>
-        <p:spPr>
-          <a:xfrm>
-            <a:off x="9144000" y="2514600"/>
-            <a:ext cx="2331720" cy="1188720"/>
-          </a:xfrm>
-          <a:prstGeom prst="rect">
-            <a:avLst/>
-          </a:prstGeom>
-          <a:noFill/>
-        </p:spPr>
-        <p:txBody>
-          <a:bodyPr wrap="square" anchor="t">
-            <a:spAutoFit/>
-          </a:bodyPr>
-          <a:lstStyle/>
-          <a:p>
-            <a:pPr algn="ctr">
-              <a:lnSpc>
-                <a:spcPct val="105000"/>
-              </a:lnSpc>
-              <a:spcAft>
-                <a:spcPts val="600"/>
-              </a:spcAft>
-            </a:pPr>
-            <a:r>
-              <a:rPr sz="1700" b="1">
-                <a:solidFill>
-                  <a:srgbClr val="1A2638"/>
-                </a:solidFill>
-                <a:latin typeface="微软雅黑"/>
-                <a:ea typeface="微软雅黑"/>
-              </a:rPr>
-              <a:t>复旦 + 产业课程</a:t>
-            </a:r>
-          </a:p>
-          <a:p>
-            <a:pPr algn="ctr">
-              <a:lnSpc>
-                <a:spcPct val="105000"/>
-              </a:lnSpc>
-              <a:spcAft>
-                <a:spcPts val="600"/>
-              </a:spcAft>
-            </a:pPr>
-            <a:r>
-              <a:rPr sz="1300" b="0">
-                <a:solidFill>
-                  <a:srgbClr val="5B6B82"/>
-                </a:solidFill>
-                <a:latin typeface="微软雅黑"/>
-                <a:ea typeface="微软雅黑"/>
-              </a:rPr>
-              <a:t>收费 · 人才</a:t>
-            </a:r>
-          </a:p>
-        </p:txBody>
-      </p:sp>
-      <p:sp>
-        <p:nvSpPr>
-          <p:cNvPr id="23" name="Rectangle 22"/>
-          <p:cNvSpPr/>
-          <p:nvPr/>
-        </p:nvSpPr>
-        <p:spPr>
-          <a:xfrm>
-            <a:off x="502920" y="4206240"/>
-            <a:ext cx="11155680" cy="1920240"/>
+            <a:off x="502920" y="4526280"/>
+            <a:ext cx="11155680" cy="1691640"/>
           </a:xfrm>
           <a:prstGeom prst="rect">
             <a:avLst/>
@@ -13255,14 +15980,14 @@
       </p:sp>
       <p:sp>
         <p:nvSpPr>
-          <p:cNvPr id="24" name="Rectangle 23"/>
+          <p:cNvPr id="25" name="Rectangle 24"/>
           <p:cNvSpPr/>
           <p:nvPr/>
         </p:nvSpPr>
         <p:spPr>
           <a:xfrm>
-            <a:off x="502920" y="4206240"/>
-            <a:ext cx="146304" cy="1920240"/>
+            <a:off x="502920" y="4526280"/>
+            <a:ext cx="146304" cy="1691640"/>
           </a:xfrm>
           <a:prstGeom prst="rect">
             <a:avLst/>
@@ -13299,14 +16024,14 @@
       </p:sp>
       <p:sp>
         <p:nvSpPr>
-          <p:cNvPr id="25" name="TextBox 24"/>
+          <p:cNvPr id="26" name="TextBox 25"/>
           <p:cNvSpPr txBox="1"/>
           <p:nvPr/>
         </p:nvSpPr>
         <p:spPr>
           <a:xfrm>
-            <a:off x="914400" y="4434840"/>
-            <a:ext cx="10515600" cy="1463040"/>
+            <a:off x="914400" y="4709160"/>
+            <a:ext cx="10515600" cy="1371600"/>
           </a:xfrm>
           <a:prstGeom prst="rect">
             <a:avLst/>
@@ -13321,12 +16046,22 @@
           <a:p>
             <a:pPr algn="l">
               <a:lnSpc>
-                <a:spcPct val="105000"/>
-              </a:lnSpc>
-              <a:spcAft>
-                <a:spcPts val="1000"/>
-              </a:spcAft>
-            </a:pPr>
+                <a:spcPct val="108000"/>
+              </a:lnSpc>
+              <a:spcAft>
+                <a:spcPts val="600"/>
+              </a:spcAft>
+            </a:pPr>
+            <a:r>
+              <a:rPr sz="1600" b="1">
+                <a:solidFill>
+                  <a:srgbClr val="16B8C6"/>
+                </a:solidFill>
+                <a:latin typeface="微软雅黑"/>
+                <a:ea typeface="微软雅黑"/>
+              </a:rPr>
+              <a:t>战略意义：</a:t>
+            </a:r>
             <a:r>
               <a:rPr sz="1600" b="0">
                 <a:solidFill>
@@ -13335,27 +16070,47 @@
                 <a:latin typeface="微软雅黑"/>
                 <a:ea typeface="微软雅黑"/>
               </a:rPr>
-              <a:t>核心逻辑：空间 = 内容容器。固定 IP 活动持续制造流量、人气与签约线索，</a:t>
+              <a:t>算力是 OPC（AI 一人公司）的“水电煤”。</a:t>
             </a:r>
           </a:p>
           <a:p>
             <a:pPr algn="l">
               <a:lnSpc>
-                <a:spcPct val="105000"/>
-              </a:lnSpc>
-              <a:spcAft>
-                <a:spcPts val="1000"/>
-              </a:spcAft>
-            </a:pPr>
-            <a:r>
-              <a:rPr sz="1600" b="1">
+                <a:spcPct val="108000"/>
+              </a:lnSpc>
+              <a:spcAft>
+                <a:spcPts val="600"/>
+              </a:spcAft>
+            </a:pPr>
+            <a:r>
+              <a:rPr sz="1500" b="0">
+                <a:solidFill>
+                  <a:srgbClr val="E8EEF6"/>
+                </a:solidFill>
+                <a:latin typeface="微软雅黑"/>
+                <a:ea typeface="微软雅黑"/>
+              </a:rPr>
+              <a:t>腾讯云作底座，让“超级孵化器”能以极低成本批量孵化 OPC，把算力补贴转化为入驻黏性与招商利器，</a:t>
+            </a:r>
+          </a:p>
+          <a:p>
+            <a:pPr algn="l">
+              <a:lnSpc>
+                <a:spcPct val="108000"/>
+              </a:lnSpc>
+              <a:spcAft>
+                <a:spcPts val="600"/>
+              </a:spcAft>
+            </a:pPr>
+            <a:r>
+              <a:rPr sz="1500" b="1">
                 <a:solidFill>
                   <a:srgbClr val="F2B632"/>
                 </a:solidFill>
                 <a:latin typeface="微软雅黑"/>
                 <a:ea typeface="微软雅黑"/>
               </a:rPr>
-              <a:t>从根本上解决空置问题，并反哺招商与品牌溢价。</a:t>
+              <a:t>最终形成“算力 → 孵化 → 落地 → 集聚”的产业闭环。</a:t>
             </a:r>
           </a:p>
         </p:txBody>
@@ -13556,7 +16311,7 @@
                 <a:latin typeface="微软雅黑"/>
                 <a:ea typeface="微软雅黑"/>
               </a:rPr>
-              <a:t>GOVERNANCE · 合作阵型</a:t>
+              <a:t>CORE · 产业闭环</a:t>
             </a:r>
           </a:p>
           <a:p>
@@ -13576,7 +16331,7 @@
                 <a:latin typeface="微软雅黑"/>
                 <a:ea typeface="微软雅黑"/>
               </a:rPr>
-              <a:t>四方分工与协同机制</a:t>
+              <a:t>超级孵化器 · OPC 孵化生态闭环</a:t>
             </a:r>
           </a:p>
         </p:txBody>
@@ -13619,388 +16374,21 @@
                 <a:latin typeface="微软雅黑"/>
                 <a:ea typeface="微软雅黑"/>
               </a:rPr>
-              <a:t>07</a:t>
-            </a:r>
-          </a:p>
-        </p:txBody>
-      </p:sp>
-      <p:graphicFrame>
-        <p:nvGraphicFramePr>
-          <p:cNvPr id="7" name="Table 6"/>
-          <p:cNvGraphicFramePr>
-            <a:graphicFrameLocks noGrp="1"/>
-          </p:cNvGraphicFramePr>
-          <p:nvPr/>
-        </p:nvGraphicFramePr>
-        <p:xfrm>
-          <a:off x="502920" y="1417320"/>
-          <a:ext cx="11155680" cy="3657600"/>
-        </p:xfrm>
-        <a:graphic>
-          <a:graphicData uri="http://schemas.openxmlformats.org/drawingml/2006/table">
-            <a:tbl>
-              <a:tblPr firstRow="1" bandRow="1">
-                <a:tableStyleId>{5C22544A-7EE6-4342-B048-85BDC9FD1C3A}</a:tableStyleId>
-              </a:tblPr>
-              <a:tblGrid>
-                <a:gridCol w="3108960"/>
-                <a:gridCol w="3291840"/>
-                <a:gridCol w="4754880"/>
-              </a:tblGrid>
-              <a:tr h="731520">
-                <a:tc>
-                  <a:txBody>
-                    <a:bodyPr/>
-                    <a:lstStyle/>
-                    <a:p>
-                      <a:r>
-                        <a:rPr sz="1300" b="1">
-                          <a:solidFill>
-                            <a:srgbClr val="FFFFFF"/>
-                          </a:solidFill>
-                          <a:latin typeface="微软雅黑"/>
-                        </a:rPr>
-                        <a:t>组织方</a:t>
-                      </a:r>
-                    </a:p>
-                  </a:txBody>
-                  <a:tcPr anchor="ctr" marL="91440" marR="73152" marT="36576" marB="36576">
-                    <a:solidFill>
-                      <a:srgbClr val="0B1F3A"/>
-                    </a:solidFill>
-                  </a:tcPr>
-                </a:tc>
-                <a:tc>
-                  <a:txBody>
-                    <a:bodyPr/>
-                    <a:lstStyle/>
-                    <a:p>
-                      <a:r>
-                        <a:rPr sz="1300" b="1">
-                          <a:solidFill>
-                            <a:srgbClr val="FFFFFF"/>
-                          </a:solidFill>
-                          <a:latin typeface="微软雅黑"/>
-                        </a:rPr>
-                        <a:t>定位 / 核心职责</a:t>
-                      </a:r>
-                    </a:p>
-                  </a:txBody>
-                  <a:tcPr anchor="ctr" marL="91440" marR="73152" marT="36576" marB="36576">
-                    <a:solidFill>
-                      <a:srgbClr val="0B1F3A"/>
-                    </a:solidFill>
-                  </a:tcPr>
-                </a:tc>
-                <a:tc>
-                  <a:txBody>
-                    <a:bodyPr/>
-                    <a:lstStyle/>
-                    <a:p>
-                      <a:r>
-                        <a:rPr sz="1300" b="1">
-                          <a:solidFill>
-                            <a:srgbClr val="FFFFFF"/>
-                          </a:solidFill>
-                          <a:latin typeface="微软雅黑"/>
-                        </a:rPr>
-                        <a:t>落地抓手</a:t>
-                      </a:r>
-                    </a:p>
-                  </a:txBody>
-                  <a:tcPr anchor="ctr" marL="91440" marR="73152" marT="36576" marB="36576">
-                    <a:solidFill>
-                      <a:srgbClr val="0B1F3A"/>
-                    </a:solidFill>
-                  </a:tcPr>
-                </a:tc>
-              </a:tr>
-              <a:tr h="731520">
-                <a:tc>
-                  <a:txBody>
-                    <a:bodyPr/>
-                    <a:lstStyle/>
-                    <a:p>
-                      <a:r>
-                        <a:rPr sz="1250">
-                          <a:solidFill>
-                            <a:srgbClr val="1A2638"/>
-                          </a:solidFill>
-                          <a:latin typeface="微软雅黑"/>
-                        </a:rPr>
-                        <a:t>云计算创新基地 / 五角场创新创业学院</a:t>
-                      </a:r>
-                    </a:p>
-                  </a:txBody>
-                  <a:tcPr anchor="ctr" marL="91440" marR="73152" marT="36576" marB="36576">
-                    <a:solidFill>
-                      <a:srgbClr val="FFFFFF"/>
-                    </a:solidFill>
-                  </a:tcPr>
-                </a:tc>
-                <a:tc>
-                  <a:txBody>
-                    <a:bodyPr/>
-                    <a:lstStyle/>
-                    <a:p>
-                      <a:r>
-                        <a:rPr sz="1250">
-                          <a:solidFill>
-                            <a:srgbClr val="1A2638"/>
-                          </a:solidFill>
-                          <a:latin typeface="微软雅黑"/>
-                        </a:rPr>
-                        <a:t>产业原点 · 提供孵化体系与空间品牌</a:t>
-                      </a:r>
-                    </a:p>
-                  </a:txBody>
-                  <a:tcPr anchor="ctr" marL="91440" marR="73152" marT="36576" marB="36576">
-                    <a:solidFill>
-                      <a:srgbClr val="FFFFFF"/>
-                    </a:solidFill>
-                  </a:tcPr>
-                </a:tc>
-                <a:tc>
-                  <a:txBody>
-                    <a:bodyPr/>
-                    <a:lstStyle/>
-                    <a:p>
-                      <a:r>
-                        <a:rPr sz="1250">
-                          <a:solidFill>
-                            <a:srgbClr val="1A2638"/>
-                          </a:solidFill>
-                          <a:latin typeface="微软雅黑"/>
-                        </a:rPr>
-                        <a:t>产业准入标准、开放活动平台、输出运营管理模式</a:t>
-                      </a:r>
-                    </a:p>
-                  </a:txBody>
-                  <a:tcPr anchor="ctr" marL="91440" marR="73152" marT="36576" marB="36576">
-                    <a:solidFill>
-                      <a:srgbClr val="FFFFFF"/>
-                    </a:solidFill>
-                  </a:tcPr>
-                </a:tc>
-              </a:tr>
-              <a:tr h="731520">
-                <a:tc>
-                  <a:txBody>
-                    <a:bodyPr/>
-                    <a:lstStyle/>
-                    <a:p>
-                      <a:r>
-                        <a:rPr sz="1250">
-                          <a:solidFill>
-                            <a:srgbClr val="1A2638"/>
-                          </a:solidFill>
-                          <a:latin typeface="微软雅黑"/>
-                        </a:rPr>
-                        <a:t>复旦大学住房政策研究中心</a:t>
-                      </a:r>
-                    </a:p>
-                  </a:txBody>
-                  <a:tcPr anchor="ctr" marL="91440" marR="73152" marT="36576" marB="36576">
-                    <a:solidFill>
-                      <a:srgbClr val="EDF2F9"/>
-                    </a:solidFill>
-                  </a:tcPr>
-                </a:tc>
-                <a:tc>
-                  <a:txBody>
-                    <a:bodyPr/>
-                    <a:lstStyle/>
-                    <a:p>
-                      <a:r>
-                        <a:rPr sz="1250">
-                          <a:solidFill>
-                            <a:srgbClr val="1A2638"/>
-                          </a:solidFill>
-                          <a:latin typeface="微软雅黑"/>
-                        </a:rPr>
-                        <a:t>智库大脑 · 资产评估与政策支持</a:t>
-                      </a:r>
-                    </a:p>
-                  </a:txBody>
-                  <a:tcPr anchor="ctr" marL="91440" marR="73152" marT="36576" marB="36576">
-                    <a:solidFill>
-                      <a:srgbClr val="EDF2F9"/>
-                    </a:solidFill>
-                  </a:tcPr>
-                </a:tc>
-                <a:tc>
-                  <a:txBody>
-                    <a:bodyPr/>
-                    <a:lstStyle/>
-                    <a:p>
-                      <a:r>
-                        <a:rPr sz="1250">
-                          <a:solidFill>
-                            <a:srgbClr val="1A2638"/>
-                          </a:solidFill>
-                          <a:latin typeface="微软雅黑"/>
-                        </a:rPr>
-                        <a:t>物业改造可行性报告、城市更新补贴、人才公寓配套</a:t>
-                      </a:r>
-                    </a:p>
-                  </a:txBody>
-                  <a:tcPr anchor="ctr" marL="91440" marR="73152" marT="36576" marB="36576">
-                    <a:solidFill>
-                      <a:srgbClr val="EDF2F9"/>
-                    </a:solidFill>
-                  </a:tcPr>
-                </a:tc>
-              </a:tr>
-              <a:tr h="731520">
-                <a:tc>
-                  <a:txBody>
-                    <a:bodyPr/>
-                    <a:lstStyle/>
-                    <a:p>
-                      <a:r>
-                        <a:rPr sz="1250">
-                          <a:solidFill>
-                            <a:srgbClr val="1A2638"/>
-                          </a:solidFill>
-                          <a:latin typeface="微软雅黑"/>
-                        </a:rPr>
-                        <a:t>人工智能商业化落地组委会</a:t>
-                      </a:r>
-                    </a:p>
-                  </a:txBody>
-                  <a:tcPr anchor="ctr" marL="91440" marR="73152" marT="36576" marB="36576">
-                    <a:solidFill>
-                      <a:srgbClr val="FFFFFF"/>
-                    </a:solidFill>
-                  </a:tcPr>
-                </a:tc>
-                <a:tc>
-                  <a:txBody>
-                    <a:bodyPr/>
-                    <a:lstStyle/>
-                    <a:p>
-                      <a:r>
-                        <a:rPr sz="1250">
-                          <a:solidFill>
-                            <a:srgbClr val="1A2638"/>
-                          </a:solidFill>
-                          <a:latin typeface="微软雅黑"/>
-                        </a:rPr>
-                        <a:t>流量漏斗(技术) · AI 内容与投融资</a:t>
-                      </a:r>
-                    </a:p>
-                  </a:txBody>
-                  <a:tcPr anchor="ctr" marL="91440" marR="73152" marT="36576" marB="36576">
-                    <a:solidFill>
-                      <a:srgbClr val="FFFFFF"/>
-                    </a:solidFill>
-                  </a:tcPr>
-                </a:tc>
-                <a:tc>
-                  <a:txBody>
-                    <a:bodyPr/>
-                    <a:lstStyle/>
-                    <a:p>
-                      <a:r>
-                        <a:rPr sz="1250">
-                          <a:solidFill>
-                            <a:srgbClr val="1A2638"/>
-                          </a:solidFill>
-                          <a:latin typeface="微软雅黑"/>
-                        </a:rPr>
-                        <a:t>AI 场景对接会、优质企业筛选、商业化落地辅导</a:t>
-                      </a:r>
-                    </a:p>
-                  </a:txBody>
-                  <a:tcPr anchor="ctr" marL="91440" marR="73152" marT="36576" marB="36576">
-                    <a:solidFill>
-                      <a:srgbClr val="FFFFFF"/>
-                    </a:solidFill>
-                  </a:tcPr>
-                </a:tc>
-              </a:tr>
-              <a:tr h="731520">
-                <a:tc>
-                  <a:txBody>
-                    <a:bodyPr/>
-                    <a:lstStyle/>
-                    <a:p>
-                      <a:r>
-                        <a:rPr sz="1250">
-                          <a:solidFill>
-                            <a:srgbClr val="1A2638"/>
-                          </a:solidFill>
-                          <a:latin typeface="微软雅黑"/>
-                        </a:rPr>
-                        <a:t>杨浦区科技企业联合会</a:t>
-                      </a:r>
-                    </a:p>
-                  </a:txBody>
-                  <a:tcPr anchor="ctr" marL="91440" marR="73152" marT="36576" marB="36576">
-                    <a:solidFill>
-                      <a:srgbClr val="EDF2F9"/>
-                    </a:solidFill>
-                  </a:tcPr>
-                </a:tc>
-                <a:tc>
-                  <a:txBody>
-                    <a:bodyPr/>
-                    <a:lstStyle/>
-                    <a:p>
-                      <a:r>
-                        <a:rPr sz="1250">
-                          <a:solidFill>
-                            <a:srgbClr val="1A2638"/>
-                          </a:solidFill>
-                          <a:latin typeface="微软雅黑"/>
-                        </a:rPr>
-                        <a:t>流量漏斗(企业) · 招商渠道与跨区联动</a:t>
-                      </a:r>
-                    </a:p>
-                  </a:txBody>
-                  <a:tcPr anchor="ctr" marL="91440" marR="73152" marT="36576" marB="36576">
-                    <a:solidFill>
-                      <a:srgbClr val="EDF2F9"/>
-                    </a:solidFill>
-                  </a:tcPr>
-                </a:tc>
-                <a:tc>
-                  <a:txBody>
-                    <a:bodyPr/>
-                    <a:lstStyle/>
-                    <a:p>
-                      <a:r>
-                        <a:rPr sz="1250">
-                          <a:solidFill>
-                            <a:srgbClr val="1A2638"/>
-                          </a:solidFill>
-                          <a:latin typeface="微软雅黑"/>
-                        </a:rPr>
-                        <a:t>企业需求数据库、组织会员考察、对接各地商会</a:t>
-                      </a:r>
-                    </a:p>
-                  </a:txBody>
-                  <a:tcPr anchor="ctr" marL="91440" marR="73152" marT="36576" marB="36576">
-                    <a:solidFill>
-                      <a:srgbClr val="EDF2F9"/>
-                    </a:solidFill>
-                  </a:tcPr>
-                </a:tc>
-              </a:tr>
-            </a:tbl>
-          </a:graphicData>
-        </a:graphic>
-      </p:graphicFrame>
-      <p:sp>
-        <p:nvSpPr>
-          <p:cNvPr id="8" name="TextBox 7"/>
+              <a:t>★</a:t>
+            </a:r>
+          </a:p>
+        </p:txBody>
+      </p:sp>
+      <p:sp>
+        <p:nvSpPr>
+          <p:cNvPr id="7" name="TextBox 6"/>
           <p:cNvSpPr txBox="1"/>
           <p:nvPr/>
         </p:nvSpPr>
         <p:spPr>
           <a:xfrm>
-            <a:off x="502920" y="5303520"/>
-            <a:ext cx="11155680" cy="1097280"/>
+            <a:off x="502920" y="1298448"/>
+            <a:ext cx="11155680" cy="868680"/>
           </a:xfrm>
           <a:prstGeom prst="rect">
             <a:avLst/>
@@ -14015,6 +16403,147 @@
           <a:p>
             <a:pPr algn="l">
               <a:lnSpc>
+                <a:spcPct val="108000"/>
+              </a:lnSpc>
+              <a:spcAft>
+                <a:spcPts val="600"/>
+              </a:spcAft>
+            </a:pPr>
+            <a:r>
+              <a:rPr sz="1500" b="1">
+                <a:solidFill>
+                  <a:srgbClr val="1B4F9C"/>
+                </a:solidFill>
+                <a:latin typeface="微软雅黑"/>
+                <a:ea typeface="微软雅黑"/>
+              </a:rPr>
+              <a:t>OPC = AI 一人公司 / 超级个体：</a:t>
+            </a:r>
+            <a:r>
+              <a:rPr sz="1400" b="0">
+                <a:solidFill>
+                  <a:srgbClr val="5B6B82"/>
+                </a:solidFill>
+                <a:latin typeface="微软雅黑"/>
+                <a:ea typeface="微软雅黑"/>
+              </a:rPr>
+              <a:t>借助 AI 工作流，以极小团队完成过去整家公司的业务。五方联合「超级孵化器」批量孵化 OPC —— 这是生态的最小细胞，也是闭环的主角。</a:t>
+            </a:r>
+          </a:p>
+        </p:txBody>
+      </p:sp>
+      <p:sp>
+        <p:nvSpPr>
+          <p:cNvPr id="8" name="Rectangle 7"/>
+          <p:cNvSpPr/>
+          <p:nvPr/>
+        </p:nvSpPr>
+        <p:spPr>
+          <a:xfrm>
+            <a:off x="502920" y="2331720"/>
+            <a:ext cx="2514600" cy="2331720"/>
+          </a:xfrm>
+          <a:prstGeom prst="rect">
+            <a:avLst/>
+          </a:prstGeom>
+          <a:solidFill>
+            <a:srgbClr val="E8EEF6"/>
+          </a:solidFill>
+          <a:ln>
+            <a:noFill/>
+          </a:ln>
+          <a:effectLst/>
+        </p:spPr>
+        <p:style>
+          <a:lnRef idx="1">
+            <a:schemeClr val="accent1"/>
+          </a:lnRef>
+          <a:fillRef idx="3">
+            <a:schemeClr val="accent1"/>
+          </a:fillRef>
+          <a:effectRef idx="2">
+            <a:schemeClr val="accent1"/>
+          </a:effectRef>
+          <a:fontRef idx="minor">
+            <a:schemeClr val="lt1"/>
+          </a:fontRef>
+        </p:style>
+        <p:txBody>
+          <a:bodyPr rtlCol="0" anchor="ctr"/>
+          <a:lstStyle/>
+          <a:p>
+            <a:pPr algn="ctr"/>
+          </a:p>
+        </p:txBody>
+      </p:sp>
+      <p:sp>
+        <p:nvSpPr>
+          <p:cNvPr id="9" name="Rectangle 8"/>
+          <p:cNvSpPr/>
+          <p:nvPr/>
+        </p:nvSpPr>
+        <p:spPr>
+          <a:xfrm>
+            <a:off x="502920" y="2331720"/>
+            <a:ext cx="2514600" cy="868680"/>
+          </a:xfrm>
+          <a:prstGeom prst="rect">
+            <a:avLst/>
+          </a:prstGeom>
+          <a:solidFill>
+            <a:srgbClr val="1B4F9C"/>
+          </a:solidFill>
+          <a:ln>
+            <a:noFill/>
+          </a:ln>
+          <a:effectLst/>
+        </p:spPr>
+        <p:style>
+          <a:lnRef idx="1">
+            <a:schemeClr val="accent1"/>
+          </a:lnRef>
+          <a:fillRef idx="3">
+            <a:schemeClr val="accent1"/>
+          </a:fillRef>
+          <a:effectRef idx="2">
+            <a:schemeClr val="accent1"/>
+          </a:effectRef>
+          <a:fontRef idx="minor">
+            <a:schemeClr val="lt1"/>
+          </a:fontRef>
+        </p:style>
+        <p:txBody>
+          <a:bodyPr rtlCol="0" anchor="ctr"/>
+          <a:lstStyle/>
+          <a:p>
+            <a:pPr algn="ctr"/>
+          </a:p>
+        </p:txBody>
+      </p:sp>
+      <p:sp>
+        <p:nvSpPr>
+          <p:cNvPr id="10" name="TextBox 9"/>
+          <p:cNvSpPr txBox="1"/>
+          <p:nvPr/>
+        </p:nvSpPr>
+        <p:spPr>
+          <a:xfrm>
+            <a:off x="502920" y="2331720"/>
+            <a:ext cx="2514600" cy="457200"/>
+          </a:xfrm>
+          <a:prstGeom prst="rect">
+            <a:avLst/>
+          </a:prstGeom>
+          <a:noFill/>
+        </p:spPr>
+        <p:txBody>
+          <a:bodyPr wrap="square" anchor="ctr">
+            <a:spAutoFit/>
+          </a:bodyPr>
+          <a:lstStyle/>
+          <a:p>
+            <a:pPr algn="ctr">
+              <a:lnSpc>
                 <a:spcPct val="105000"/>
               </a:lnSpc>
               <a:spcAft>
@@ -14024,22 +16553,1122 @@
             <a:r>
               <a:rPr sz="1400" b="1">
                 <a:solidFill>
-                  <a:srgbClr val="1B4F9C"/>
-                </a:solidFill>
-                <a:latin typeface="微软雅黑"/>
-                <a:ea typeface="微软雅黑"/>
-              </a:rPr>
-              <a:t>协同机制：</a:t>
-            </a:r>
-            <a:r>
-              <a:rPr sz="1400" b="0">
-                <a:solidFill>
-                  <a:srgbClr val="5B6B82"/>
-                </a:solidFill>
-                <a:latin typeface="微软雅黑"/>
-                <a:ea typeface="微软雅黑"/>
-              </a:rPr>
-              <a:t>四方联席工作组（每月对齐）· 资源共享清单 · 战略合作备忘录（明确佣金与运营分成比例）。</a:t>
+                  <a:srgbClr val="FFFFFF"/>
+                </a:solidFill>
+                <a:latin typeface="微软雅黑"/>
+                <a:ea typeface="微软雅黑"/>
+              </a:rPr>
+              <a:t>1 · 选育</a:t>
+            </a:r>
+          </a:p>
+        </p:txBody>
+      </p:sp>
+      <p:sp>
+        <p:nvSpPr>
+          <p:cNvPr id="11" name="TextBox 10"/>
+          <p:cNvSpPr txBox="1"/>
+          <p:nvPr/>
+        </p:nvSpPr>
+        <p:spPr>
+          <a:xfrm>
+            <a:off x="502920" y="2743200"/>
+            <a:ext cx="2514600" cy="457200"/>
+          </a:xfrm>
+          <a:prstGeom prst="rect">
+            <a:avLst/>
+          </a:prstGeom>
+          <a:noFill/>
+        </p:spPr>
+        <p:txBody>
+          <a:bodyPr wrap="square" anchor="ctr">
+            <a:spAutoFit/>
+          </a:bodyPr>
+          <a:lstStyle/>
+          <a:p>
+            <a:pPr algn="ctr">
+              <a:lnSpc>
+                <a:spcPct val="105000"/>
+              </a:lnSpc>
+              <a:spcAft>
+                <a:spcPts val="600"/>
+              </a:spcAft>
+            </a:pPr>
+            <a:r>
+              <a:rPr sz="1600" b="1">
+                <a:solidFill>
+                  <a:srgbClr val="FFFFFF"/>
+                </a:solidFill>
+                <a:latin typeface="微软雅黑"/>
+                <a:ea typeface="微软雅黑"/>
+              </a:rPr>
+              <a:t>AI 切磋者大会</a:t>
+            </a:r>
+          </a:p>
+        </p:txBody>
+      </p:sp>
+      <p:sp>
+        <p:nvSpPr>
+          <p:cNvPr id="12" name="TextBox 11"/>
+          <p:cNvSpPr txBox="1"/>
+          <p:nvPr/>
+        </p:nvSpPr>
+        <p:spPr>
+          <a:xfrm>
+            <a:off x="649224" y="3337560"/>
+            <a:ext cx="2240280" cy="1280160"/>
+          </a:xfrm>
+          <a:prstGeom prst="rect">
+            <a:avLst/>
+          </a:prstGeom>
+          <a:noFill/>
+        </p:spPr>
+        <p:txBody>
+          <a:bodyPr wrap="square" anchor="t">
+            <a:spAutoFit/>
+          </a:bodyPr>
+          <a:lstStyle/>
+          <a:p>
+            <a:pPr algn="l">
+              <a:lnSpc>
+                <a:spcPct val="105000"/>
+              </a:lnSpc>
+              <a:spcAft>
+                <a:spcPts val="400"/>
+              </a:spcAft>
+            </a:pPr>
+            <a:r>
+              <a:rPr sz="1150" b="0">
+                <a:solidFill>
+                  <a:srgbClr val="1A2638"/>
+                </a:solidFill>
+                <a:latin typeface="微软雅黑"/>
+                <a:ea typeface="微软雅黑"/>
+              </a:rPr>
+              <a:t>海选 / 比武发现优质 OPC 与项目</a:t>
+            </a:r>
+          </a:p>
+          <a:p>
+            <a:pPr algn="l">
+              <a:lnSpc>
+                <a:spcPct val="105000"/>
+              </a:lnSpc>
+              <a:spcAft>
+                <a:spcPts val="400"/>
+              </a:spcAft>
+            </a:pPr>
+            <a:r>
+              <a:rPr sz="1150" b="0">
+                <a:solidFill>
+                  <a:srgbClr val="1A2638"/>
+                </a:solidFill>
+                <a:latin typeface="微软雅黑"/>
+                <a:ea typeface="微软雅黑"/>
+              </a:rPr>
+              <a:t>组委会 + 联合会输送种子</a:t>
+            </a:r>
+          </a:p>
+        </p:txBody>
+      </p:sp>
+      <p:sp>
+        <p:nvSpPr>
+          <p:cNvPr id="13" name="Chevron 12"/>
+          <p:cNvSpPr/>
+          <p:nvPr/>
+        </p:nvSpPr>
+        <p:spPr>
+          <a:xfrm>
+            <a:off x="3044952" y="3154680"/>
+            <a:ext cx="201168" cy="640080"/>
+          </a:xfrm>
+          <a:prstGeom prst="chevron">
+            <a:avLst/>
+          </a:prstGeom>
+          <a:solidFill>
+            <a:srgbClr val="16B8C6"/>
+          </a:solidFill>
+          <a:ln>
+            <a:noFill/>
+          </a:ln>
+          <a:effectLst/>
+        </p:spPr>
+        <p:style>
+          <a:lnRef idx="1">
+            <a:schemeClr val="accent1"/>
+          </a:lnRef>
+          <a:fillRef idx="3">
+            <a:schemeClr val="accent1"/>
+          </a:fillRef>
+          <a:effectRef idx="2">
+            <a:schemeClr val="accent1"/>
+          </a:effectRef>
+          <a:fontRef idx="minor">
+            <a:schemeClr val="lt1"/>
+          </a:fontRef>
+        </p:style>
+        <p:txBody>
+          <a:bodyPr rtlCol="0" anchor="ctr"/>
+          <a:lstStyle/>
+          <a:p>
+            <a:pPr algn="ctr"/>
+          </a:p>
+        </p:txBody>
+      </p:sp>
+      <p:sp>
+        <p:nvSpPr>
+          <p:cNvPr id="14" name="Rectangle 13"/>
+          <p:cNvSpPr/>
+          <p:nvPr/>
+        </p:nvSpPr>
+        <p:spPr>
+          <a:xfrm>
+            <a:off x="3264408" y="2331720"/>
+            <a:ext cx="2514600" cy="2331720"/>
+          </a:xfrm>
+          <a:prstGeom prst="rect">
+            <a:avLst/>
+          </a:prstGeom>
+          <a:solidFill>
+            <a:srgbClr val="E8EEF6"/>
+          </a:solidFill>
+          <a:ln>
+            <a:noFill/>
+          </a:ln>
+          <a:effectLst/>
+        </p:spPr>
+        <p:style>
+          <a:lnRef idx="1">
+            <a:schemeClr val="accent1"/>
+          </a:lnRef>
+          <a:fillRef idx="3">
+            <a:schemeClr val="accent1"/>
+          </a:fillRef>
+          <a:effectRef idx="2">
+            <a:schemeClr val="accent1"/>
+          </a:effectRef>
+          <a:fontRef idx="minor">
+            <a:schemeClr val="lt1"/>
+          </a:fontRef>
+        </p:style>
+        <p:txBody>
+          <a:bodyPr rtlCol="0" anchor="ctr"/>
+          <a:lstStyle/>
+          <a:p>
+            <a:pPr algn="ctr"/>
+          </a:p>
+        </p:txBody>
+      </p:sp>
+      <p:sp>
+        <p:nvSpPr>
+          <p:cNvPr id="15" name="Rectangle 14"/>
+          <p:cNvSpPr/>
+          <p:nvPr/>
+        </p:nvSpPr>
+        <p:spPr>
+          <a:xfrm>
+            <a:off x="3264408" y="2331720"/>
+            <a:ext cx="2514600" cy="868680"/>
+          </a:xfrm>
+          <a:prstGeom prst="rect">
+            <a:avLst/>
+          </a:prstGeom>
+          <a:solidFill>
+            <a:srgbClr val="16B8C6"/>
+          </a:solidFill>
+          <a:ln>
+            <a:noFill/>
+          </a:ln>
+          <a:effectLst/>
+        </p:spPr>
+        <p:style>
+          <a:lnRef idx="1">
+            <a:schemeClr val="accent1"/>
+          </a:lnRef>
+          <a:fillRef idx="3">
+            <a:schemeClr val="accent1"/>
+          </a:fillRef>
+          <a:effectRef idx="2">
+            <a:schemeClr val="accent1"/>
+          </a:effectRef>
+          <a:fontRef idx="minor">
+            <a:schemeClr val="lt1"/>
+          </a:fontRef>
+        </p:style>
+        <p:txBody>
+          <a:bodyPr rtlCol="0" anchor="ctr"/>
+          <a:lstStyle/>
+          <a:p>
+            <a:pPr algn="ctr"/>
+          </a:p>
+        </p:txBody>
+      </p:sp>
+      <p:sp>
+        <p:nvSpPr>
+          <p:cNvPr id="16" name="TextBox 15"/>
+          <p:cNvSpPr txBox="1"/>
+          <p:nvPr/>
+        </p:nvSpPr>
+        <p:spPr>
+          <a:xfrm>
+            <a:off x="3264408" y="2331720"/>
+            <a:ext cx="2514600" cy="457200"/>
+          </a:xfrm>
+          <a:prstGeom prst="rect">
+            <a:avLst/>
+          </a:prstGeom>
+          <a:noFill/>
+        </p:spPr>
+        <p:txBody>
+          <a:bodyPr wrap="square" anchor="ctr">
+            <a:spAutoFit/>
+          </a:bodyPr>
+          <a:lstStyle/>
+          <a:p>
+            <a:pPr algn="ctr">
+              <a:lnSpc>
+                <a:spcPct val="105000"/>
+              </a:lnSpc>
+              <a:spcAft>
+                <a:spcPts val="600"/>
+              </a:spcAft>
+            </a:pPr>
+            <a:r>
+              <a:rPr sz="1400" b="1">
+                <a:solidFill>
+                  <a:srgbClr val="FFFFFF"/>
+                </a:solidFill>
+                <a:latin typeface="微软雅黑"/>
+                <a:ea typeface="微软雅黑"/>
+              </a:rPr>
+              <a:t>2 · 赋能</a:t>
+            </a:r>
+          </a:p>
+        </p:txBody>
+      </p:sp>
+      <p:sp>
+        <p:nvSpPr>
+          <p:cNvPr id="17" name="TextBox 16"/>
+          <p:cNvSpPr txBox="1"/>
+          <p:nvPr/>
+        </p:nvSpPr>
+        <p:spPr>
+          <a:xfrm>
+            <a:off x="3264408" y="2743200"/>
+            <a:ext cx="2514600" cy="457200"/>
+          </a:xfrm>
+          <a:prstGeom prst="rect">
+            <a:avLst/>
+          </a:prstGeom>
+          <a:noFill/>
+        </p:spPr>
+        <p:txBody>
+          <a:bodyPr wrap="square" anchor="ctr">
+            <a:spAutoFit/>
+          </a:bodyPr>
+          <a:lstStyle/>
+          <a:p>
+            <a:pPr algn="ctr">
+              <a:lnSpc>
+                <a:spcPct val="105000"/>
+              </a:lnSpc>
+              <a:spcAft>
+                <a:spcPts val="600"/>
+              </a:spcAft>
+            </a:pPr>
+            <a:r>
+              <a:rPr sz="1600" b="1">
+                <a:solidFill>
+                  <a:srgbClr val="FFFFFF"/>
+                </a:solidFill>
+                <a:latin typeface="微软雅黑"/>
+                <a:ea typeface="微软雅黑"/>
+              </a:rPr>
+              <a:t>超级孵化器</a:t>
+            </a:r>
+          </a:p>
+        </p:txBody>
+      </p:sp>
+      <p:sp>
+        <p:nvSpPr>
+          <p:cNvPr id="18" name="TextBox 17"/>
+          <p:cNvSpPr txBox="1"/>
+          <p:nvPr/>
+        </p:nvSpPr>
+        <p:spPr>
+          <a:xfrm>
+            <a:off x="3410712" y="3337560"/>
+            <a:ext cx="2240280" cy="1280160"/>
+          </a:xfrm>
+          <a:prstGeom prst="rect">
+            <a:avLst/>
+          </a:prstGeom>
+          <a:noFill/>
+        </p:spPr>
+        <p:txBody>
+          <a:bodyPr wrap="square" anchor="t">
+            <a:spAutoFit/>
+          </a:bodyPr>
+          <a:lstStyle/>
+          <a:p>
+            <a:pPr algn="l">
+              <a:lnSpc>
+                <a:spcPct val="105000"/>
+              </a:lnSpc>
+              <a:spcAft>
+                <a:spcPts val="400"/>
+              </a:spcAft>
+            </a:pPr>
+            <a:r>
+              <a:rPr sz="1150" b="0">
+                <a:solidFill>
+                  <a:srgbClr val="1A2638"/>
+                </a:solidFill>
+                <a:latin typeface="微软雅黑"/>
+                <a:ea typeface="微软雅黑"/>
+              </a:rPr>
+              <a:t>腾讯云算力补贴 + AI 工作流导入</a:t>
+            </a:r>
+          </a:p>
+          <a:p>
+            <a:pPr algn="l">
+              <a:lnSpc>
+                <a:spcPct val="105000"/>
+              </a:lnSpc>
+              <a:spcAft>
+                <a:spcPts val="400"/>
+              </a:spcAft>
+            </a:pPr>
+            <a:r>
+              <a:rPr sz="1150" b="0">
+                <a:solidFill>
+                  <a:srgbClr val="1A2638"/>
+                </a:solidFill>
+                <a:latin typeface="微软雅黑"/>
+                <a:ea typeface="微软雅黑"/>
+              </a:rPr>
+              <a:t>复旦课程 / 导师 / 政策</a:t>
+            </a:r>
+          </a:p>
+        </p:txBody>
+      </p:sp>
+      <p:sp>
+        <p:nvSpPr>
+          <p:cNvPr id="19" name="Chevron 18"/>
+          <p:cNvSpPr/>
+          <p:nvPr/>
+        </p:nvSpPr>
+        <p:spPr>
+          <a:xfrm>
+            <a:off x="5806440" y="3154680"/>
+            <a:ext cx="201168" cy="640080"/>
+          </a:xfrm>
+          <a:prstGeom prst="chevron">
+            <a:avLst/>
+          </a:prstGeom>
+          <a:solidFill>
+            <a:srgbClr val="16B8C6"/>
+          </a:solidFill>
+          <a:ln>
+            <a:noFill/>
+          </a:ln>
+          <a:effectLst/>
+        </p:spPr>
+        <p:style>
+          <a:lnRef idx="1">
+            <a:schemeClr val="accent1"/>
+          </a:lnRef>
+          <a:fillRef idx="3">
+            <a:schemeClr val="accent1"/>
+          </a:fillRef>
+          <a:effectRef idx="2">
+            <a:schemeClr val="accent1"/>
+          </a:effectRef>
+          <a:fontRef idx="minor">
+            <a:schemeClr val="lt1"/>
+          </a:fontRef>
+        </p:style>
+        <p:txBody>
+          <a:bodyPr rtlCol="0" anchor="ctr"/>
+          <a:lstStyle/>
+          <a:p>
+            <a:pPr algn="ctr"/>
+          </a:p>
+        </p:txBody>
+      </p:sp>
+      <p:sp>
+        <p:nvSpPr>
+          <p:cNvPr id="20" name="Rectangle 19"/>
+          <p:cNvSpPr/>
+          <p:nvPr/>
+        </p:nvSpPr>
+        <p:spPr>
+          <a:xfrm>
+            <a:off x="6025896" y="2331720"/>
+            <a:ext cx="2514600" cy="2331720"/>
+          </a:xfrm>
+          <a:prstGeom prst="rect">
+            <a:avLst/>
+          </a:prstGeom>
+          <a:solidFill>
+            <a:srgbClr val="E8EEF6"/>
+          </a:solidFill>
+          <a:ln>
+            <a:noFill/>
+          </a:ln>
+          <a:effectLst/>
+        </p:spPr>
+        <p:style>
+          <a:lnRef idx="1">
+            <a:schemeClr val="accent1"/>
+          </a:lnRef>
+          <a:fillRef idx="3">
+            <a:schemeClr val="accent1"/>
+          </a:fillRef>
+          <a:effectRef idx="2">
+            <a:schemeClr val="accent1"/>
+          </a:effectRef>
+          <a:fontRef idx="minor">
+            <a:schemeClr val="lt1"/>
+          </a:fontRef>
+        </p:style>
+        <p:txBody>
+          <a:bodyPr rtlCol="0" anchor="ctr"/>
+          <a:lstStyle/>
+          <a:p>
+            <a:pPr algn="ctr"/>
+          </a:p>
+        </p:txBody>
+      </p:sp>
+      <p:sp>
+        <p:nvSpPr>
+          <p:cNvPr id="21" name="Rectangle 20"/>
+          <p:cNvSpPr/>
+          <p:nvPr/>
+        </p:nvSpPr>
+        <p:spPr>
+          <a:xfrm>
+            <a:off x="6025896" y="2331720"/>
+            <a:ext cx="2514600" cy="868680"/>
+          </a:xfrm>
+          <a:prstGeom prst="rect">
+            <a:avLst/>
+          </a:prstGeom>
+          <a:solidFill>
+            <a:srgbClr val="F2B632"/>
+          </a:solidFill>
+          <a:ln>
+            <a:noFill/>
+          </a:ln>
+          <a:effectLst/>
+        </p:spPr>
+        <p:style>
+          <a:lnRef idx="1">
+            <a:schemeClr val="accent1"/>
+          </a:lnRef>
+          <a:fillRef idx="3">
+            <a:schemeClr val="accent1"/>
+          </a:fillRef>
+          <a:effectRef idx="2">
+            <a:schemeClr val="accent1"/>
+          </a:effectRef>
+          <a:fontRef idx="minor">
+            <a:schemeClr val="lt1"/>
+          </a:fontRef>
+        </p:style>
+        <p:txBody>
+          <a:bodyPr rtlCol="0" anchor="ctr"/>
+          <a:lstStyle/>
+          <a:p>
+            <a:pPr algn="ctr"/>
+          </a:p>
+        </p:txBody>
+      </p:sp>
+      <p:sp>
+        <p:nvSpPr>
+          <p:cNvPr id="22" name="TextBox 21"/>
+          <p:cNvSpPr txBox="1"/>
+          <p:nvPr/>
+        </p:nvSpPr>
+        <p:spPr>
+          <a:xfrm>
+            <a:off x="6025896" y="2331720"/>
+            <a:ext cx="2514600" cy="457200"/>
+          </a:xfrm>
+          <a:prstGeom prst="rect">
+            <a:avLst/>
+          </a:prstGeom>
+          <a:noFill/>
+        </p:spPr>
+        <p:txBody>
+          <a:bodyPr wrap="square" anchor="ctr">
+            <a:spAutoFit/>
+          </a:bodyPr>
+          <a:lstStyle/>
+          <a:p>
+            <a:pPr algn="ctr">
+              <a:lnSpc>
+                <a:spcPct val="105000"/>
+              </a:lnSpc>
+              <a:spcAft>
+                <a:spcPts val="600"/>
+              </a:spcAft>
+            </a:pPr>
+            <a:r>
+              <a:rPr sz="1400" b="1">
+                <a:solidFill>
+                  <a:srgbClr val="0B1F3A"/>
+                </a:solidFill>
+                <a:latin typeface="微软雅黑"/>
+                <a:ea typeface="微软雅黑"/>
+              </a:rPr>
+              <a:t>3 · 落地</a:t>
+            </a:r>
+          </a:p>
+        </p:txBody>
+      </p:sp>
+      <p:sp>
+        <p:nvSpPr>
+          <p:cNvPr id="23" name="TextBox 22"/>
+          <p:cNvSpPr txBox="1"/>
+          <p:nvPr/>
+        </p:nvSpPr>
+        <p:spPr>
+          <a:xfrm>
+            <a:off x="6025896" y="2743200"/>
+            <a:ext cx="2514600" cy="457200"/>
+          </a:xfrm>
+          <a:prstGeom prst="rect">
+            <a:avLst/>
+          </a:prstGeom>
+          <a:noFill/>
+        </p:spPr>
+        <p:txBody>
+          <a:bodyPr wrap="square" anchor="ctr">
+            <a:spAutoFit/>
+          </a:bodyPr>
+          <a:lstStyle/>
+          <a:p>
+            <a:pPr algn="ctr">
+              <a:lnSpc>
+                <a:spcPct val="105000"/>
+              </a:lnSpc>
+              <a:spcAft>
+                <a:spcPts val="600"/>
+              </a:spcAft>
+            </a:pPr>
+            <a:r>
+              <a:rPr sz="1600" b="1">
+                <a:solidFill>
+                  <a:srgbClr val="0B1F3A"/>
+                </a:solidFill>
+                <a:latin typeface="微软雅黑"/>
+                <a:ea typeface="微软雅黑"/>
+              </a:rPr>
+              <a:t>推动 AI 落地</a:t>
+            </a:r>
+          </a:p>
+        </p:txBody>
+      </p:sp>
+      <p:sp>
+        <p:nvSpPr>
+          <p:cNvPr id="24" name="TextBox 23"/>
+          <p:cNvSpPr txBox="1"/>
+          <p:nvPr/>
+        </p:nvSpPr>
+        <p:spPr>
+          <a:xfrm>
+            <a:off x="6172200" y="3337560"/>
+            <a:ext cx="2240280" cy="1280160"/>
+          </a:xfrm>
+          <a:prstGeom prst="rect">
+            <a:avLst/>
+          </a:prstGeom>
+          <a:noFill/>
+        </p:spPr>
+        <p:txBody>
+          <a:bodyPr wrap="square" anchor="t">
+            <a:spAutoFit/>
+          </a:bodyPr>
+          <a:lstStyle/>
+          <a:p>
+            <a:pPr algn="l">
+              <a:lnSpc>
+                <a:spcPct val="105000"/>
+              </a:lnSpc>
+              <a:spcAft>
+                <a:spcPts val="400"/>
+              </a:spcAft>
+            </a:pPr>
+            <a:r>
+              <a:rPr sz="1150" b="0">
+                <a:solidFill>
+                  <a:srgbClr val="1A2638"/>
+                </a:solidFill>
+                <a:latin typeface="微软雅黑"/>
+                <a:ea typeface="微软雅黑"/>
+              </a:rPr>
+              <a:t>Demo City 真实场景验证</a:t>
+            </a:r>
+          </a:p>
+          <a:p>
+            <a:pPr algn="l">
+              <a:lnSpc>
+                <a:spcPct val="105000"/>
+              </a:lnSpc>
+              <a:spcAft>
+                <a:spcPts val="400"/>
+              </a:spcAft>
+            </a:pPr>
+            <a:r>
+              <a:rPr sz="1150" b="0">
+                <a:solidFill>
+                  <a:srgbClr val="1A2638"/>
+                </a:solidFill>
+                <a:latin typeface="微软雅黑"/>
+                <a:ea typeface="微软雅黑"/>
+              </a:rPr>
+              <a:t>联合会企业订单 + 投融资对接</a:t>
+            </a:r>
+          </a:p>
+        </p:txBody>
+      </p:sp>
+      <p:sp>
+        <p:nvSpPr>
+          <p:cNvPr id="25" name="Chevron 24"/>
+          <p:cNvSpPr/>
+          <p:nvPr/>
+        </p:nvSpPr>
+        <p:spPr>
+          <a:xfrm>
+            <a:off x="8567928" y="3154680"/>
+            <a:ext cx="201168" cy="640080"/>
+          </a:xfrm>
+          <a:prstGeom prst="chevron">
+            <a:avLst/>
+          </a:prstGeom>
+          <a:solidFill>
+            <a:srgbClr val="16B8C6"/>
+          </a:solidFill>
+          <a:ln>
+            <a:noFill/>
+          </a:ln>
+          <a:effectLst/>
+        </p:spPr>
+        <p:style>
+          <a:lnRef idx="1">
+            <a:schemeClr val="accent1"/>
+          </a:lnRef>
+          <a:fillRef idx="3">
+            <a:schemeClr val="accent1"/>
+          </a:fillRef>
+          <a:effectRef idx="2">
+            <a:schemeClr val="accent1"/>
+          </a:effectRef>
+          <a:fontRef idx="minor">
+            <a:schemeClr val="lt1"/>
+          </a:fontRef>
+        </p:style>
+        <p:txBody>
+          <a:bodyPr rtlCol="0" anchor="ctr"/>
+          <a:lstStyle/>
+          <a:p>
+            <a:pPr algn="ctr"/>
+          </a:p>
+        </p:txBody>
+      </p:sp>
+      <p:sp>
+        <p:nvSpPr>
+          <p:cNvPr id="26" name="Rectangle 25"/>
+          <p:cNvSpPr/>
+          <p:nvPr/>
+        </p:nvSpPr>
+        <p:spPr>
+          <a:xfrm>
+            <a:off x="8787384" y="2331720"/>
+            <a:ext cx="2514600" cy="2331720"/>
+          </a:xfrm>
+          <a:prstGeom prst="rect">
+            <a:avLst/>
+          </a:prstGeom>
+          <a:solidFill>
+            <a:srgbClr val="E8EEF6"/>
+          </a:solidFill>
+          <a:ln>
+            <a:noFill/>
+          </a:ln>
+          <a:effectLst/>
+        </p:spPr>
+        <p:style>
+          <a:lnRef idx="1">
+            <a:schemeClr val="accent1"/>
+          </a:lnRef>
+          <a:fillRef idx="3">
+            <a:schemeClr val="accent1"/>
+          </a:fillRef>
+          <a:effectRef idx="2">
+            <a:schemeClr val="accent1"/>
+          </a:effectRef>
+          <a:fontRef idx="minor">
+            <a:schemeClr val="lt1"/>
+          </a:fontRef>
+        </p:style>
+        <p:txBody>
+          <a:bodyPr rtlCol="0" anchor="ctr"/>
+          <a:lstStyle/>
+          <a:p>
+            <a:pPr algn="ctr"/>
+          </a:p>
+        </p:txBody>
+      </p:sp>
+      <p:sp>
+        <p:nvSpPr>
+          <p:cNvPr id="27" name="Rectangle 26"/>
+          <p:cNvSpPr/>
+          <p:nvPr/>
+        </p:nvSpPr>
+        <p:spPr>
+          <a:xfrm>
+            <a:off x="8787384" y="2331720"/>
+            <a:ext cx="2514600" cy="868680"/>
+          </a:xfrm>
+          <a:prstGeom prst="rect">
+            <a:avLst/>
+          </a:prstGeom>
+          <a:solidFill>
+            <a:srgbClr val="1B4F9C"/>
+          </a:solidFill>
+          <a:ln>
+            <a:noFill/>
+          </a:ln>
+          <a:effectLst/>
+        </p:spPr>
+        <p:style>
+          <a:lnRef idx="1">
+            <a:schemeClr val="accent1"/>
+          </a:lnRef>
+          <a:fillRef idx="3">
+            <a:schemeClr val="accent1"/>
+          </a:fillRef>
+          <a:effectRef idx="2">
+            <a:schemeClr val="accent1"/>
+          </a:effectRef>
+          <a:fontRef idx="minor">
+            <a:schemeClr val="lt1"/>
+          </a:fontRef>
+        </p:style>
+        <p:txBody>
+          <a:bodyPr rtlCol="0" anchor="ctr"/>
+          <a:lstStyle/>
+          <a:p>
+            <a:pPr algn="ctr"/>
+          </a:p>
+        </p:txBody>
+      </p:sp>
+      <p:sp>
+        <p:nvSpPr>
+          <p:cNvPr id="28" name="TextBox 27"/>
+          <p:cNvSpPr txBox="1"/>
+          <p:nvPr/>
+        </p:nvSpPr>
+        <p:spPr>
+          <a:xfrm>
+            <a:off x="8787384" y="2331720"/>
+            <a:ext cx="2514600" cy="457200"/>
+          </a:xfrm>
+          <a:prstGeom prst="rect">
+            <a:avLst/>
+          </a:prstGeom>
+          <a:noFill/>
+        </p:spPr>
+        <p:txBody>
+          <a:bodyPr wrap="square" anchor="ctr">
+            <a:spAutoFit/>
+          </a:bodyPr>
+          <a:lstStyle/>
+          <a:p>
+            <a:pPr algn="ctr">
+              <a:lnSpc>
+                <a:spcPct val="105000"/>
+              </a:lnSpc>
+              <a:spcAft>
+                <a:spcPts val="600"/>
+              </a:spcAft>
+            </a:pPr>
+            <a:r>
+              <a:rPr sz="1400" b="1">
+                <a:solidFill>
+                  <a:srgbClr val="FFFFFF"/>
+                </a:solidFill>
+                <a:latin typeface="微软雅黑"/>
+                <a:ea typeface="微软雅黑"/>
+              </a:rPr>
+              <a:t>4 · 集聚</a:t>
+            </a:r>
+          </a:p>
+        </p:txBody>
+      </p:sp>
+      <p:sp>
+        <p:nvSpPr>
+          <p:cNvPr id="29" name="TextBox 28"/>
+          <p:cNvSpPr txBox="1"/>
+          <p:nvPr/>
+        </p:nvSpPr>
+        <p:spPr>
+          <a:xfrm>
+            <a:off x="8787384" y="2743200"/>
+            <a:ext cx="2514600" cy="457200"/>
+          </a:xfrm>
+          <a:prstGeom prst="rect">
+            <a:avLst/>
+          </a:prstGeom>
+          <a:noFill/>
+        </p:spPr>
+        <p:txBody>
+          <a:bodyPr wrap="square" anchor="ctr">
+            <a:spAutoFit/>
+          </a:bodyPr>
+          <a:lstStyle/>
+          <a:p>
+            <a:pPr algn="ctr">
+              <a:lnSpc>
+                <a:spcPct val="105000"/>
+              </a:lnSpc>
+              <a:spcAft>
+                <a:spcPts val="600"/>
+              </a:spcAft>
+            </a:pPr>
+            <a:r>
+              <a:rPr sz="1600" b="1">
+                <a:solidFill>
+                  <a:srgbClr val="FFFFFF"/>
+                </a:solidFill>
+                <a:latin typeface="微软雅黑"/>
+                <a:ea typeface="微软雅黑"/>
+              </a:rPr>
+              <a:t>入驻成链</a:t>
+            </a:r>
+          </a:p>
+        </p:txBody>
+      </p:sp>
+      <p:sp>
+        <p:nvSpPr>
+          <p:cNvPr id="30" name="TextBox 29"/>
+          <p:cNvSpPr txBox="1"/>
+          <p:nvPr/>
+        </p:nvSpPr>
+        <p:spPr>
+          <a:xfrm>
+            <a:off x="8933688" y="3337560"/>
+            <a:ext cx="2240280" cy="1280160"/>
+          </a:xfrm>
+          <a:prstGeom prst="rect">
+            <a:avLst/>
+          </a:prstGeom>
+          <a:noFill/>
+        </p:spPr>
+        <p:txBody>
+          <a:bodyPr wrap="square" anchor="t">
+            <a:spAutoFit/>
+          </a:bodyPr>
+          <a:lstStyle/>
+          <a:p>
+            <a:pPr algn="l">
+              <a:lnSpc>
+                <a:spcPct val="105000"/>
+              </a:lnSpc>
+              <a:spcAft>
+                <a:spcPts val="400"/>
+              </a:spcAft>
+            </a:pPr>
+            <a:r>
+              <a:rPr sz="1150" b="0">
+                <a:solidFill>
+                  <a:srgbClr val="1A2638"/>
+                </a:solidFill>
+                <a:latin typeface="微软雅黑"/>
+                <a:ea typeface="微软雅黑"/>
+              </a:rPr>
+              <a:t>OPC 入驻盘活空间，形成生态链</a:t>
+            </a:r>
+          </a:p>
+          <a:p>
+            <a:pPr algn="l">
+              <a:lnSpc>
+                <a:spcPct val="105000"/>
+              </a:lnSpc>
+              <a:spcAft>
+                <a:spcPts val="400"/>
+              </a:spcAft>
+            </a:pPr>
+            <a:r>
+              <a:rPr sz="1150" b="0">
+                <a:solidFill>
+                  <a:srgbClr val="1A2638"/>
+                </a:solidFill>
+                <a:latin typeface="微软雅黑"/>
+                <a:ea typeface="微软雅黑"/>
+              </a:rPr>
+              <a:t>反哺招商、品牌与资产增值</a:t>
+            </a:r>
+          </a:p>
+        </p:txBody>
+      </p:sp>
+      <p:sp>
+        <p:nvSpPr>
+          <p:cNvPr id="31" name="Rectangle 30"/>
+          <p:cNvSpPr/>
+          <p:nvPr/>
+        </p:nvSpPr>
+        <p:spPr>
+          <a:xfrm>
+            <a:off x="502920" y="4937760"/>
+            <a:ext cx="11155680" cy="1280160"/>
+          </a:xfrm>
+          <a:prstGeom prst="rect">
+            <a:avLst/>
+          </a:prstGeom>
+          <a:solidFill>
+            <a:srgbClr val="0B1F3A"/>
+          </a:solidFill>
+          <a:ln>
+            <a:noFill/>
+          </a:ln>
+          <a:effectLst/>
+        </p:spPr>
+        <p:style>
+          <a:lnRef idx="1">
+            <a:schemeClr val="accent1"/>
+          </a:lnRef>
+          <a:fillRef idx="3">
+            <a:schemeClr val="accent1"/>
+          </a:fillRef>
+          <a:effectRef idx="2">
+            <a:schemeClr val="accent1"/>
+          </a:effectRef>
+          <a:fontRef idx="minor">
+            <a:schemeClr val="lt1"/>
+          </a:fontRef>
+        </p:style>
+        <p:txBody>
+          <a:bodyPr rtlCol="0" anchor="ctr"/>
+          <a:lstStyle/>
+          <a:p>
+            <a:pPr algn="ctr"/>
+          </a:p>
+        </p:txBody>
+      </p:sp>
+      <p:sp>
+        <p:nvSpPr>
+          <p:cNvPr id="32" name="Rectangle 31"/>
+          <p:cNvSpPr/>
+          <p:nvPr/>
+        </p:nvSpPr>
+        <p:spPr>
+          <a:xfrm>
+            <a:off x="502920" y="4937760"/>
+            <a:ext cx="146304" cy="1280160"/>
+          </a:xfrm>
+          <a:prstGeom prst="rect">
+            <a:avLst/>
+          </a:prstGeom>
+          <a:solidFill>
+            <a:srgbClr val="F2B632"/>
+          </a:solidFill>
+          <a:ln>
+            <a:noFill/>
+          </a:ln>
+          <a:effectLst/>
+        </p:spPr>
+        <p:style>
+          <a:lnRef idx="1">
+            <a:schemeClr val="accent1"/>
+          </a:lnRef>
+          <a:fillRef idx="3">
+            <a:schemeClr val="accent1"/>
+          </a:fillRef>
+          <a:effectRef idx="2">
+            <a:schemeClr val="accent1"/>
+          </a:effectRef>
+          <a:fontRef idx="minor">
+            <a:schemeClr val="lt1"/>
+          </a:fontRef>
+        </p:style>
+        <p:txBody>
+          <a:bodyPr rtlCol="0" anchor="ctr"/>
+          <a:lstStyle/>
+          <a:p>
+            <a:pPr algn="ctr"/>
+          </a:p>
+        </p:txBody>
+      </p:sp>
+      <p:sp>
+        <p:nvSpPr>
+          <p:cNvPr id="33" name="TextBox 32"/>
+          <p:cNvSpPr txBox="1"/>
+          <p:nvPr/>
+        </p:nvSpPr>
+        <p:spPr>
+          <a:xfrm>
+            <a:off x="914400" y="5074920"/>
+            <a:ext cx="10515600" cy="1051560"/>
+          </a:xfrm>
+          <a:prstGeom prst="rect">
+            <a:avLst/>
+          </a:prstGeom>
+          <a:noFill/>
+        </p:spPr>
+        <p:txBody>
+          <a:bodyPr wrap="square" anchor="t">
+            <a:spAutoFit/>
+          </a:bodyPr>
+          <a:lstStyle/>
+          <a:p>
+            <a:pPr algn="l">
+              <a:lnSpc>
+                <a:spcPct val="108000"/>
+              </a:lnSpc>
+              <a:spcAft>
+                <a:spcPts val="600"/>
+              </a:spcAft>
+            </a:pPr>
+            <a:r>
+              <a:rPr sz="1600" b="1">
+                <a:solidFill>
+                  <a:srgbClr val="F2B632"/>
+                </a:solidFill>
+                <a:latin typeface="微软雅黑"/>
+                <a:ea typeface="微软雅黑"/>
+              </a:rPr>
+              <a:t>↺  形成生态链 · 服务目前所有 OPC · 闭环自循环：</a:t>
+            </a:r>
+            <a:r>
+              <a:rPr sz="1500" b="0">
+                <a:solidFill>
+                  <a:srgbClr val="FFFFFF"/>
+                </a:solidFill>
+                <a:latin typeface="微软雅黑"/>
+                <a:ea typeface="微软雅黑"/>
+              </a:rPr>
+              <a:t>入驻 OPC 成长后产生新需求与新订单，又反哺孵化与招商，</a:t>
+            </a:r>
+          </a:p>
+          <a:p>
+            <a:pPr algn="l">
+              <a:lnSpc>
+                <a:spcPct val="108000"/>
+              </a:lnSpc>
+              <a:spcAft>
+                <a:spcPts val="600"/>
+              </a:spcAft>
+            </a:pPr>
+            <a:r>
+              <a:rPr sz="1500" b="0">
+                <a:solidFill>
+                  <a:srgbClr val="E8EEF6"/>
+                </a:solidFill>
+                <a:latin typeface="微软雅黑"/>
+                <a:ea typeface="微软雅黑"/>
+              </a:rPr>
+              <a:t>使空间持续满租、产业持续集聚，最终沉淀为可复制到全国的“AI 产业闭环”产品。</a:t>
             </a:r>
           </a:p>
         </p:txBody>
